--- a/Documentation/Fitpulse_Documentation_final.pptx
+++ b/Documentation/Fitpulse_Documentation_final.pptx
@@ -10,11 +10,11 @@
   <p:sldIdLst>
     <p:sldId id="256" r:id="rId2"/>
     <p:sldId id="257" r:id="rId3"/>
-    <p:sldId id="258" r:id="rId4"/>
-    <p:sldId id="259" r:id="rId5"/>
-    <p:sldId id="267" r:id="rId6"/>
-    <p:sldId id="268" r:id="rId7"/>
-    <p:sldId id="298" r:id="rId8"/>
+    <p:sldId id="306" r:id="rId4"/>
+    <p:sldId id="258" r:id="rId5"/>
+    <p:sldId id="305" r:id="rId6"/>
+    <p:sldId id="259" r:id="rId7"/>
+    <p:sldId id="304" r:id="rId8"/>
     <p:sldId id="260" r:id="rId9"/>
     <p:sldId id="261" r:id="rId10"/>
     <p:sldId id="301" r:id="rId11"/>
@@ -364,121 +364,6 @@
   <p:cSld>
     <p:spTree>
       <p:nvGrpSpPr>
-        <p:cNvPr id="1" name="">
-          <a:extLst>
-            <a:ext uri="{FF2B5EF4-FFF2-40B4-BE49-F238E27FC236}">
-              <a16:creationId xmlns:a16="http://schemas.microsoft.com/office/drawing/2014/main" id="{BDB458D1-7498-2AA2-AACF-58B82F177974}"/>
-            </a:ext>
-          </a:extLst>
-        </p:cNvPr>
-        <p:cNvGrpSpPr/>
-        <p:nvPr/>
-      </p:nvGrpSpPr>
-      <p:grpSpPr>
-        <a:xfrm>
-          <a:off x="0" y="0"/>
-          <a:ext cx="0" cy="0"/>
-          <a:chOff x="0" y="0"/>
-          <a:chExt cx="0" cy="0"/>
-        </a:xfrm>
-      </p:grpSpPr>
-      <p:sp>
-        <p:nvSpPr>
-          <p:cNvPr id="2" name="Slide Image Placeholder 1">
-            <a:extLst>
-              <a:ext uri="{FF2B5EF4-FFF2-40B4-BE49-F238E27FC236}">
-                <a16:creationId xmlns:a16="http://schemas.microsoft.com/office/drawing/2014/main" id="{A8324E10-98BE-24DE-0450-36C62FFF0BFF}"/>
-              </a:ext>
-            </a:extLst>
-          </p:cNvPr>
-          <p:cNvSpPr>
-            <a:spLocks noGrp="1" noRot="1" noChangeAspect="1"/>
-          </p:cNvSpPr>
-          <p:nvPr>
-            <p:ph type="sldImg"/>
-          </p:nvPr>
-        </p:nvSpPr>
-        <p:spPr/>
-        <p:txBody>
-          <a:bodyPr/>
-          <a:lstStyle/>
-          <a:p>
-            <a:endParaRPr lang="en-IN"/>
-          </a:p>
-        </p:txBody>
-      </p:sp>
-      <p:sp>
-        <p:nvSpPr>
-          <p:cNvPr id="3" name="Notes Placeholder 2">
-            <a:extLst>
-              <a:ext uri="{FF2B5EF4-FFF2-40B4-BE49-F238E27FC236}">
-                <a16:creationId xmlns:a16="http://schemas.microsoft.com/office/drawing/2014/main" id="{91CAA9D3-DA82-C415-2C2D-26D88A50430A}"/>
-              </a:ext>
-            </a:extLst>
-          </p:cNvPr>
-          <p:cNvSpPr>
-            <a:spLocks noGrp="1"/>
-          </p:cNvSpPr>
-          <p:nvPr>
-            <p:ph type="body" idx="1"/>
-          </p:nvPr>
-        </p:nvSpPr>
-        <p:spPr/>
-        <p:txBody>
-          <a:bodyPr/>
-          <a:lstStyle/>
-          <a:p>
-            <a:endParaRPr lang="en-US" dirty="0"/>
-          </a:p>
-        </p:txBody>
-      </p:sp>
-      <p:sp>
-        <p:nvSpPr>
-          <p:cNvPr id="4" name="Slide Number Placeholder 3">
-            <a:extLst>
-              <a:ext uri="{FF2B5EF4-FFF2-40B4-BE49-F238E27FC236}">
-                <a16:creationId xmlns:a16="http://schemas.microsoft.com/office/drawing/2014/main" id="{B2E681EA-AC6E-7794-6704-717F5E664905}"/>
-              </a:ext>
-            </a:extLst>
-          </p:cNvPr>
-          <p:cNvSpPr>
-            <a:spLocks noGrp="1"/>
-          </p:cNvSpPr>
-          <p:nvPr>
-            <p:ph type="sldNum" sz="quarter" idx="10"/>
-          </p:nvPr>
-        </p:nvSpPr>
-        <p:spPr/>
-        <p:txBody>
-          <a:bodyPr/>
-          <a:lstStyle/>
-          <a:p>
-            <a:fld id="{F7021451-1387-4CA6-816F-3879F97B5CBC}" type="slidenum">
-              <a:rPr lang="en-US"/>
-              <a:t>10</a:t>
-            </a:fld>
-            <a:endParaRPr lang="en-US"/>
-          </a:p>
-        </p:txBody>
-      </p:sp>
-    </p:spTree>
-    <p:extLst>
-      <p:ext uri="{BB962C8B-B14F-4D97-AF65-F5344CB8AC3E}">
-        <p14:creationId xmlns:p14="http://schemas.microsoft.com/office/powerpoint/2010/main" val="50763697"/>
-      </p:ext>
-    </p:extLst>
-  </p:cSld>
-  <p:clrMapOvr>
-    <a:masterClrMapping/>
-  </p:clrMapOvr>
-</p:notes>
-</file>
-
-<file path=ppt/notesSlides/notesSlide11.xml><?xml version="1.0" encoding="utf-8"?>
-<p:notes xmlns:a="http://schemas.openxmlformats.org/drawingml/2006/main" xmlns:r="http://schemas.openxmlformats.org/officeDocument/2006/relationships" xmlns:p="http://schemas.openxmlformats.org/presentationml/2006/main">
-  <p:cSld>
-    <p:spTree>
-      <p:nvGrpSpPr>
         <p:cNvPr id="1" name=""/>
         <p:cNvGrpSpPr/>
         <p:nvPr/>
@@ -565,7 +450,7 @@
 </p:notes>
 </file>
 
-<file path=ppt/notesSlides/notesSlide12.xml><?xml version="1.0" encoding="utf-8"?>
+<file path=ppt/notesSlides/notesSlide11.xml><?xml version="1.0" encoding="utf-8"?>
 <p:notes xmlns:a="http://schemas.openxmlformats.org/drawingml/2006/main" xmlns:r="http://schemas.openxmlformats.org/officeDocument/2006/relationships" xmlns:p="http://schemas.openxmlformats.org/presentationml/2006/main">
   <p:cSld>
     <p:spTree>
@@ -680,7 +565,7 @@
 </p:notes>
 </file>
 
-<file path=ppt/notesSlides/notesSlide13.xml><?xml version="1.0" encoding="utf-8"?>
+<file path=ppt/notesSlides/notesSlide12.xml><?xml version="1.0" encoding="utf-8"?>
 <p:notes xmlns:a="http://schemas.openxmlformats.org/drawingml/2006/main" xmlns:r="http://schemas.openxmlformats.org/officeDocument/2006/relationships" xmlns:p="http://schemas.openxmlformats.org/presentationml/2006/main">
   <p:cSld>
     <p:spTree>
@@ -771,7 +656,7 @@
 </p:notes>
 </file>
 
-<file path=ppt/notesSlides/notesSlide14.xml><?xml version="1.0" encoding="utf-8"?>
+<file path=ppt/notesSlides/notesSlide13.xml><?xml version="1.0" encoding="utf-8"?>
 <p:notes xmlns:a="http://schemas.openxmlformats.org/drawingml/2006/main" xmlns:r="http://schemas.openxmlformats.org/officeDocument/2006/relationships" xmlns:p="http://schemas.openxmlformats.org/presentationml/2006/main">
   <p:cSld>
     <p:spTree>
@@ -886,7 +771,7 @@
 </p:notes>
 </file>
 
-<file path=ppt/notesSlides/notesSlide15.xml><?xml version="1.0" encoding="utf-8"?>
+<file path=ppt/notesSlides/notesSlide14.xml><?xml version="1.0" encoding="utf-8"?>
 <p:notes xmlns:a="http://schemas.openxmlformats.org/drawingml/2006/main" xmlns:r="http://schemas.openxmlformats.org/officeDocument/2006/relationships" xmlns:p="http://schemas.openxmlformats.org/presentationml/2006/main">
   <p:cSld>
     <p:spTree>
@@ -1001,7 +886,7 @@
 </p:notes>
 </file>
 
-<file path=ppt/notesSlides/notesSlide16.xml><?xml version="1.0" encoding="utf-8"?>
+<file path=ppt/notesSlides/notesSlide15.xml><?xml version="1.0" encoding="utf-8"?>
 <p:notes xmlns:a="http://schemas.openxmlformats.org/drawingml/2006/main" xmlns:r="http://schemas.openxmlformats.org/officeDocument/2006/relationships" xmlns:p="http://schemas.openxmlformats.org/presentationml/2006/main">
   <p:cSld>
     <p:spTree>
@@ -1092,7 +977,7 @@
 </p:notes>
 </file>
 
-<file path=ppt/notesSlides/notesSlide17.xml><?xml version="1.0" encoding="utf-8"?>
+<file path=ppt/notesSlides/notesSlide16.xml><?xml version="1.0" encoding="utf-8"?>
 <p:notes xmlns:a="http://schemas.openxmlformats.org/drawingml/2006/main" xmlns:r="http://schemas.openxmlformats.org/officeDocument/2006/relationships" xmlns:p="http://schemas.openxmlformats.org/presentationml/2006/main">
   <p:cSld>
     <p:spTree>
@@ -1207,7 +1092,7 @@
 </p:notes>
 </file>
 
-<file path=ppt/notesSlides/notesSlide18.xml><?xml version="1.0" encoding="utf-8"?>
+<file path=ppt/notesSlides/notesSlide17.xml><?xml version="1.0" encoding="utf-8"?>
 <p:notes xmlns:a="http://schemas.openxmlformats.org/drawingml/2006/main" xmlns:r="http://schemas.openxmlformats.org/officeDocument/2006/relationships" xmlns:p="http://schemas.openxmlformats.org/presentationml/2006/main">
   <p:cSld>
     <p:spTree>
@@ -1322,7 +1207,7 @@
 </p:notes>
 </file>
 
-<file path=ppt/notesSlides/notesSlide19.xml><?xml version="1.0" encoding="utf-8"?>
+<file path=ppt/notesSlides/notesSlide18.xml><?xml version="1.0" encoding="utf-8"?>
 <p:notes xmlns:a="http://schemas.openxmlformats.org/drawingml/2006/main" xmlns:r="http://schemas.openxmlformats.org/officeDocument/2006/relationships" xmlns:p="http://schemas.openxmlformats.org/presentationml/2006/main">
   <p:cSld>
     <p:spTree>
@@ -1428,6 +1313,121 @@
     <p:extLst>
       <p:ext uri="{BB962C8B-B14F-4D97-AF65-F5344CB8AC3E}">
         <p14:creationId xmlns:p14="http://schemas.microsoft.com/office/powerpoint/2010/main" val="3186505328"/>
+      </p:ext>
+    </p:extLst>
+  </p:cSld>
+  <p:clrMapOvr>
+    <a:masterClrMapping/>
+  </p:clrMapOvr>
+</p:notes>
+</file>
+
+<file path=ppt/notesSlides/notesSlide19.xml><?xml version="1.0" encoding="utf-8"?>
+<p:notes xmlns:a="http://schemas.openxmlformats.org/drawingml/2006/main" xmlns:r="http://schemas.openxmlformats.org/officeDocument/2006/relationships" xmlns:p="http://schemas.openxmlformats.org/presentationml/2006/main">
+  <p:cSld>
+    <p:spTree>
+      <p:nvGrpSpPr>
+        <p:cNvPr id="1" name="">
+          <a:extLst>
+            <a:ext uri="{FF2B5EF4-FFF2-40B4-BE49-F238E27FC236}">
+              <a16:creationId xmlns:a16="http://schemas.microsoft.com/office/drawing/2014/main" id="{20627DF4-06F1-FFC1-A061-D1962C11FC69}"/>
+            </a:ext>
+          </a:extLst>
+        </p:cNvPr>
+        <p:cNvGrpSpPr/>
+        <p:nvPr/>
+      </p:nvGrpSpPr>
+      <p:grpSpPr>
+        <a:xfrm>
+          <a:off x="0" y="0"/>
+          <a:ext cx="0" cy="0"/>
+          <a:chOff x="0" y="0"/>
+          <a:chExt cx="0" cy="0"/>
+        </a:xfrm>
+      </p:grpSpPr>
+      <p:sp>
+        <p:nvSpPr>
+          <p:cNvPr id="2" name="Slide Image Placeholder 1">
+            <a:extLst>
+              <a:ext uri="{FF2B5EF4-FFF2-40B4-BE49-F238E27FC236}">
+                <a16:creationId xmlns:a16="http://schemas.microsoft.com/office/drawing/2014/main" id="{363738E2-9622-1BBF-856D-F0C47D5E50B3}"/>
+              </a:ext>
+            </a:extLst>
+          </p:cNvPr>
+          <p:cNvSpPr>
+            <a:spLocks noGrp="1" noRot="1" noChangeAspect="1"/>
+          </p:cNvSpPr>
+          <p:nvPr>
+            <p:ph type="sldImg"/>
+          </p:nvPr>
+        </p:nvSpPr>
+        <p:spPr/>
+        <p:txBody>
+          <a:bodyPr/>
+          <a:lstStyle/>
+          <a:p>
+            <a:endParaRPr lang="en-IN"/>
+          </a:p>
+        </p:txBody>
+      </p:sp>
+      <p:sp>
+        <p:nvSpPr>
+          <p:cNvPr id="3" name="Notes Placeholder 2">
+            <a:extLst>
+              <a:ext uri="{FF2B5EF4-FFF2-40B4-BE49-F238E27FC236}">
+                <a16:creationId xmlns:a16="http://schemas.microsoft.com/office/drawing/2014/main" id="{BA5A3A17-F4AD-BB58-9E8F-98DD38197BD3}"/>
+              </a:ext>
+            </a:extLst>
+          </p:cNvPr>
+          <p:cNvSpPr>
+            <a:spLocks noGrp="1"/>
+          </p:cNvSpPr>
+          <p:nvPr>
+            <p:ph type="body" idx="1"/>
+          </p:nvPr>
+        </p:nvSpPr>
+        <p:spPr/>
+        <p:txBody>
+          <a:bodyPr/>
+          <a:lstStyle/>
+          <a:p>
+            <a:endParaRPr lang="en-US" dirty="0"/>
+          </a:p>
+        </p:txBody>
+      </p:sp>
+      <p:sp>
+        <p:nvSpPr>
+          <p:cNvPr id="4" name="Slide Number Placeholder 3">
+            <a:extLst>
+              <a:ext uri="{FF2B5EF4-FFF2-40B4-BE49-F238E27FC236}">
+                <a16:creationId xmlns:a16="http://schemas.microsoft.com/office/drawing/2014/main" id="{14E963B7-E1B9-4B83-F9C6-83647CAFAE53}"/>
+              </a:ext>
+            </a:extLst>
+          </p:cNvPr>
+          <p:cNvSpPr>
+            <a:spLocks noGrp="1"/>
+          </p:cNvSpPr>
+          <p:nvPr>
+            <p:ph type="sldNum" sz="quarter" idx="10"/>
+          </p:nvPr>
+        </p:nvSpPr>
+        <p:spPr/>
+        <p:txBody>
+          <a:bodyPr/>
+          <a:lstStyle/>
+          <a:p>
+            <a:fld id="{F7021451-1387-4CA6-816F-3879F97B5CBC}" type="slidenum">
+              <a:rPr lang="en-US"/>
+              <a:t>22</a:t>
+            </a:fld>
+            <a:endParaRPr lang="en-US"/>
+          </a:p>
+        </p:txBody>
+      </p:sp>
+    </p:spTree>
+    <p:extLst>
+      <p:ext uri="{BB962C8B-B14F-4D97-AF65-F5344CB8AC3E}">
+        <p14:creationId xmlns:p14="http://schemas.microsoft.com/office/powerpoint/2010/main" val="2278841191"/>
       </p:ext>
     </p:extLst>
   </p:cSld>
@@ -1529,121 +1529,6 @@
 </file>
 
 <file path=ppt/notesSlides/notesSlide20.xml><?xml version="1.0" encoding="utf-8"?>
-<p:notes xmlns:a="http://schemas.openxmlformats.org/drawingml/2006/main" xmlns:r="http://schemas.openxmlformats.org/officeDocument/2006/relationships" xmlns:p="http://schemas.openxmlformats.org/presentationml/2006/main">
-  <p:cSld>
-    <p:spTree>
-      <p:nvGrpSpPr>
-        <p:cNvPr id="1" name="">
-          <a:extLst>
-            <a:ext uri="{FF2B5EF4-FFF2-40B4-BE49-F238E27FC236}">
-              <a16:creationId xmlns:a16="http://schemas.microsoft.com/office/drawing/2014/main" id="{20627DF4-06F1-FFC1-A061-D1962C11FC69}"/>
-            </a:ext>
-          </a:extLst>
-        </p:cNvPr>
-        <p:cNvGrpSpPr/>
-        <p:nvPr/>
-      </p:nvGrpSpPr>
-      <p:grpSpPr>
-        <a:xfrm>
-          <a:off x="0" y="0"/>
-          <a:ext cx="0" cy="0"/>
-          <a:chOff x="0" y="0"/>
-          <a:chExt cx="0" cy="0"/>
-        </a:xfrm>
-      </p:grpSpPr>
-      <p:sp>
-        <p:nvSpPr>
-          <p:cNvPr id="2" name="Slide Image Placeholder 1">
-            <a:extLst>
-              <a:ext uri="{FF2B5EF4-FFF2-40B4-BE49-F238E27FC236}">
-                <a16:creationId xmlns:a16="http://schemas.microsoft.com/office/drawing/2014/main" id="{363738E2-9622-1BBF-856D-F0C47D5E50B3}"/>
-              </a:ext>
-            </a:extLst>
-          </p:cNvPr>
-          <p:cNvSpPr>
-            <a:spLocks noGrp="1" noRot="1" noChangeAspect="1"/>
-          </p:cNvSpPr>
-          <p:nvPr>
-            <p:ph type="sldImg"/>
-          </p:nvPr>
-        </p:nvSpPr>
-        <p:spPr/>
-        <p:txBody>
-          <a:bodyPr/>
-          <a:lstStyle/>
-          <a:p>
-            <a:endParaRPr lang="en-IN"/>
-          </a:p>
-        </p:txBody>
-      </p:sp>
-      <p:sp>
-        <p:nvSpPr>
-          <p:cNvPr id="3" name="Notes Placeholder 2">
-            <a:extLst>
-              <a:ext uri="{FF2B5EF4-FFF2-40B4-BE49-F238E27FC236}">
-                <a16:creationId xmlns:a16="http://schemas.microsoft.com/office/drawing/2014/main" id="{BA5A3A17-F4AD-BB58-9E8F-98DD38197BD3}"/>
-              </a:ext>
-            </a:extLst>
-          </p:cNvPr>
-          <p:cNvSpPr>
-            <a:spLocks noGrp="1"/>
-          </p:cNvSpPr>
-          <p:nvPr>
-            <p:ph type="body" idx="1"/>
-          </p:nvPr>
-        </p:nvSpPr>
-        <p:spPr/>
-        <p:txBody>
-          <a:bodyPr/>
-          <a:lstStyle/>
-          <a:p>
-            <a:endParaRPr lang="en-US" dirty="0"/>
-          </a:p>
-        </p:txBody>
-      </p:sp>
-      <p:sp>
-        <p:nvSpPr>
-          <p:cNvPr id="4" name="Slide Number Placeholder 3">
-            <a:extLst>
-              <a:ext uri="{FF2B5EF4-FFF2-40B4-BE49-F238E27FC236}">
-                <a16:creationId xmlns:a16="http://schemas.microsoft.com/office/drawing/2014/main" id="{14E963B7-E1B9-4B83-F9C6-83647CAFAE53}"/>
-              </a:ext>
-            </a:extLst>
-          </p:cNvPr>
-          <p:cNvSpPr>
-            <a:spLocks noGrp="1"/>
-          </p:cNvSpPr>
-          <p:nvPr>
-            <p:ph type="sldNum" sz="quarter" idx="10"/>
-          </p:nvPr>
-        </p:nvSpPr>
-        <p:spPr/>
-        <p:txBody>
-          <a:bodyPr/>
-          <a:lstStyle/>
-          <a:p>
-            <a:fld id="{F7021451-1387-4CA6-816F-3879F97B5CBC}" type="slidenum">
-              <a:rPr lang="en-US"/>
-              <a:t>22</a:t>
-            </a:fld>
-            <a:endParaRPr lang="en-US"/>
-          </a:p>
-        </p:txBody>
-      </p:sp>
-    </p:spTree>
-    <p:extLst>
-      <p:ext uri="{BB962C8B-B14F-4D97-AF65-F5344CB8AC3E}">
-        <p14:creationId xmlns:p14="http://schemas.microsoft.com/office/powerpoint/2010/main" val="2278841191"/>
-      </p:ext>
-    </p:extLst>
-  </p:cSld>
-  <p:clrMapOvr>
-    <a:masterClrMapping/>
-  </p:clrMapOvr>
-</p:notes>
-</file>
-
-<file path=ppt/notesSlides/notesSlide21.xml><?xml version="1.0" encoding="utf-8"?>
 <p:notes xmlns:a="http://schemas.openxmlformats.org/drawingml/2006/main" xmlns:r="http://schemas.openxmlformats.org/officeDocument/2006/relationships" xmlns:p="http://schemas.openxmlformats.org/presentationml/2006/main">
   <p:cSld>
     <p:spTree>
@@ -1830,7 +1715,7 @@
           <a:p>
             <a:fld id="{F7021451-1387-4CA6-816F-3879F97B5CBC}" type="slidenum">
               <a:rPr lang="en-US"/>
-              <a:t>3</a:t>
+              <a:t>4</a:t>
             </a:fld>
             <a:endParaRPr lang="en-US"/>
           </a:p>
@@ -1854,7 +1739,13 @@
   <p:cSld>
     <p:spTree>
       <p:nvGrpSpPr>
-        <p:cNvPr id="1" name=""/>
+        <p:cNvPr id="1" name="">
+          <a:extLst>
+            <a:ext uri="{FF2B5EF4-FFF2-40B4-BE49-F238E27FC236}">
+              <a16:creationId xmlns:a16="http://schemas.microsoft.com/office/drawing/2014/main" id="{72C705A3-4738-2CA1-460C-D3DD229298C7}"/>
+            </a:ext>
+          </a:extLst>
+        </p:cNvPr>
         <p:cNvGrpSpPr/>
         <p:nvPr/>
       </p:nvGrpSpPr>
@@ -1868,7 +1759,13 @@
       </p:grpSpPr>
       <p:sp>
         <p:nvSpPr>
-          <p:cNvPr id="2" name="Slide Image Placeholder 1"/>
+          <p:cNvPr id="2" name="Slide Image Placeholder 1">
+            <a:extLst>
+              <a:ext uri="{FF2B5EF4-FFF2-40B4-BE49-F238E27FC236}">
+                <a16:creationId xmlns:a16="http://schemas.microsoft.com/office/drawing/2014/main" id="{30141CC8-BC2E-C724-5FC6-037AB34D886B}"/>
+              </a:ext>
+            </a:extLst>
+          </p:cNvPr>
           <p:cNvSpPr>
             <a:spLocks noGrp="1" noRot="1" noChangeAspect="1"/>
           </p:cNvSpPr>
@@ -1887,7 +1784,13 @@
       </p:sp>
       <p:sp>
         <p:nvSpPr>
-          <p:cNvPr id="3" name="Notes Placeholder 2"/>
+          <p:cNvPr id="3" name="Notes Placeholder 2">
+            <a:extLst>
+              <a:ext uri="{FF2B5EF4-FFF2-40B4-BE49-F238E27FC236}">
+                <a16:creationId xmlns:a16="http://schemas.microsoft.com/office/drawing/2014/main" id="{E05D0BFD-B32F-073E-DB48-5E70CBA10915}"/>
+              </a:ext>
+            </a:extLst>
+          </p:cNvPr>
           <p:cNvSpPr>
             <a:spLocks noGrp="1"/>
           </p:cNvSpPr>
@@ -1906,7 +1809,13 @@
       </p:sp>
       <p:sp>
         <p:nvSpPr>
-          <p:cNvPr id="4" name="Slide Number Placeholder 3"/>
+          <p:cNvPr id="4" name="Slide Number Placeholder 3">
+            <a:extLst>
+              <a:ext uri="{FF2B5EF4-FFF2-40B4-BE49-F238E27FC236}">
+                <a16:creationId xmlns:a16="http://schemas.microsoft.com/office/drawing/2014/main" id="{B9FFC729-D976-C40F-7F68-6A14F1C84A35}"/>
+              </a:ext>
+            </a:extLst>
+          </p:cNvPr>
           <p:cNvSpPr>
             <a:spLocks noGrp="1"/>
           </p:cNvSpPr>
@@ -1921,7 +1830,7 @@
           <a:p>
             <a:fld id="{F7021451-1387-4CA6-816F-3879F97B5CBC}" type="slidenum">
               <a:rPr lang="en-US"/>
-              <a:t>4</a:t>
+              <a:t>5</a:t>
             </a:fld>
             <a:endParaRPr lang="en-US"/>
           </a:p>
@@ -1930,7 +1839,7 @@
     </p:spTree>
     <p:extLst>
       <p:ext uri="{BB962C8B-B14F-4D97-AF65-F5344CB8AC3E}">
-        <p14:creationId xmlns:p14="http://schemas.microsoft.com/office/powerpoint/2010/main" val="1024086991"/>
+        <p14:creationId xmlns:p14="http://schemas.microsoft.com/office/powerpoint/2010/main" val="1283265530"/>
       </p:ext>
     </p:extLst>
   </p:cSld>
@@ -1945,13 +1854,7 @@
   <p:cSld>
     <p:spTree>
       <p:nvGrpSpPr>
-        <p:cNvPr id="1" name="">
-          <a:extLst>
-            <a:ext uri="{FF2B5EF4-FFF2-40B4-BE49-F238E27FC236}">
-              <a16:creationId xmlns:a16="http://schemas.microsoft.com/office/drawing/2014/main" id="{477BF224-8988-FE19-F98D-BE1616AFA11F}"/>
-            </a:ext>
-          </a:extLst>
-        </p:cNvPr>
+        <p:cNvPr id="1" name=""/>
         <p:cNvGrpSpPr/>
         <p:nvPr/>
       </p:nvGrpSpPr>
@@ -1965,13 +1868,7 @@
       </p:grpSpPr>
       <p:sp>
         <p:nvSpPr>
-          <p:cNvPr id="2" name="Slide Image Placeholder 1">
-            <a:extLst>
-              <a:ext uri="{FF2B5EF4-FFF2-40B4-BE49-F238E27FC236}">
-                <a16:creationId xmlns:a16="http://schemas.microsoft.com/office/drawing/2014/main" id="{8ED34646-9A46-A35C-836A-2FFB8E996E99}"/>
-              </a:ext>
-            </a:extLst>
-          </p:cNvPr>
+          <p:cNvPr id="2" name="Slide Image Placeholder 1"/>
           <p:cNvSpPr>
             <a:spLocks noGrp="1" noRot="1" noChangeAspect="1"/>
           </p:cNvSpPr>
@@ -1990,13 +1887,7 @@
       </p:sp>
       <p:sp>
         <p:nvSpPr>
-          <p:cNvPr id="3" name="Notes Placeholder 2">
-            <a:extLst>
-              <a:ext uri="{FF2B5EF4-FFF2-40B4-BE49-F238E27FC236}">
-                <a16:creationId xmlns:a16="http://schemas.microsoft.com/office/drawing/2014/main" id="{DB1B4814-E34C-E0E1-E4B9-FFDB93EDCF41}"/>
-              </a:ext>
-            </a:extLst>
-          </p:cNvPr>
+          <p:cNvPr id="3" name="Notes Placeholder 2"/>
           <p:cNvSpPr>
             <a:spLocks noGrp="1"/>
           </p:cNvSpPr>
@@ -2015,13 +1906,7 @@
       </p:sp>
       <p:sp>
         <p:nvSpPr>
-          <p:cNvPr id="4" name="Slide Number Placeholder 3">
-            <a:extLst>
-              <a:ext uri="{FF2B5EF4-FFF2-40B4-BE49-F238E27FC236}">
-                <a16:creationId xmlns:a16="http://schemas.microsoft.com/office/drawing/2014/main" id="{02E2673A-2123-74B8-F5D5-992BA57C817A}"/>
-              </a:ext>
-            </a:extLst>
-          </p:cNvPr>
+          <p:cNvPr id="4" name="Slide Number Placeholder 3"/>
           <p:cNvSpPr>
             <a:spLocks noGrp="1"/>
           </p:cNvSpPr>
@@ -2036,7 +1921,7 @@
           <a:p>
             <a:fld id="{F7021451-1387-4CA6-816F-3879F97B5CBC}" type="slidenum">
               <a:rPr lang="en-US"/>
-              <a:t>5</a:t>
+              <a:t>6</a:t>
             </a:fld>
             <a:endParaRPr lang="en-US"/>
           </a:p>
@@ -2045,7 +1930,7 @@
     </p:spTree>
     <p:extLst>
       <p:ext uri="{BB962C8B-B14F-4D97-AF65-F5344CB8AC3E}">
-        <p14:creationId xmlns:p14="http://schemas.microsoft.com/office/powerpoint/2010/main" val="4121263098"/>
+        <p14:creationId xmlns:p14="http://schemas.microsoft.com/office/powerpoint/2010/main" val="1024086991"/>
       </p:ext>
     </p:extLst>
   </p:cSld>
@@ -2063,7 +1948,7 @@
         <p:cNvPr id="1" name="">
           <a:extLst>
             <a:ext uri="{FF2B5EF4-FFF2-40B4-BE49-F238E27FC236}">
-              <a16:creationId xmlns:a16="http://schemas.microsoft.com/office/drawing/2014/main" id="{4C15C45E-5A26-8126-B42F-F1A99FBE039C}"/>
+              <a16:creationId xmlns:a16="http://schemas.microsoft.com/office/drawing/2014/main" id="{C0E70290-BA7B-8681-CCCD-A0FC2BC15692}"/>
             </a:ext>
           </a:extLst>
         </p:cNvPr>
@@ -2083,7 +1968,7 @@
           <p:cNvPr id="2" name="Slide Image Placeholder 1">
             <a:extLst>
               <a:ext uri="{FF2B5EF4-FFF2-40B4-BE49-F238E27FC236}">
-                <a16:creationId xmlns:a16="http://schemas.microsoft.com/office/drawing/2014/main" id="{51C40369-220B-EFF4-E9B3-787D1FD787EA}"/>
+                <a16:creationId xmlns:a16="http://schemas.microsoft.com/office/drawing/2014/main" id="{9A135AAD-4AC9-DD99-836C-A6B892FC9659}"/>
               </a:ext>
             </a:extLst>
           </p:cNvPr>
@@ -2108,7 +1993,7 @@
           <p:cNvPr id="3" name="Notes Placeholder 2">
             <a:extLst>
               <a:ext uri="{FF2B5EF4-FFF2-40B4-BE49-F238E27FC236}">
-                <a16:creationId xmlns:a16="http://schemas.microsoft.com/office/drawing/2014/main" id="{9C819A00-B785-B4DF-62EF-65FAE45C0C53}"/>
+                <a16:creationId xmlns:a16="http://schemas.microsoft.com/office/drawing/2014/main" id="{9C3FCF68-77E1-AFC3-1FBA-18EC424AF7BF}"/>
               </a:ext>
             </a:extLst>
           </p:cNvPr>
@@ -2133,7 +2018,7 @@
           <p:cNvPr id="4" name="Slide Number Placeholder 3">
             <a:extLst>
               <a:ext uri="{FF2B5EF4-FFF2-40B4-BE49-F238E27FC236}">
-                <a16:creationId xmlns:a16="http://schemas.microsoft.com/office/drawing/2014/main" id="{E803B680-61C1-0DC2-2D76-F8D4272F05BC}"/>
+                <a16:creationId xmlns:a16="http://schemas.microsoft.com/office/drawing/2014/main" id="{67D804BE-BB54-97D8-C63D-52AC5CB5D1D7}"/>
               </a:ext>
             </a:extLst>
           </p:cNvPr>
@@ -2151,7 +2036,7 @@
           <a:p>
             <a:fld id="{F7021451-1387-4CA6-816F-3879F97B5CBC}" type="slidenum">
               <a:rPr lang="en-US"/>
-              <a:t>6</a:t>
+              <a:t>7</a:t>
             </a:fld>
             <a:endParaRPr lang="en-US"/>
           </a:p>
@@ -2160,7 +2045,7 @@
     </p:spTree>
     <p:extLst>
       <p:ext uri="{BB962C8B-B14F-4D97-AF65-F5344CB8AC3E}">
-        <p14:creationId xmlns:p14="http://schemas.microsoft.com/office/powerpoint/2010/main" val="3478652053"/>
+        <p14:creationId xmlns:p14="http://schemas.microsoft.com/office/powerpoint/2010/main" val="493800491"/>
       </p:ext>
     </p:extLst>
   </p:cSld>
@@ -2175,13 +2060,7 @@
   <p:cSld>
     <p:spTree>
       <p:nvGrpSpPr>
-        <p:cNvPr id="1" name="">
-          <a:extLst>
-            <a:ext uri="{FF2B5EF4-FFF2-40B4-BE49-F238E27FC236}">
-              <a16:creationId xmlns:a16="http://schemas.microsoft.com/office/drawing/2014/main" id="{06C422C0-A7EF-03A6-74BD-72E171630A66}"/>
-            </a:ext>
-          </a:extLst>
-        </p:cNvPr>
+        <p:cNvPr id="1" name=""/>
         <p:cNvGrpSpPr/>
         <p:nvPr/>
       </p:nvGrpSpPr>
@@ -2195,13 +2074,7 @@
       </p:grpSpPr>
       <p:sp>
         <p:nvSpPr>
-          <p:cNvPr id="2" name="Slide Image Placeholder 1">
-            <a:extLst>
-              <a:ext uri="{FF2B5EF4-FFF2-40B4-BE49-F238E27FC236}">
-                <a16:creationId xmlns:a16="http://schemas.microsoft.com/office/drawing/2014/main" id="{761DCE40-9487-BDCB-BC2C-41E85CF2AC1F}"/>
-              </a:ext>
-            </a:extLst>
-          </p:cNvPr>
+          <p:cNvPr id="2" name="Slide Image Placeholder 1"/>
           <p:cNvSpPr>
             <a:spLocks noGrp="1" noRot="1" noChangeAspect="1"/>
           </p:cNvSpPr>
@@ -2220,13 +2093,7 @@
       </p:sp>
       <p:sp>
         <p:nvSpPr>
-          <p:cNvPr id="3" name="Notes Placeholder 2">
-            <a:extLst>
-              <a:ext uri="{FF2B5EF4-FFF2-40B4-BE49-F238E27FC236}">
-                <a16:creationId xmlns:a16="http://schemas.microsoft.com/office/drawing/2014/main" id="{54455BB9-B798-906D-7A77-C64392A68846}"/>
-              </a:ext>
-            </a:extLst>
-          </p:cNvPr>
+          <p:cNvPr id="3" name="Notes Placeholder 2"/>
           <p:cNvSpPr>
             <a:spLocks noGrp="1"/>
           </p:cNvSpPr>
@@ -2245,13 +2112,7 @@
       </p:sp>
       <p:sp>
         <p:nvSpPr>
-          <p:cNvPr id="4" name="Slide Number Placeholder 3">
-            <a:extLst>
-              <a:ext uri="{FF2B5EF4-FFF2-40B4-BE49-F238E27FC236}">
-                <a16:creationId xmlns:a16="http://schemas.microsoft.com/office/drawing/2014/main" id="{93A2CEB2-6B30-09C6-33D9-6E9DE9C069BD}"/>
-              </a:ext>
-            </a:extLst>
-          </p:cNvPr>
+          <p:cNvPr id="4" name="Slide Number Placeholder 3"/>
           <p:cNvSpPr>
             <a:spLocks noGrp="1"/>
           </p:cNvSpPr>
@@ -2266,7 +2127,7 @@
           <a:p>
             <a:fld id="{F7021451-1387-4CA6-816F-3879F97B5CBC}" type="slidenum">
               <a:rPr lang="en-US"/>
-              <a:t>7</a:t>
+              <a:t>8</a:t>
             </a:fld>
             <a:endParaRPr lang="en-US"/>
           </a:p>
@@ -2275,7 +2136,7 @@
     </p:spTree>
     <p:extLst>
       <p:ext uri="{BB962C8B-B14F-4D97-AF65-F5344CB8AC3E}">
-        <p14:creationId xmlns:p14="http://schemas.microsoft.com/office/powerpoint/2010/main" val="2410303379"/>
+        <p14:creationId xmlns:p14="http://schemas.microsoft.com/office/powerpoint/2010/main" val="1024086991"/>
       </p:ext>
     </p:extLst>
   </p:cSld>
@@ -2357,7 +2218,7 @@
           <a:p>
             <a:fld id="{F7021451-1387-4CA6-816F-3879F97B5CBC}" type="slidenum">
               <a:rPr lang="en-US"/>
-              <a:t>8</a:t>
+              <a:t>9</a:t>
             </a:fld>
             <a:endParaRPr lang="en-US"/>
           </a:p>
@@ -2381,7 +2242,13 @@
   <p:cSld>
     <p:spTree>
       <p:nvGrpSpPr>
-        <p:cNvPr id="1" name=""/>
+        <p:cNvPr id="1" name="">
+          <a:extLst>
+            <a:ext uri="{FF2B5EF4-FFF2-40B4-BE49-F238E27FC236}">
+              <a16:creationId xmlns:a16="http://schemas.microsoft.com/office/drawing/2014/main" id="{BDB458D1-7498-2AA2-AACF-58B82F177974}"/>
+            </a:ext>
+          </a:extLst>
+        </p:cNvPr>
         <p:cNvGrpSpPr/>
         <p:nvPr/>
       </p:nvGrpSpPr>
@@ -2395,7 +2262,13 @@
       </p:grpSpPr>
       <p:sp>
         <p:nvSpPr>
-          <p:cNvPr id="2" name="Slide Image Placeholder 1"/>
+          <p:cNvPr id="2" name="Slide Image Placeholder 1">
+            <a:extLst>
+              <a:ext uri="{FF2B5EF4-FFF2-40B4-BE49-F238E27FC236}">
+                <a16:creationId xmlns:a16="http://schemas.microsoft.com/office/drawing/2014/main" id="{A8324E10-98BE-24DE-0450-36C62FFF0BFF}"/>
+              </a:ext>
+            </a:extLst>
+          </p:cNvPr>
           <p:cNvSpPr>
             <a:spLocks noGrp="1" noRot="1" noChangeAspect="1"/>
           </p:cNvSpPr>
@@ -2414,7 +2287,13 @@
       </p:sp>
       <p:sp>
         <p:nvSpPr>
-          <p:cNvPr id="3" name="Notes Placeholder 2"/>
+          <p:cNvPr id="3" name="Notes Placeholder 2">
+            <a:extLst>
+              <a:ext uri="{FF2B5EF4-FFF2-40B4-BE49-F238E27FC236}">
+                <a16:creationId xmlns:a16="http://schemas.microsoft.com/office/drawing/2014/main" id="{91CAA9D3-DA82-C415-2C2D-26D88A50430A}"/>
+              </a:ext>
+            </a:extLst>
+          </p:cNvPr>
           <p:cNvSpPr>
             <a:spLocks noGrp="1"/>
           </p:cNvSpPr>
@@ -2433,7 +2312,13 @@
       </p:sp>
       <p:sp>
         <p:nvSpPr>
-          <p:cNvPr id="4" name="Slide Number Placeholder 3"/>
+          <p:cNvPr id="4" name="Slide Number Placeholder 3">
+            <a:extLst>
+              <a:ext uri="{FF2B5EF4-FFF2-40B4-BE49-F238E27FC236}">
+                <a16:creationId xmlns:a16="http://schemas.microsoft.com/office/drawing/2014/main" id="{B2E681EA-AC6E-7794-6704-717F5E664905}"/>
+              </a:ext>
+            </a:extLst>
+          </p:cNvPr>
           <p:cNvSpPr>
             <a:spLocks noGrp="1"/>
           </p:cNvSpPr>
@@ -2448,7 +2333,7 @@
           <a:p>
             <a:fld id="{F7021451-1387-4CA6-816F-3879F97B5CBC}" type="slidenum">
               <a:rPr lang="en-US"/>
-              <a:t>9</a:t>
+              <a:t>10</a:t>
             </a:fld>
             <a:endParaRPr lang="en-US"/>
           </a:p>
@@ -2457,7 +2342,7 @@
     </p:spTree>
     <p:extLst>
       <p:ext uri="{BB962C8B-B14F-4D97-AF65-F5344CB8AC3E}">
-        <p14:creationId xmlns:p14="http://schemas.microsoft.com/office/powerpoint/2010/main" val="1024086991"/>
+        <p14:creationId xmlns:p14="http://schemas.microsoft.com/office/powerpoint/2010/main" val="50763697"/>
       </p:ext>
     </p:extLst>
   </p:cSld>
@@ -9451,7 +9336,7 @@
       </p:grpSpPr>
       <p:sp>
         <p:nvSpPr>
-          <p:cNvPr id="2" name="Shape 0"/>
+          <p:cNvPr id="2" name="TopBar"/>
           <p:cNvSpPr/>
           <p:nvPr/>
         </p:nvSpPr>
@@ -9483,14 +9368,14 @@
       </p:sp>
       <p:sp>
         <p:nvSpPr>
-          <p:cNvPr id="3" name="Text 1"/>
+          <p:cNvPr id="3" name="Title"/>
           <p:cNvSpPr/>
           <p:nvPr/>
         </p:nvSpPr>
         <p:spPr>
           <a:xfrm>
             <a:off x="365760" y="182880"/>
-            <a:ext cx="8412480" cy="548640"/>
+            <a:ext cx="8412480" cy="500000"/>
           </a:xfrm>
           <a:prstGeom prst="rect">
             <a:avLst/>
@@ -9511,34 +9396,170 @@
                   <a:srgbClr val="A78BFA"/>
                 </a:solidFill>
                 <a:latin typeface="Calibri" pitchFamily="34" charset="0"/>
-                <a:ea typeface="Calibri" pitchFamily="34" charset="-122"/>
-                <a:cs typeface="Calibri" pitchFamily="34" charset="-120"/>
-              </a:rPr>
-              <a:t>Project Overview</a:t>
-            </a:r>
-            <a:endParaRPr lang="en-US" sz="2800" dirty="0"/>
-          </a:p>
-        </p:txBody>
-      </p:sp>
-      <p:sp>
-        <p:nvSpPr>
-          <p:cNvPr id="4" name="Text 2"/>
-          <p:cNvSpPr/>
-          <p:nvPr/>
-        </p:nvSpPr>
-        <p:spPr>
-          <a:xfrm>
-            <a:off x="365760" y="868680"/>
-            <a:ext cx="8412480" cy="365760"/>
-          </a:xfrm>
-          <a:prstGeom prst="rect">
-            <a:avLst/>
-          </a:prstGeom>
-          <a:noFill/>
-          <a:ln/>
-        </p:spPr>
-        <p:txBody>
-          <a:bodyPr wrap="square" lIns="0" tIns="0" rIns="0" bIns="0" rtlCol="0" anchor="ctr"/>
+              </a:rPr>
+              <a:t>Project Overview – </a:t>
+            </a:r>
+            <a:r>
+              <a:rPr lang="en-US" sz="2800" b="1" dirty="0" err="1">
+                <a:solidFill>
+                  <a:srgbClr val="A78BFA"/>
+                </a:solidFill>
+                <a:latin typeface="Calibri" pitchFamily="34" charset="0"/>
+              </a:rPr>
+              <a:t>Fitpulse</a:t>
+            </a:r>
+            <a:endParaRPr lang="en-US" sz="2800" b="1" dirty="0">
+              <a:solidFill>
+                <a:srgbClr val="A78BFA"/>
+              </a:solidFill>
+              <a:latin typeface="Calibri" pitchFamily="34" charset="0"/>
+            </a:endParaRPr>
+          </a:p>
+        </p:txBody>
+      </p:sp>
+      <p:sp>
+        <p:nvSpPr>
+          <p:cNvPr id="10" name="ProblemBg"/>
+          <p:cNvSpPr/>
+          <p:nvPr/>
+        </p:nvSpPr>
+        <p:spPr>
+          <a:xfrm>
+            <a:off x="365760" y="822960"/>
+            <a:ext cx="3962400" cy="3700000"/>
+          </a:xfrm>
+          <a:prstGeom prst="rect">
+            <a:avLst/>
+          </a:prstGeom>
+          <a:solidFill>
+            <a:srgbClr val="1A1020"/>
+          </a:solidFill>
+          <a:ln w="25400">
+            <a:solidFill>
+              <a:srgbClr val="EF4444"/>
+            </a:solidFill>
+            <a:prstDash val="solid"/>
+          </a:ln>
+        </p:spPr>
+        <p:txBody>
+          <a:bodyPr/>
+          <a:lstStyle/>
+          <a:p>
+            <a:endParaRPr lang="en-IN"/>
+          </a:p>
+        </p:txBody>
+      </p:sp>
+      <p:sp>
+        <p:nvSpPr>
+          <p:cNvPr id="11" name="SolutionBg"/>
+          <p:cNvSpPr/>
+          <p:nvPr/>
+        </p:nvSpPr>
+        <p:spPr>
+          <a:xfrm>
+            <a:off x="4633920" y="822960"/>
+            <a:ext cx="3962400" cy="3700000"/>
+          </a:xfrm>
+          <a:prstGeom prst="rect">
+            <a:avLst/>
+          </a:prstGeom>
+          <a:solidFill>
+            <a:srgbClr val="0F1E35"/>
+          </a:solidFill>
+          <a:ln w="25400">
+            <a:solidFill>
+              <a:srgbClr val="10B981"/>
+            </a:solidFill>
+            <a:prstDash val="solid"/>
+          </a:ln>
+        </p:spPr>
+        <p:txBody>
+          <a:bodyPr/>
+          <a:lstStyle/>
+          <a:p>
+            <a:endParaRPr lang="en-IN"/>
+          </a:p>
+        </p:txBody>
+      </p:sp>
+      <p:sp>
+        <p:nvSpPr>
+          <p:cNvPr id="12" name="ProblemHeaderBar"/>
+          <p:cNvSpPr/>
+          <p:nvPr/>
+        </p:nvSpPr>
+        <p:spPr>
+          <a:xfrm>
+            <a:off x="365760" y="822960"/>
+            <a:ext cx="3962400" cy="290000"/>
+          </a:xfrm>
+          <a:prstGeom prst="rect">
+            <a:avLst/>
+          </a:prstGeom>
+          <a:solidFill>
+            <a:srgbClr val="EF4444"/>
+          </a:solidFill>
+          <a:ln>
+            <a:noFill/>
+          </a:ln>
+        </p:spPr>
+        <p:txBody>
+          <a:bodyPr/>
+          <a:lstStyle/>
+          <a:p>
+            <a:endParaRPr lang="en-IN"/>
+          </a:p>
+        </p:txBody>
+      </p:sp>
+      <p:sp>
+        <p:nvSpPr>
+          <p:cNvPr id="13" name="SolutionHeaderBar"/>
+          <p:cNvSpPr/>
+          <p:nvPr/>
+        </p:nvSpPr>
+        <p:spPr>
+          <a:xfrm>
+            <a:off x="4633920" y="822960"/>
+            <a:ext cx="3962400" cy="290000"/>
+          </a:xfrm>
+          <a:prstGeom prst="rect">
+            <a:avLst/>
+          </a:prstGeom>
+          <a:solidFill>
+            <a:srgbClr val="10B981"/>
+          </a:solidFill>
+          <a:ln>
+            <a:noFill/>
+          </a:ln>
+        </p:spPr>
+        <p:txBody>
+          <a:bodyPr/>
+          <a:lstStyle/>
+          <a:p>
+            <a:endParaRPr lang="en-IN"/>
+          </a:p>
+        </p:txBody>
+      </p:sp>
+      <p:sp>
+        <p:nvSpPr>
+          <p:cNvPr id="14" name="ProblemLabel"/>
+          <p:cNvSpPr/>
+          <p:nvPr/>
+        </p:nvSpPr>
+        <p:spPr>
+          <a:xfrm>
+            <a:off x="365760" y="822960"/>
+            <a:ext cx="3962400" cy="290000"/>
+          </a:xfrm>
+          <a:prstGeom prst="rect">
+            <a:avLst/>
+          </a:prstGeom>
+          <a:noFill/>
+          <a:ln>
+            <a:noFill/>
+          </a:ln>
+        </p:spPr>
+        <p:txBody>
+          <a:bodyPr wrap="square" lIns="120000" tIns="60000" rIns="120000" bIns="60000" rtlCol="0" anchor="ctr"/>
           <a:lstStyle/>
           <a:p>
             <a:pPr marL="0" indent="0">
@@ -9547,76 +9568,266 @@
             <a:r>
               <a:rPr lang="en-US" sz="1600" b="1" dirty="0">
                 <a:solidFill>
-                  <a:srgbClr val="38BDF8"/>
-                </a:solidFill>
-                <a:latin typeface="Calibri" pitchFamily="34" charset="0"/>
-                <a:ea typeface="Calibri" pitchFamily="34" charset="-122"/>
-                <a:cs typeface="Calibri" pitchFamily="34" charset="-120"/>
-              </a:rPr>
-              <a:t>What is FitPulse?</a:t>
-            </a:r>
-            <a:endParaRPr lang="en-US" sz="1600" dirty="0"/>
-          </a:p>
-        </p:txBody>
-      </p:sp>
-      <p:sp>
-        <p:nvSpPr>
-          <p:cNvPr id="5" name="Text 3"/>
-          <p:cNvSpPr/>
-          <p:nvPr/>
-        </p:nvSpPr>
-        <p:spPr>
-          <a:xfrm>
-            <a:off x="365760" y="1460666"/>
-            <a:ext cx="8412480" cy="1698586"/>
-          </a:xfrm>
-          <a:prstGeom prst="rect">
-            <a:avLst/>
-          </a:prstGeom>
-          <a:noFill/>
-          <a:ln/>
-        </p:spPr>
-        <p:txBody>
-          <a:bodyPr wrap="square" lIns="0" tIns="0" rIns="0" bIns="0" rtlCol="0" anchor="ctr"/>
-          <a:lstStyle/>
-          <a:p>
-            <a:r>
-              <a:rPr lang="en-US" sz="1600" b="0" i="0" dirty="0">
-                <a:solidFill>
-                  <a:srgbClr val="FAF9F5"/>
-                </a:solidFill>
-                <a:effectLst/>
-                <a:latin typeface="Anthropic Sans"/>
-              </a:rPr>
-              <a:t>With the surge in wearable fitness devices, a vast amount of health-related time-series data is generated daily. Yet, users and healthcare providers often fail to notice subtle early warning signs of health anomalies like irregular heartbeats, sleep disturbances, or abnormal activity levels. </a:t>
-            </a:r>
-          </a:p>
-          <a:p>
-            <a:endParaRPr lang="en-US" sz="1600" dirty="0">
+                  <a:srgbClr val="FFFFFF"/>
+                </a:solidFill>
+                <a:latin typeface="Calibri" pitchFamily="34" charset="0"/>
+              </a:rPr>
+              <a:t>The Problem</a:t>
+            </a:r>
+          </a:p>
+        </p:txBody>
+      </p:sp>
+      <p:sp>
+        <p:nvSpPr>
+          <p:cNvPr id="15" name="SolutionLabel"/>
+          <p:cNvSpPr/>
+          <p:nvPr/>
+        </p:nvSpPr>
+        <p:spPr>
+          <a:xfrm>
+            <a:off x="4633920" y="822960"/>
+            <a:ext cx="3962400" cy="290000"/>
+          </a:xfrm>
+          <a:prstGeom prst="rect">
+            <a:avLst/>
+          </a:prstGeom>
+          <a:noFill/>
+          <a:ln>
+            <a:noFill/>
+          </a:ln>
+        </p:spPr>
+        <p:txBody>
+          <a:bodyPr wrap="square" lIns="120000" tIns="60000" rIns="120000" bIns="60000" rtlCol="0" anchor="ctr"/>
+          <a:lstStyle/>
+          <a:p>
+            <a:pPr marL="0" indent="0">
+              <a:buNone/>
+            </a:pPr>
+            <a:r>
+              <a:rPr lang="en-US" sz="1600" b="1" dirty="0">
+                <a:solidFill>
+                  <a:srgbClr val="FFFFFF"/>
+                </a:solidFill>
+                <a:latin typeface="Calibri" pitchFamily="34" charset="0"/>
+              </a:rPr>
+              <a:t>Our Solution — FitPulse</a:t>
+            </a:r>
+          </a:p>
+        </p:txBody>
+      </p:sp>
+      <p:sp>
+        <p:nvSpPr>
+          <p:cNvPr id="16" name="ProblemBody"/>
+          <p:cNvSpPr/>
+          <p:nvPr/>
+        </p:nvSpPr>
+        <p:spPr>
+          <a:xfrm>
+            <a:off x="395760" y="1172960"/>
+            <a:ext cx="3902400" cy="3250000"/>
+          </a:xfrm>
+          <a:prstGeom prst="rect">
+            <a:avLst/>
+          </a:prstGeom>
+          <a:noFill/>
+          <a:ln>
+            <a:noFill/>
+          </a:ln>
+        </p:spPr>
+        <p:txBody>
+          <a:bodyPr wrap="square" lIns="120000" tIns="100000" rIns="120000" bIns="100000" rtlCol="0" anchor="t"/>
+          <a:lstStyle/>
+          <a:p>
+            <a:pPr marL="0" indent="0">
+              <a:buNone/>
+            </a:pPr>
+            <a:r>
+              <a:rPr lang="en-US" sz="1300" b="1" dirty="0">
+                <a:solidFill>
+                  <a:srgbClr val="FCA5A5"/>
+                </a:solidFill>
+                <a:latin typeface="Calibri" pitchFamily="34" charset="0"/>
+              </a:rPr>
+              <a:t>Wearables generate massive health data — but nobody watches it.</a:t>
+            </a:r>
+          </a:p>
+          <a:p>
+            <a:pPr marL="0" indent="0">
+              <a:buNone/>
+            </a:pPr>
+            <a:endParaRPr lang="en-US" sz="1300" b="1" dirty="0">
               <a:solidFill>
-                <a:srgbClr val="FAF9F5"/>
+                <a:srgbClr val="FCA5A5"/>
               </a:solidFill>
-              <a:latin typeface="Anthropic Sans"/>
+              <a:latin typeface="Calibri" pitchFamily="34" charset="0"/>
             </a:endParaRPr>
           </a:p>
           <a:p>
-            <a:r>
-              <a:rPr lang="en-US" sz="1600" b="0" i="0" dirty="0">
-                <a:solidFill>
-                  <a:srgbClr val="FAF9F5"/>
-                </a:solidFill>
-                <a:effectLst/>
-                <a:latin typeface="Anthropic Sans"/>
-              </a:rPr>
-              <a:t>This project leverages AI-based anomaly detection to intelligently analyze fitness watch data and flag unusual health patterns. By enabling proactive health monitoring, it supports preventive healthcare and personalized wellness insights.</a:t>
-            </a:r>
-            <a:endParaRPr lang="en-US" sz="1600" dirty="0"/>
-          </a:p>
-        </p:txBody>
-      </p:sp>
-      <p:sp>
-        <p:nvSpPr>
-          <p:cNvPr id="21" name="Shape 19"/>
+            <a:pPr marL="0" indent="0">
+              <a:buNone/>
+            </a:pPr>
+            <a:r>
+              <a:rPr lang="en-US" sz="1200" b="0" dirty="0">
+                <a:solidFill>
+                  <a:srgbClr val="DCE8F5"/>
+                </a:solidFill>
+                <a:latin typeface="Calibri" pitchFamily="34" charset="0"/>
+              </a:rPr>
+              <a:t>•  Millions of Fitbit users track their heart rate, steps and sleep daily — yet most anomalies go unnoticed.</a:t>
+            </a:r>
+          </a:p>
+          <a:p>
+            <a:pPr marL="0" indent="0">
+              <a:buNone/>
+            </a:pPr>
+            <a:r>
+              <a:rPr lang="en-US" sz="1200" b="0" dirty="0">
+                <a:solidFill>
+                  <a:srgbClr val="DCE8F5"/>
+                </a:solidFill>
+                <a:latin typeface="Calibri" pitchFamily="34" charset="0"/>
+              </a:rPr>
+              <a:t>•  Irregular heartbeats, sleep disturbances and abnormal activity are early warning signs of serious health conditions.</a:t>
+            </a:r>
+          </a:p>
+          <a:p>
+            <a:pPr marL="0" indent="0">
+              <a:buNone/>
+            </a:pPr>
+            <a:r>
+              <a:rPr lang="en-US" sz="1200" b="0" dirty="0">
+                <a:solidFill>
+                  <a:srgbClr val="DCE8F5"/>
+                </a:solidFill>
+                <a:latin typeface="Calibri" pitchFamily="34" charset="0"/>
+              </a:rPr>
+              <a:t>•  No tool exists to automatically flag these subtle patterns from raw CSV device exports.</a:t>
+            </a:r>
+          </a:p>
+          <a:p>
+            <a:pPr marL="0" indent="0">
+              <a:buNone/>
+            </a:pPr>
+            <a:r>
+              <a:rPr lang="en-US" sz="1200" b="0" dirty="0">
+                <a:solidFill>
+                  <a:srgbClr val="DCE8F5"/>
+                </a:solidFill>
+                <a:latin typeface="Calibri" pitchFamily="34" charset="0"/>
+              </a:rPr>
+              <a:t>•  Healthcare providers lack a simple, visual way to review a patient’s wearable data history.</a:t>
+            </a:r>
+          </a:p>
+        </p:txBody>
+      </p:sp>
+      <p:sp>
+        <p:nvSpPr>
+          <p:cNvPr id="17" name="SolutionBody"/>
+          <p:cNvSpPr/>
+          <p:nvPr/>
+        </p:nvSpPr>
+        <p:spPr>
+          <a:xfrm>
+            <a:off x="4663920" y="1172960"/>
+            <a:ext cx="3902400" cy="3250000"/>
+          </a:xfrm>
+          <a:prstGeom prst="rect">
+            <a:avLst/>
+          </a:prstGeom>
+          <a:noFill/>
+          <a:ln>
+            <a:noFill/>
+          </a:ln>
+        </p:spPr>
+        <p:txBody>
+          <a:bodyPr wrap="square" lIns="120000" tIns="100000" rIns="120000" bIns="100000" rtlCol="0" anchor="t"/>
+          <a:lstStyle/>
+          <a:p>
+            <a:pPr marL="0" indent="0">
+              <a:buNone/>
+            </a:pPr>
+            <a:r>
+              <a:rPr lang="en-US" sz="1300" b="1" dirty="0">
+                <a:solidFill>
+                  <a:srgbClr val="6EE7B7"/>
+                </a:solidFill>
+                <a:latin typeface="Calibri" pitchFamily="34" charset="0"/>
+              </a:rPr>
+              <a:t>An AI-powered pipeline that detects health anomalies automatically.</a:t>
+            </a:r>
+          </a:p>
+          <a:p>
+            <a:pPr marL="0" indent="0">
+              <a:buNone/>
+            </a:pPr>
+            <a:endParaRPr lang="en-US" sz="1300" b="1" dirty="0">
+              <a:solidFill>
+                <a:srgbClr val="6EE7B7"/>
+              </a:solidFill>
+              <a:latin typeface="Calibri" pitchFamily="34" charset="0"/>
+            </a:endParaRPr>
+          </a:p>
+          <a:p>
+            <a:pPr marL="0" indent="0">
+              <a:buNone/>
+            </a:pPr>
+            <a:r>
+              <a:rPr lang="en-US" sz="1200" b="0" dirty="0">
+                <a:solidFill>
+                  <a:srgbClr val="DCE8F5"/>
+                </a:solidFill>
+                <a:latin typeface="Calibri" pitchFamily="34" charset="0"/>
+              </a:rPr>
+              <a:t>•  Upload raw Fitbit CSV files — FitPulse cleans, merges and analyses them automatically.</a:t>
+            </a:r>
+          </a:p>
+          <a:p>
+            <a:pPr marL="0" indent="0">
+              <a:buNone/>
+            </a:pPr>
+            <a:r>
+              <a:rPr lang="en-US" sz="1200" b="0" dirty="0">
+                <a:solidFill>
+                  <a:srgbClr val="DCE8F5"/>
+                </a:solidFill>
+                <a:latin typeface="Calibri" pitchFamily="34" charset="0"/>
+              </a:rPr>
+              <a:t>•  3 detection methods — threshold rules, residual ±σ, and DBSCAN — flag anomalies with reasons.</a:t>
+            </a:r>
+          </a:p>
+          <a:p>
+            <a:pPr marL="0" indent="0">
+              <a:buNone/>
+            </a:pPr>
+            <a:r>
+              <a:rPr lang="en-US" sz="1200" b="0" dirty="0">
+                <a:solidFill>
+                  <a:srgbClr val="DCE8F5"/>
+                </a:solidFill>
+                <a:latin typeface="Calibri" pitchFamily="34" charset="0"/>
+              </a:rPr>
+              <a:t>•  Prophet forecasts next 30 days of HR, steps and sleep with confidence intervals.</a:t>
+            </a:r>
+          </a:p>
+          <a:p>
+            <a:pPr marL="0" indent="0">
+              <a:buNone/>
+            </a:pPr>
+            <a:r>
+              <a:rPr lang="en-US" sz="1200" b="0" dirty="0">
+                <a:solidFill>
+                  <a:srgbClr val="DCE8F5"/>
+                </a:solidFill>
+                <a:latin typeface="Calibri" pitchFamily="34" charset="0"/>
+              </a:rPr>
+              <a:t>•  Interactive dashboard with date/user filters + one-click PDF and CSV export.</a:t>
+            </a:r>
+          </a:p>
+        </p:txBody>
+      </p:sp>
+      <p:sp>
+        <p:nvSpPr>
+          <p:cNvPr id="21" name="BottomBar"/>
           <p:cNvSpPr/>
           <p:nvPr/>
         </p:nvSpPr>
@@ -14972,7 +15183,7 @@
 
 <file path=ppt/slides/slide3.xml><?xml version="1.0" encoding="utf-8"?>
 <p:sld xmlns:a="http://schemas.openxmlformats.org/drawingml/2006/main" xmlns:r="http://schemas.openxmlformats.org/officeDocument/2006/relationships" xmlns:p="http://schemas.openxmlformats.org/presentationml/2006/main">
-  <p:cSld name="Slide 3">
+  <p:cSld name="Objectives">
     <p:bg>
       <p:bgPr>
         <a:solidFill>
@@ -14997,46 +15208,14 @@
       </p:grpSpPr>
       <p:sp>
         <p:nvSpPr>
-          <p:cNvPr id="2" name="Shape 0"/>
+          <p:cNvPr id="2" name="TopBar"/>
           <p:cNvSpPr/>
           <p:nvPr/>
         </p:nvSpPr>
         <p:spPr>
           <a:xfrm>
             <a:off x="0" y="0"/>
-            <a:ext cx="4114800" cy="5143500"/>
-          </a:xfrm>
-          <a:prstGeom prst="rect">
-            <a:avLst/>
-          </a:prstGeom>
-          <a:solidFill>
-            <a:srgbClr val="162A41"/>
-          </a:solidFill>
-          <a:ln w="12700">
-            <a:solidFill>
-              <a:srgbClr val="162A41"/>
-            </a:solidFill>
-            <a:prstDash val="solid"/>
-          </a:ln>
-        </p:spPr>
-        <p:txBody>
-          <a:bodyPr/>
-          <a:lstStyle/>
-          <a:p>
-            <a:endParaRPr lang="en-IN"/>
-          </a:p>
-        </p:txBody>
-      </p:sp>
-      <p:sp>
-        <p:nvSpPr>
-          <p:cNvPr id="3" name="Shape 1"/>
-          <p:cNvSpPr/>
-          <p:nvPr/>
-        </p:nvSpPr>
-        <p:spPr>
-          <a:xfrm>
-            <a:off x="4114800" y="0"/>
-            <a:ext cx="54864" cy="5143500"/>
+            <a:ext cx="9144000" cy="68000"/>
           </a:xfrm>
           <a:prstGeom prst="rect">
             <a:avLst/>
@@ -15044,167 +15223,1176 @@
           <a:solidFill>
             <a:srgbClr val="A78BFA"/>
           </a:solidFill>
-          <a:ln w="12700">
+          <a:ln>
+            <a:noFill/>
+          </a:ln>
+        </p:spPr>
+        <p:txBody>
+          <a:bodyPr/>
+          <a:lstStyle/>
+          <a:p>
+            <a:endParaRPr lang="en-US"/>
+          </a:p>
+        </p:txBody>
+      </p:sp>
+      <p:sp>
+        <p:nvSpPr>
+          <p:cNvPr id="3" name="HeaderBg"/>
+          <p:cNvSpPr/>
+          <p:nvPr/>
+        </p:nvSpPr>
+        <p:spPr>
+          <a:xfrm>
+            <a:off x="0" y="68000"/>
+            <a:ext cx="9144000" cy="620000"/>
+          </a:xfrm>
+          <a:prstGeom prst="rect">
+            <a:avLst/>
+          </a:prstGeom>
+          <a:solidFill>
+            <a:srgbClr val="0F1F3D"/>
+          </a:solidFill>
+          <a:ln>
+            <a:noFill/>
+          </a:ln>
+        </p:spPr>
+        <p:txBody>
+          <a:bodyPr/>
+          <a:lstStyle/>
+          <a:p>
+            <a:endParaRPr lang="en-US"/>
+          </a:p>
+        </p:txBody>
+      </p:sp>
+      <p:sp>
+        <p:nvSpPr>
+          <p:cNvPr id="4" name="SlideTitle"/>
+          <p:cNvSpPr/>
+          <p:nvPr/>
+        </p:nvSpPr>
+        <p:spPr>
+          <a:xfrm>
+            <a:off x="365760" y="120000"/>
+            <a:ext cx="8412480" cy="560000"/>
+          </a:xfrm>
+          <a:prstGeom prst="rect">
+            <a:avLst/>
+          </a:prstGeom>
+          <a:noFill/>
+          <a:ln>
+            <a:noFill/>
+          </a:ln>
+        </p:spPr>
+        <p:txBody>
+          <a:bodyPr wrap="square" lIns="0" tIns="0" rIns="0" bIns="0" rtlCol="0" anchor="ctr"/>
+          <a:lstStyle/>
+          <a:p>
+            <a:pPr marL="0" indent="0">
+              <a:buNone/>
+            </a:pPr>
+            <a:r>
+              <a:rPr lang="en-US" sz="2800" b="1" dirty="0">
+                <a:solidFill>
+                  <a:srgbClr val="DCE8F5"/>
+                </a:solidFill>
+                <a:latin typeface="Calibri" pitchFamily="34" charset="0"/>
+              </a:rPr>
+              <a:t>Project </a:t>
+            </a:r>
+            <a:r>
+              <a:rPr lang="en-US" sz="2800" b="1" dirty="0">
+                <a:solidFill>
+                  <a:srgbClr val="A78BFA"/>
+                </a:solidFill>
+                <a:latin typeface="Calibri" pitchFamily="34" charset="0"/>
+              </a:rPr>
+              <a:t>Objectives</a:t>
+            </a:r>
+            <a:r>
+              <a:rPr lang="en-US" sz="2800" b="1" dirty="0">
+                <a:solidFill>
+                  <a:srgbClr val="DCE8F5"/>
+                </a:solidFill>
+                <a:latin typeface="Calibri" pitchFamily="34" charset="0"/>
+              </a:rPr>
+              <a:t> — What Each Milestone Delivers</a:t>
+            </a:r>
+          </a:p>
+        </p:txBody>
+      </p:sp>
+      <p:sp>
+        <p:nvSpPr>
+          <p:cNvPr id="10" name="BgM1"/>
+          <p:cNvSpPr/>
+          <p:nvPr/>
+        </p:nvSpPr>
+        <p:spPr>
+          <a:xfrm>
+            <a:off x="228600" y="838000"/>
+            <a:ext cx="2001600" cy="3700000"/>
+          </a:xfrm>
+          <a:prstGeom prst="rect">
+            <a:avLst/>
+          </a:prstGeom>
+          <a:solidFill>
+            <a:srgbClr val="162540"/>
+          </a:solidFill>
+          <a:ln w="19050">
+            <a:solidFill>
+              <a:srgbClr val="38BDF8"/>
+            </a:solidFill>
+          </a:ln>
+        </p:spPr>
+        <p:txBody>
+          <a:bodyPr/>
+          <a:lstStyle/>
+          <a:p>
+            <a:endParaRPr lang="en-US"/>
+          </a:p>
+        </p:txBody>
+      </p:sp>
+      <p:sp>
+        <p:nvSpPr>
+          <p:cNvPr id="11" name="StripM1"/>
+          <p:cNvSpPr/>
+          <p:nvPr/>
+        </p:nvSpPr>
+        <p:spPr>
+          <a:xfrm>
+            <a:off x="228600" y="838000"/>
+            <a:ext cx="57150" cy="3700000"/>
+          </a:xfrm>
+          <a:prstGeom prst="rect">
+            <a:avLst/>
+          </a:prstGeom>
+          <a:solidFill>
+            <a:srgbClr val="38BDF8"/>
+          </a:solidFill>
+          <a:ln>
+            <a:noFill/>
+          </a:ln>
+        </p:spPr>
+        <p:txBody>
+          <a:bodyPr/>
+          <a:lstStyle/>
+          <a:p>
+            <a:endParaRPr lang="en-US"/>
+          </a:p>
+        </p:txBody>
+      </p:sp>
+      <p:sp>
+        <p:nvSpPr>
+          <p:cNvPr id="12" name="HdrBandM1"/>
+          <p:cNvSpPr/>
+          <p:nvPr/>
+        </p:nvSpPr>
+        <p:spPr>
+          <a:xfrm>
+            <a:off x="285750" y="838000"/>
+            <a:ext cx="1944450" cy="420000"/>
+          </a:xfrm>
+          <a:prstGeom prst="rect">
+            <a:avLst/>
+          </a:prstGeom>
+          <a:solidFill>
+            <a:srgbClr val="38BDF8">
+              <a:alpha val="25000"/>
+            </a:srgbClr>
+          </a:solidFill>
+          <a:ln>
+            <a:noFill/>
+          </a:ln>
+        </p:spPr>
+        <p:txBody>
+          <a:bodyPr/>
+          <a:lstStyle/>
+          <a:p>
+            <a:endParaRPr lang="en-US"/>
+          </a:p>
+        </p:txBody>
+      </p:sp>
+      <p:sp>
+        <p:nvSpPr>
+          <p:cNvPr id="13" name="PillM1"/>
+          <p:cNvSpPr/>
+          <p:nvPr/>
+        </p:nvSpPr>
+        <p:spPr>
+          <a:xfrm>
+            <a:off x="318600" y="900000"/>
+            <a:ext cx="340000" cy="290000"/>
+          </a:xfrm>
+          <a:prstGeom prst="rect">
+            <a:avLst/>
+          </a:prstGeom>
+          <a:solidFill>
+            <a:srgbClr val="38BDF8"/>
+          </a:solidFill>
+          <a:ln>
+            <a:noFill/>
+          </a:ln>
+        </p:spPr>
+        <p:txBody>
+          <a:bodyPr wrap="square" lIns="45720" tIns="0" rIns="45720" bIns="0" rtlCol="0" anchor="ctr"/>
+          <a:lstStyle/>
+          <a:p>
+            <a:pPr algn="ctr">
+              <a:buNone/>
+            </a:pPr>
+            <a:r>
+              <a:rPr lang="en-US" sz="1100" b="1" dirty="0">
+                <a:solidFill>
+                  <a:srgbClr val="0D1B2A"/>
+                </a:solidFill>
+                <a:latin typeface="Calibri" pitchFamily="34" charset="0"/>
+              </a:rPr>
+              <a:t>M1</a:t>
+            </a:r>
+          </a:p>
+        </p:txBody>
+      </p:sp>
+      <p:sp>
+        <p:nvSpPr>
+          <p:cNvPr id="14" name="TitleM1"/>
+          <p:cNvSpPr/>
+          <p:nvPr/>
+        </p:nvSpPr>
+        <p:spPr>
+          <a:xfrm>
+            <a:off x="688600" y="900000"/>
+            <a:ext cx="1534450" cy="290000"/>
+          </a:xfrm>
+          <a:prstGeom prst="rect">
+            <a:avLst/>
+          </a:prstGeom>
+          <a:noFill/>
+          <a:ln>
+            <a:noFill/>
+          </a:ln>
+        </p:spPr>
+        <p:txBody>
+          <a:bodyPr wrap="square" lIns="0" tIns="0" rIns="0" bIns="0" rtlCol="0" anchor="ctr"/>
+          <a:lstStyle/>
+          <a:p>
+            <a:pPr marL="0" indent="0">
+              <a:buNone/>
+            </a:pPr>
+            <a:r>
+              <a:rPr lang="en-US" sz="1200" b="1" dirty="0">
+                <a:solidFill>
+                  <a:srgbClr val="38BDF8"/>
+                </a:solidFill>
+                <a:latin typeface="Calibri" pitchFamily="34" charset="0"/>
+              </a:rPr>
+              <a:t>Data Preprocessing</a:t>
+            </a:r>
+          </a:p>
+        </p:txBody>
+      </p:sp>
+      <p:sp>
+        <p:nvSpPr>
+          <p:cNvPr id="15" name="BodyM1"/>
+          <p:cNvSpPr/>
+          <p:nvPr/>
+        </p:nvSpPr>
+        <p:spPr>
+          <a:xfrm>
+            <a:off x="318600" y="1300000"/>
+            <a:ext cx="1871600" cy="3190000"/>
+          </a:xfrm>
+          <a:prstGeom prst="rect">
+            <a:avLst/>
+          </a:prstGeom>
+          <a:noFill/>
+          <a:ln>
+            <a:noFill/>
+          </a:ln>
+        </p:spPr>
+        <p:txBody>
+          <a:bodyPr wrap="square" lIns="45720" tIns="45720" rIns="45720" bIns="45720" rtlCol="0" anchor="t"/>
+          <a:lstStyle/>
+          <a:p>
+            <a:pPr marL="0" indent="0">
+              <a:lnSpc>
+                <a:spcPts val="1250"/>
+              </a:lnSpc>
+              <a:buNone/>
+            </a:pPr>
+            <a:r>
+              <a:rPr lang="en-US" sz="1000" b="1" dirty="0">
+                <a:solidFill>
+                  <a:srgbClr val="DCE8F5"/>
+                </a:solidFill>
+                <a:latin typeface="Calibri" pitchFamily="34" charset="0"/>
+              </a:rPr>
+              <a:t>Objective</a:t>
+            </a:r>
+          </a:p>
+          <a:p>
+            <a:pPr marL="0" indent="0">
+              <a:lnSpc>
+                <a:spcPts val="1250"/>
+              </a:lnSpc>
+              <a:spcAft>
+                <a:spcPts val="300"/>
+              </a:spcAft>
+              <a:buNone/>
+            </a:pPr>
+            <a:r>
+              <a:rPr lang="en-US" sz="850" i="1" dirty="0">
+                <a:solidFill>
+                  <a:srgbClr val="94A3B8"/>
+                </a:solidFill>
+                <a:latin typeface="Calibri Light" pitchFamily="34" charset="0"/>
+              </a:rPr>
+              <a:t>Turn raw Fitbit CSVs into a clean, analysis-ready dataset.</a:t>
+            </a:r>
+          </a:p>
+          <a:p>
+            <a:pPr marL="0" indent="0">
+              <a:lnSpc>
+                <a:spcPts val="1250"/>
+              </a:lnSpc>
+              <a:buNone/>
+            </a:pPr>
+            <a:r>
+              <a:rPr lang="en-US" sz="950" b="1" dirty="0">
+                <a:solidFill>
+                  <a:srgbClr val="DCE8F5"/>
+                </a:solidFill>
+                <a:latin typeface="Calibri" pitchFamily="34" charset="0"/>
+              </a:rPr>
+              <a:t>What We Do</a:t>
+            </a:r>
+          </a:p>
+          <a:p>
+            <a:pPr marL="114300" indent="-114300">
+              <a:lnSpc>
+                <a:spcPts val="1250"/>
+              </a:lnSpc>
+              <a:buChar char="▸"/>
+            </a:pPr>
+            <a:r>
+              <a:rPr lang="en-US" sz="900" dirty="0">
+                <a:solidFill>
+                  <a:srgbClr val="94A3B8"/>
+                </a:solidFill>
+                <a:latin typeface="Calibri Light" pitchFamily="34" charset="0"/>
+              </a:rPr>
+              <a:t>Upload any fitness CSV file</a:t>
+            </a:r>
+          </a:p>
+          <a:p>
+            <a:pPr marL="114300" indent="-114300">
+              <a:lnSpc>
+                <a:spcPts val="1250"/>
+              </a:lnSpc>
+              <a:buChar char="▸"/>
+            </a:pPr>
+            <a:r>
+              <a:rPr lang="en-US" sz="900" dirty="0">
+                <a:solidFill>
+                  <a:srgbClr val="94A3B8"/>
+                </a:solidFill>
+                <a:latin typeface="Calibri Light" pitchFamily="34" charset="0"/>
+              </a:rPr>
+              <a:t>Auto-fix dates, interpolate gaps, fill missing text</a:t>
+            </a:r>
+          </a:p>
+          <a:p>
+            <a:pPr marL="114300" indent="-114300">
+              <a:lnSpc>
+                <a:spcPts val="1250"/>
+              </a:lnSpc>
+              <a:buChar char="▸"/>
+            </a:pPr>
+            <a:r>
+              <a:rPr lang="en-US" sz="900" dirty="0">
+                <a:solidFill>
+                  <a:srgbClr val="94A3B8"/>
+                </a:solidFill>
+                <a:latin typeface="Calibri Light" pitchFamily="34" charset="0"/>
+              </a:rPr>
+              <a:t>Inspect raw data and detect outliers via IQR Box Plot</a:t>
+            </a:r>
+          </a:p>
+          <a:p>
+            <a:pPr marL="114300" indent="-114300">
+              <a:lnSpc>
+                <a:spcPts val="1250"/>
+              </a:lnSpc>
+              <a:buChar char="▸"/>
+            </a:pPr>
+            <a:r>
+              <a:rPr lang="en-US" sz="900" dirty="0">
+                <a:solidFill>
+                  <a:srgbClr val="94A3B8"/>
+                </a:solidFill>
+                <a:latin typeface="Calibri Light" pitchFamily="34" charset="0"/>
+              </a:rPr>
+              <a:t>Export cleaned CSV with zero missing values</a:t>
+            </a:r>
+          </a:p>
+          <a:p>
+            <a:pPr marL="0" indent="0">
+              <a:lnSpc>
+                <a:spcPts val="1250"/>
+              </a:lnSpc>
+              <a:spcBef>
+                <a:spcPts val="300"/>
+              </a:spcBef>
+              <a:buNone/>
+            </a:pPr>
+            <a:r>
+              <a:rPr lang="en-US" sz="900" b="1" dirty="0">
+                <a:solidFill>
+                  <a:srgbClr val="38BDF8"/>
+                </a:solidFill>
+                <a:latin typeface="Calibri" pitchFamily="34" charset="0"/>
+              </a:rPr>
+              <a:t>Output: </a:t>
+            </a:r>
+            <a:r>
+              <a:rPr lang="en-US" sz="900" dirty="0">
+                <a:solidFill>
+                  <a:srgbClr val="94A3B8"/>
+                </a:solidFill>
+                <a:latin typeface="Calibri Light" pitchFamily="34" charset="0"/>
+              </a:rPr>
+              <a:t>Clean dataset ready for M2</a:t>
+            </a:r>
+          </a:p>
+        </p:txBody>
+      </p:sp>
+      <p:sp>
+        <p:nvSpPr>
+          <p:cNvPr id="20" name="BgM2"/>
+          <p:cNvSpPr/>
+          <p:nvPr/>
+        </p:nvSpPr>
+        <p:spPr>
+          <a:xfrm>
+            <a:off x="2457200" y="838000"/>
+            <a:ext cx="2001600" cy="3700000"/>
+          </a:xfrm>
+          <a:prstGeom prst="rect">
+            <a:avLst/>
+          </a:prstGeom>
+          <a:solidFill>
+            <a:srgbClr val="162540"/>
+          </a:solidFill>
+          <a:ln w="19050">
+            <a:solidFill>
+              <a:srgbClr val="10B981"/>
+            </a:solidFill>
+          </a:ln>
+        </p:spPr>
+        <p:txBody>
+          <a:bodyPr/>
+          <a:lstStyle/>
+          <a:p>
+            <a:endParaRPr lang="en-US"/>
+          </a:p>
+        </p:txBody>
+      </p:sp>
+      <p:sp>
+        <p:nvSpPr>
+          <p:cNvPr id="21" name="StripM2"/>
+          <p:cNvSpPr/>
+          <p:nvPr/>
+        </p:nvSpPr>
+        <p:spPr>
+          <a:xfrm>
+            <a:off x="2457200" y="838000"/>
+            <a:ext cx="57150" cy="3700000"/>
+          </a:xfrm>
+          <a:prstGeom prst="rect">
+            <a:avLst/>
+          </a:prstGeom>
+          <a:solidFill>
+            <a:srgbClr val="10B981"/>
+          </a:solidFill>
+          <a:ln>
+            <a:noFill/>
+          </a:ln>
+        </p:spPr>
+        <p:txBody>
+          <a:bodyPr/>
+          <a:lstStyle/>
+          <a:p>
+            <a:endParaRPr lang="en-US"/>
+          </a:p>
+        </p:txBody>
+      </p:sp>
+      <p:sp>
+        <p:nvSpPr>
+          <p:cNvPr id="22" name="HdrBandM2"/>
+          <p:cNvSpPr/>
+          <p:nvPr/>
+        </p:nvSpPr>
+        <p:spPr>
+          <a:xfrm>
+            <a:off x="2514350" y="838000"/>
+            <a:ext cx="1944450" cy="420000"/>
+          </a:xfrm>
+          <a:prstGeom prst="rect">
+            <a:avLst/>
+          </a:prstGeom>
+          <a:solidFill>
+            <a:srgbClr val="10B981">
+              <a:alpha val="25000"/>
+            </a:srgbClr>
+          </a:solidFill>
+          <a:ln>
+            <a:noFill/>
+          </a:ln>
+        </p:spPr>
+        <p:txBody>
+          <a:bodyPr/>
+          <a:lstStyle/>
+          <a:p>
+            <a:endParaRPr lang="en-US"/>
+          </a:p>
+        </p:txBody>
+      </p:sp>
+      <p:sp>
+        <p:nvSpPr>
+          <p:cNvPr id="23" name="PillM2"/>
+          <p:cNvSpPr/>
+          <p:nvPr/>
+        </p:nvSpPr>
+        <p:spPr>
+          <a:xfrm>
+            <a:off x="2547200" y="900000"/>
+            <a:ext cx="340000" cy="290000"/>
+          </a:xfrm>
+          <a:prstGeom prst="rect">
+            <a:avLst/>
+          </a:prstGeom>
+          <a:solidFill>
+            <a:srgbClr val="10B981"/>
+          </a:solidFill>
+          <a:ln>
+            <a:noFill/>
+          </a:ln>
+        </p:spPr>
+        <p:txBody>
+          <a:bodyPr wrap="square" lIns="45720" tIns="0" rIns="45720" bIns="0" rtlCol="0" anchor="ctr"/>
+          <a:lstStyle/>
+          <a:p>
+            <a:pPr algn="ctr">
+              <a:buNone/>
+            </a:pPr>
+            <a:r>
+              <a:rPr lang="en-US" sz="1100" b="1" dirty="0">
+                <a:solidFill>
+                  <a:srgbClr val="0D1B2A"/>
+                </a:solidFill>
+                <a:latin typeface="Calibri" pitchFamily="34" charset="0"/>
+              </a:rPr>
+              <a:t>M2</a:t>
+            </a:r>
+          </a:p>
+        </p:txBody>
+      </p:sp>
+      <p:sp>
+        <p:nvSpPr>
+          <p:cNvPr id="24" name="TitleM2"/>
+          <p:cNvSpPr/>
+          <p:nvPr/>
+        </p:nvSpPr>
+        <p:spPr>
+          <a:xfrm>
+            <a:off x="2917200" y="900000"/>
+            <a:ext cx="1534450" cy="290000"/>
+          </a:xfrm>
+          <a:prstGeom prst="rect">
+            <a:avLst/>
+          </a:prstGeom>
+          <a:noFill/>
+          <a:ln>
+            <a:noFill/>
+          </a:ln>
+        </p:spPr>
+        <p:txBody>
+          <a:bodyPr wrap="square" lIns="0" tIns="0" rIns="0" bIns="0" rtlCol="0" anchor="ctr"/>
+          <a:lstStyle/>
+          <a:p>
+            <a:pPr marL="0" indent="0">
+              <a:buNone/>
+            </a:pPr>
+            <a:r>
+              <a:rPr lang="en-US" sz="1200" b="1" dirty="0">
+                <a:solidFill>
+                  <a:srgbClr val="10B981"/>
+                </a:solidFill>
+                <a:latin typeface="Calibri" pitchFamily="34" charset="0"/>
+              </a:rPr>
+              <a:t>Feature Extraction</a:t>
+            </a:r>
+          </a:p>
+        </p:txBody>
+      </p:sp>
+      <p:sp>
+        <p:nvSpPr>
+          <p:cNvPr id="25" name="BodyM2"/>
+          <p:cNvSpPr/>
+          <p:nvPr/>
+        </p:nvSpPr>
+        <p:spPr>
+          <a:xfrm>
+            <a:off x="2547200" y="1300000"/>
+            <a:ext cx="1871600" cy="3190000"/>
+          </a:xfrm>
+          <a:prstGeom prst="rect">
+            <a:avLst/>
+          </a:prstGeom>
+          <a:noFill/>
+          <a:ln>
+            <a:noFill/>
+          </a:ln>
+        </p:spPr>
+        <p:txBody>
+          <a:bodyPr wrap="square" lIns="45720" tIns="45720" rIns="45720" bIns="45720" rtlCol="0" anchor="t"/>
+          <a:lstStyle/>
+          <a:p>
+            <a:pPr marL="0" indent="0">
+              <a:lnSpc>
+                <a:spcPts val="1250"/>
+              </a:lnSpc>
+              <a:buNone/>
+            </a:pPr>
+            <a:r>
+              <a:rPr lang="en-US" sz="1000" b="1" dirty="0">
+                <a:solidFill>
+                  <a:srgbClr val="DCE8F5"/>
+                </a:solidFill>
+                <a:latin typeface="Calibri" pitchFamily="34" charset="0"/>
+              </a:rPr>
+              <a:t>Objective</a:t>
+            </a:r>
+          </a:p>
+          <a:p>
+            <a:pPr marL="0" indent="0">
+              <a:lnSpc>
+                <a:spcPts val="1250"/>
+              </a:lnSpc>
+              <a:spcAft>
+                <a:spcPts val="300"/>
+              </a:spcAft>
+              <a:buNone/>
+            </a:pPr>
+            <a:r>
+              <a:rPr lang="en-US" sz="850" i="1" dirty="0">
+                <a:solidFill>
+                  <a:srgbClr val="94A3B8"/>
+                </a:solidFill>
+                <a:latin typeface="Calibri Light" pitchFamily="34" charset="0"/>
+              </a:rPr>
+              <a:t>Extract patterns and model fitness behaviour from merged sensor data.</a:t>
+            </a:r>
+          </a:p>
+          <a:p>
+            <a:pPr marL="0" indent="0">
+              <a:lnSpc>
+                <a:spcPts val="1250"/>
+              </a:lnSpc>
+              <a:buNone/>
+            </a:pPr>
+            <a:r>
+              <a:rPr lang="en-US" sz="950" b="1" dirty="0">
+                <a:solidFill>
+                  <a:srgbClr val="DCE8F5"/>
+                </a:solidFill>
+                <a:latin typeface="Calibri" pitchFamily="34" charset="0"/>
+              </a:rPr>
+              <a:t>What We Do</a:t>
+            </a:r>
+          </a:p>
+          <a:p>
+            <a:pPr marL="114300" indent="-114300">
+              <a:lnSpc>
+                <a:spcPts val="1250"/>
+              </a:lnSpc>
+              <a:buChar char="▸"/>
+            </a:pPr>
+            <a:r>
+              <a:rPr lang="en-US" sz="900" dirty="0">
+                <a:solidFill>
+                  <a:srgbClr val="94A3B8"/>
+                </a:solidFill>
+                <a:latin typeface="Calibri Light" pitchFamily="34" charset="0"/>
+              </a:rPr>
+              <a:t>Merge 5 Fitbit sensor files into one master dataset</a:t>
+            </a:r>
+          </a:p>
+          <a:p>
+            <a:pPr marL="114300" indent="-114300">
+              <a:lnSpc>
+                <a:spcPts val="1250"/>
+              </a:lnSpc>
+              <a:buChar char="▸"/>
+            </a:pPr>
+            <a:r>
+              <a:rPr lang="en-US" sz="900" dirty="0">
+                <a:solidFill>
+                  <a:srgbClr val="94A3B8"/>
+                </a:solidFill>
+                <a:latin typeface="Calibri Light" pitchFamily="34" charset="0"/>
+              </a:rPr>
+              <a:t>TSFresh: extract 10 features from 196K+ HR readings</a:t>
+            </a:r>
+          </a:p>
+          <a:p>
+            <a:pPr marL="114300" indent="-114300">
+              <a:lnSpc>
+                <a:spcPts val="1250"/>
+              </a:lnSpc>
+              <a:buChar char="▸"/>
+            </a:pPr>
+            <a:r>
+              <a:rPr lang="en-US" sz="900" dirty="0">
+                <a:solidFill>
+                  <a:srgbClr val="94A3B8"/>
+                </a:solidFill>
+                <a:latin typeface="Calibri Light" pitchFamily="34" charset="0"/>
+              </a:rPr>
+              <a:t>Prophet: 30-day forecast for HR, Steps and Sleep</a:t>
+            </a:r>
+          </a:p>
+          <a:p>
+            <a:pPr marL="114300" indent="-114300">
+              <a:lnSpc>
+                <a:spcPts val="1250"/>
+              </a:lnSpc>
+              <a:buChar char="▸"/>
+            </a:pPr>
+            <a:r>
+              <a:rPr lang="en-US" sz="900" dirty="0">
+                <a:solidFill>
+                  <a:srgbClr val="94A3B8"/>
+                </a:solidFill>
+                <a:latin typeface="Calibri Light" pitchFamily="34" charset="0"/>
+              </a:rPr>
+              <a:t>KMeans + DBSCAN user clustering with PCA and t-SNE maps</a:t>
+            </a:r>
+          </a:p>
+          <a:p>
+            <a:pPr marL="0" indent="0">
+              <a:lnSpc>
+                <a:spcPts val="1250"/>
+              </a:lnSpc>
+              <a:spcBef>
+                <a:spcPts val="300"/>
+              </a:spcBef>
+              <a:buNone/>
+            </a:pPr>
+            <a:r>
+              <a:rPr lang="en-US" sz="900" b="1" dirty="0">
+                <a:solidFill>
+                  <a:srgbClr val="10B981"/>
+                </a:solidFill>
+                <a:latin typeface="Calibri" pitchFamily="34" charset="0"/>
+              </a:rPr>
+              <a:t>Output: </a:t>
+            </a:r>
+            <a:r>
+              <a:rPr lang="en-US" sz="900" dirty="0">
+                <a:solidFill>
+                  <a:srgbClr val="94A3B8"/>
+                </a:solidFill>
+                <a:latin typeface="Calibri Light" pitchFamily="34" charset="0"/>
+              </a:rPr>
+              <a:t>Features, forecasts and user clusters</a:t>
+            </a:r>
+          </a:p>
+        </p:txBody>
+      </p:sp>
+      <p:sp>
+        <p:nvSpPr>
+          <p:cNvPr id="30" name="BgM3"/>
+          <p:cNvSpPr/>
+          <p:nvPr/>
+        </p:nvSpPr>
+        <p:spPr>
+          <a:xfrm>
+            <a:off x="4685800" y="838000"/>
+            <a:ext cx="2001600" cy="3700000"/>
+          </a:xfrm>
+          <a:prstGeom prst="rect">
+            <a:avLst/>
+          </a:prstGeom>
+          <a:solidFill>
+            <a:srgbClr val="162540"/>
+          </a:solidFill>
+          <a:ln w="19050">
+            <a:solidFill>
+              <a:srgbClr val="F97316"/>
+            </a:solidFill>
+          </a:ln>
+        </p:spPr>
+        <p:txBody>
+          <a:bodyPr/>
+          <a:lstStyle/>
+          <a:p>
+            <a:endParaRPr lang="en-US"/>
+          </a:p>
+        </p:txBody>
+      </p:sp>
+      <p:sp>
+        <p:nvSpPr>
+          <p:cNvPr id="31" name="StripM3"/>
+          <p:cNvSpPr/>
+          <p:nvPr/>
+        </p:nvSpPr>
+        <p:spPr>
+          <a:xfrm>
+            <a:off x="4685800" y="838000"/>
+            <a:ext cx="57150" cy="3700000"/>
+          </a:xfrm>
+          <a:prstGeom prst="rect">
+            <a:avLst/>
+          </a:prstGeom>
+          <a:solidFill>
+            <a:srgbClr val="F97316"/>
+          </a:solidFill>
+          <a:ln>
+            <a:noFill/>
+          </a:ln>
+        </p:spPr>
+        <p:txBody>
+          <a:bodyPr/>
+          <a:lstStyle/>
+          <a:p>
+            <a:endParaRPr lang="en-US"/>
+          </a:p>
+        </p:txBody>
+      </p:sp>
+      <p:sp>
+        <p:nvSpPr>
+          <p:cNvPr id="32" name="HdrBandM3"/>
+          <p:cNvSpPr/>
+          <p:nvPr/>
+        </p:nvSpPr>
+        <p:spPr>
+          <a:xfrm>
+            <a:off x="4742950" y="838000"/>
+            <a:ext cx="1944450" cy="420000"/>
+          </a:xfrm>
+          <a:prstGeom prst="rect">
+            <a:avLst/>
+          </a:prstGeom>
+          <a:solidFill>
+            <a:srgbClr val="F97316">
+              <a:alpha val="25000"/>
+            </a:srgbClr>
+          </a:solidFill>
+          <a:ln>
+            <a:noFill/>
+          </a:ln>
+        </p:spPr>
+        <p:txBody>
+          <a:bodyPr/>
+          <a:lstStyle/>
+          <a:p>
+            <a:endParaRPr lang="en-US"/>
+          </a:p>
+        </p:txBody>
+      </p:sp>
+      <p:sp>
+        <p:nvSpPr>
+          <p:cNvPr id="33" name="PillM3"/>
+          <p:cNvSpPr/>
+          <p:nvPr/>
+        </p:nvSpPr>
+        <p:spPr>
+          <a:xfrm>
+            <a:off x="4775800" y="900000"/>
+            <a:ext cx="340000" cy="290000"/>
+          </a:xfrm>
+          <a:prstGeom prst="rect">
+            <a:avLst/>
+          </a:prstGeom>
+          <a:solidFill>
+            <a:srgbClr val="F97316"/>
+          </a:solidFill>
+          <a:ln>
+            <a:noFill/>
+          </a:ln>
+        </p:spPr>
+        <p:txBody>
+          <a:bodyPr wrap="square" lIns="45720" tIns="0" rIns="45720" bIns="0" rtlCol="0" anchor="ctr"/>
+          <a:lstStyle/>
+          <a:p>
+            <a:pPr algn="ctr">
+              <a:buNone/>
+            </a:pPr>
+            <a:r>
+              <a:rPr lang="en-US" sz="1100" b="1" dirty="0">
+                <a:solidFill>
+                  <a:srgbClr val="0D1B2A"/>
+                </a:solidFill>
+                <a:latin typeface="Calibri" pitchFamily="34" charset="0"/>
+              </a:rPr>
+              <a:t>M3</a:t>
+            </a:r>
+          </a:p>
+        </p:txBody>
+      </p:sp>
+      <p:sp>
+        <p:nvSpPr>
+          <p:cNvPr id="34" name="TitleM3"/>
+          <p:cNvSpPr/>
+          <p:nvPr/>
+        </p:nvSpPr>
+        <p:spPr>
+          <a:xfrm>
+            <a:off x="5145800" y="900000"/>
+            <a:ext cx="1534450" cy="290000"/>
+          </a:xfrm>
+          <a:prstGeom prst="rect">
+            <a:avLst/>
+          </a:prstGeom>
+          <a:noFill/>
+          <a:ln>
+            <a:noFill/>
+          </a:ln>
+        </p:spPr>
+        <p:txBody>
+          <a:bodyPr wrap="square" lIns="0" tIns="0" rIns="0" bIns="0" rtlCol="0" anchor="ctr"/>
+          <a:lstStyle/>
+          <a:p>
+            <a:pPr marL="0" indent="0">
+              <a:buNone/>
+            </a:pPr>
+            <a:r>
+              <a:rPr lang="en-US" sz="1200" b="1" dirty="0">
+                <a:solidFill>
+                  <a:srgbClr val="F97316"/>
+                </a:solidFill>
+                <a:latin typeface="Calibri" pitchFamily="34" charset="0"/>
+              </a:rPr>
+              <a:t>Anomaly Detection</a:t>
+            </a:r>
+          </a:p>
+        </p:txBody>
+      </p:sp>
+      <p:sp>
+        <p:nvSpPr>
+          <p:cNvPr id="35" name="BodyM3"/>
+          <p:cNvSpPr/>
+          <p:nvPr/>
+        </p:nvSpPr>
+        <p:spPr>
+          <a:xfrm>
+            <a:off x="4775800" y="1300000"/>
+            <a:ext cx="1871600" cy="3190000"/>
+          </a:xfrm>
+          <a:prstGeom prst="rect">
+            <a:avLst/>
+          </a:prstGeom>
+          <a:noFill/>
+          <a:ln>
+            <a:noFill/>
+          </a:ln>
+        </p:spPr>
+        <p:txBody>
+          <a:bodyPr wrap="square" lIns="45720" tIns="45720" rIns="45720" bIns="45720" rtlCol="0" anchor="t"/>
+          <a:lstStyle/>
+          <a:p>
+            <a:pPr marL="0" indent="0">
+              <a:lnSpc>
+                <a:spcPts val="1250"/>
+              </a:lnSpc>
+              <a:buNone/>
+            </a:pPr>
+            <a:r>
+              <a:rPr lang="en-US" sz="1000" b="1" dirty="0">
+                <a:solidFill>
+                  <a:srgbClr val="DCE8F5"/>
+                </a:solidFill>
+                <a:latin typeface="Calibri" pitchFamily="34" charset="0"/>
+              </a:rPr>
+              <a:t>Objective</a:t>
+            </a:r>
+          </a:p>
+          <a:p>
+            <a:pPr marL="0" indent="0">
+              <a:lnSpc>
+                <a:spcPts val="1250"/>
+              </a:lnSpc>
+              <a:spcAft>
+                <a:spcPts val="300"/>
+              </a:spcAft>
+              <a:buNone/>
+            </a:pPr>
+            <a:r>
+              <a:rPr lang="en-US" sz="850" i="1" dirty="0">
+                <a:solidFill>
+                  <a:srgbClr val="94A3B8"/>
+                </a:solidFill>
+                <a:latin typeface="Calibri Light" pitchFamily="34" charset="0"/>
+              </a:rPr>
+              <a:t>Flag unusual health patterns in HR, steps and sleep automatically.</a:t>
+            </a:r>
+          </a:p>
+          <a:p>
+            <a:pPr marL="0" indent="0">
+              <a:lnSpc>
+                <a:spcPts val="1250"/>
+              </a:lnSpc>
+              <a:buNone/>
+            </a:pPr>
+            <a:r>
+              <a:rPr lang="en-US" sz="950" b="1" dirty="0">
+                <a:solidFill>
+                  <a:srgbClr val="DCE8F5"/>
+                </a:solidFill>
+                <a:latin typeface="Calibri" pitchFamily="34" charset="0"/>
+              </a:rPr>
+              <a:t>What We Do</a:t>
+            </a:r>
+          </a:p>
+          <a:p>
+            <a:pPr marL="114300" indent="-114300">
+              <a:lnSpc>
+                <a:spcPts val="1250"/>
+              </a:lnSpc>
+              <a:buChar char="▸"/>
+            </a:pPr>
+            <a:r>
+              <a:rPr lang="en-US" sz="900" dirty="0">
+                <a:solidFill>
+                  <a:srgbClr val="94A3B8"/>
+                </a:solidFill>
+                <a:latin typeface="Calibri Light" pitchFamily="34" charset="0"/>
+              </a:rPr>
+              <a:t>Threshold rules: HR &gt; 100 or &lt; 50 bpm, Steps &lt; 500/day</a:t>
+            </a:r>
+          </a:p>
+          <a:p>
+            <a:pPr marL="114300" indent="-114300">
+              <a:lnSpc>
+                <a:spcPts val="1250"/>
+              </a:lnSpc>
+              <a:buChar char="▸"/>
+            </a:pPr>
+            <a:r>
+              <a:rPr lang="en-US" sz="900" dirty="0">
+                <a:solidFill>
+                  <a:srgbClr val="94A3B8"/>
+                </a:solidFill>
+                <a:latin typeface="Calibri Light" pitchFamily="34" charset="0"/>
+              </a:rPr>
+              <a:t>Residual ±2σ from 3-day rolling median baseline</a:t>
+            </a:r>
+          </a:p>
+          <a:p>
+            <a:pPr marL="114300" indent="-114300">
+              <a:lnSpc>
+                <a:spcPts val="1250"/>
+              </a:lnSpc>
+              <a:buChar char="▸"/>
+            </a:pPr>
+            <a:r>
+              <a:rPr lang="en-US" sz="900" dirty="0">
+                <a:solidFill>
+                  <a:srgbClr val="94A3B8"/>
+                </a:solidFill>
+                <a:latin typeface="Calibri Light" pitchFamily="34" charset="0"/>
+              </a:rPr>
+              <a:t>DBSCAN structural outliers — user-level clustering</a:t>
+            </a:r>
+          </a:p>
+          <a:p>
+            <a:pPr marL="114300" indent="-114300">
+              <a:lnSpc>
+                <a:spcPts val="1250"/>
+              </a:lnSpc>
+              <a:buChar char="▸"/>
+            </a:pPr>
+            <a:r>
+              <a:rPr lang="en-US" sz="900" dirty="0">
+                <a:solidFill>
+                  <a:srgbClr val="94A3B8"/>
+                </a:solidFill>
+                <a:latin typeface="Calibri Light" pitchFamily="34" charset="0"/>
+              </a:rPr>
+              <a:t>90%+ detection accuracy on simulated injected anomalies</a:t>
+            </a:r>
+          </a:p>
+          <a:p>
+            <a:pPr marL="0" indent="0">
+              <a:lnSpc>
+                <a:spcPts val="1250"/>
+              </a:lnSpc>
+              <a:spcBef>
+                <a:spcPts val="300"/>
+              </a:spcBef>
+              <a:buNone/>
+            </a:pPr>
+            <a:r>
+              <a:rPr lang="en-US" sz="900" b="1" dirty="0">
+                <a:solidFill>
+                  <a:srgbClr val="F97316"/>
+                </a:solidFill>
+                <a:latin typeface="Calibri" pitchFamily="34" charset="0"/>
+              </a:rPr>
+              <a:t>Output: </a:t>
+            </a:r>
+            <a:r>
+              <a:rPr lang="en-US" sz="900" dirty="0">
+                <a:solidFill>
+                  <a:srgbClr val="94A3B8"/>
+                </a:solidFill>
+                <a:latin typeface="Calibri Light" pitchFamily="34" charset="0"/>
+              </a:rPr>
+              <a:t>Flagged anomaly records with reasons</a:t>
+            </a:r>
+          </a:p>
+        </p:txBody>
+      </p:sp>
+      <p:sp>
+        <p:nvSpPr>
+          <p:cNvPr id="40" name="BgM4"/>
+          <p:cNvSpPr/>
+          <p:nvPr/>
+        </p:nvSpPr>
+        <p:spPr>
+          <a:xfrm>
+            <a:off x="6914400" y="838000"/>
+            <a:ext cx="2001600" cy="3700000"/>
+          </a:xfrm>
+          <a:prstGeom prst="rect">
+            <a:avLst/>
+          </a:prstGeom>
+          <a:solidFill>
+            <a:srgbClr val="162540"/>
+          </a:solidFill>
+          <a:ln w="19050">
             <a:solidFill>
               <a:srgbClr val="A78BFA"/>
             </a:solidFill>
-            <a:prstDash val="solid"/>
           </a:ln>
         </p:spPr>
         <p:txBody>
           <a:bodyPr/>
           <a:lstStyle/>
           <a:p>
-            <a:endParaRPr lang="en-IN"/>
-          </a:p>
-        </p:txBody>
-      </p:sp>
-      <p:sp>
-        <p:nvSpPr>
-          <p:cNvPr id="4" name="Text 2"/>
-          <p:cNvSpPr/>
-          <p:nvPr/>
-        </p:nvSpPr>
-        <p:spPr>
-          <a:xfrm>
-            <a:off x="274320" y="1097280"/>
-            <a:ext cx="3566160" cy="1371600"/>
-          </a:xfrm>
-          <a:prstGeom prst="rect">
-            <a:avLst/>
-          </a:prstGeom>
-          <a:noFill/>
-          <a:ln/>
-        </p:spPr>
-        <p:txBody>
-          <a:bodyPr wrap="square" rtlCol="0" anchor="ctr"/>
-          <a:lstStyle/>
-          <a:p>
-            <a:pPr marL="0" indent="0" algn="ctr">
-              <a:buNone/>
-            </a:pPr>
-            <a:r>
-              <a:rPr lang="en-US" sz="9600" b="1" dirty="0">
-                <a:solidFill>
-                  <a:srgbClr val="A78BFA">
-                    <a:alpha val="70000"/>
-                  </a:srgbClr>
-                </a:solidFill>
-                <a:latin typeface="Calibri" pitchFamily="34" charset="0"/>
-                <a:ea typeface="Calibri" pitchFamily="34" charset="-122"/>
-                <a:cs typeface="Calibri" pitchFamily="34" charset="-120"/>
-              </a:rPr>
-              <a:t>01</a:t>
-            </a:r>
-            <a:endParaRPr lang="en-US" sz="9600" dirty="0"/>
-          </a:p>
-        </p:txBody>
-      </p:sp>
-      <p:sp>
-        <p:nvSpPr>
-          <p:cNvPr id="5" name="Text 3"/>
-          <p:cNvSpPr/>
-          <p:nvPr/>
-        </p:nvSpPr>
-        <p:spPr>
-          <a:xfrm>
-            <a:off x="274320" y="2560320"/>
-            <a:ext cx="3566160" cy="502920"/>
-          </a:xfrm>
-          <a:prstGeom prst="rect">
-            <a:avLst/>
-          </a:prstGeom>
-          <a:noFill/>
-          <a:ln/>
-        </p:spPr>
-        <p:txBody>
-          <a:bodyPr wrap="square" rtlCol="0" anchor="ctr"/>
-          <a:lstStyle/>
-          <a:p>
-            <a:pPr marL="0" indent="0" algn="ctr">
-              <a:buNone/>
-            </a:pPr>
-            <a:r>
-              <a:rPr lang="en-US" sz="2200" b="1" dirty="0">
-                <a:solidFill>
-                  <a:srgbClr val="FFFFFF"/>
-                </a:solidFill>
-                <a:latin typeface="Calibri" pitchFamily="34" charset="0"/>
-                <a:ea typeface="Calibri" pitchFamily="34" charset="-122"/>
-                <a:cs typeface="Calibri" pitchFamily="34" charset="-120"/>
-              </a:rPr>
-              <a:t>Milestone 1</a:t>
-            </a:r>
-            <a:endParaRPr lang="en-US" sz="2200" dirty="0"/>
-          </a:p>
-        </p:txBody>
-      </p:sp>
-      <p:sp>
-        <p:nvSpPr>
-          <p:cNvPr id="6" name="Text 4"/>
-          <p:cNvSpPr/>
-          <p:nvPr/>
-        </p:nvSpPr>
-        <p:spPr>
-          <a:xfrm>
-            <a:off x="274320" y="3063240"/>
-            <a:ext cx="3566160" cy="731520"/>
-          </a:xfrm>
-          <a:prstGeom prst="rect">
-            <a:avLst/>
-          </a:prstGeom>
-          <a:noFill/>
-          <a:ln/>
-        </p:spPr>
-        <p:txBody>
-          <a:bodyPr wrap="square" rtlCol="0" anchor="ctr"/>
-          <a:lstStyle/>
-          <a:p>
-            <a:pPr marL="0" indent="0" algn="ctr">
-              <a:buNone/>
-            </a:pPr>
-            <a:r>
-              <a:rPr lang="en-US" sz="1400" dirty="0">
-                <a:solidFill>
-                  <a:srgbClr val="7A9ABB"/>
-                </a:solidFill>
-                <a:latin typeface="Calibri" pitchFamily="34" charset="0"/>
-                <a:ea typeface="Calibri" pitchFamily="34" charset="-122"/>
-                <a:cs typeface="Calibri" pitchFamily="34" charset="-120"/>
-              </a:rPr>
-              <a:t>Data Collection &amp;</a:t>
-            </a:r>
-            <a:endParaRPr lang="en-US" sz="1400" dirty="0"/>
-          </a:p>
-          <a:p>
-            <a:pPr marL="0" indent="0" algn="ctr">
-              <a:buNone/>
-            </a:pPr>
-            <a:r>
-              <a:rPr lang="en-US" sz="1400" dirty="0">
-                <a:solidFill>
-                  <a:srgbClr val="7A9ABB"/>
-                </a:solidFill>
-                <a:latin typeface="Calibri" pitchFamily="34" charset="0"/>
-                <a:ea typeface="Calibri" pitchFamily="34" charset="-122"/>
-                <a:cs typeface="Calibri" pitchFamily="34" charset="-120"/>
-              </a:rPr>
-              <a:t>Preprocessing</a:t>
-            </a:r>
-            <a:endParaRPr lang="en-US" sz="1400" dirty="0"/>
-          </a:p>
-        </p:txBody>
-      </p:sp>
-      <p:sp>
-        <p:nvSpPr>
-          <p:cNvPr id="7" name="Shape 5"/>
-          <p:cNvSpPr/>
-          <p:nvPr/>
-        </p:nvSpPr>
-        <p:spPr>
-          <a:xfrm>
-            <a:off x="4572000" y="457200"/>
-            <a:ext cx="502920" cy="502920"/>
+            <a:endParaRPr lang="en-US"/>
+          </a:p>
+        </p:txBody>
+      </p:sp>
+      <p:sp>
+        <p:nvSpPr>
+          <p:cNvPr id="41" name="StripM4"/>
+          <p:cNvSpPr/>
+          <p:nvPr/>
+        </p:nvSpPr>
+        <p:spPr>
+          <a:xfrm>
+            <a:off x="6914400" y="838000"/>
+            <a:ext cx="57150" cy="3700000"/>
           </a:xfrm>
           <a:prstGeom prst="rect">
             <a:avLst/>
@@ -15212,148 +16400,59 @@
           <a:solidFill>
             <a:srgbClr val="A78BFA"/>
           </a:solidFill>
-          <a:ln w="12700">
-            <a:solidFill>
-              <a:srgbClr val="A78BFA"/>
-            </a:solidFill>
-            <a:prstDash val="solid"/>
+          <a:ln>
+            <a:noFill/>
           </a:ln>
         </p:spPr>
         <p:txBody>
           <a:bodyPr/>
           <a:lstStyle/>
           <a:p>
-            <a:endParaRPr lang="en-IN"/>
-          </a:p>
-        </p:txBody>
-      </p:sp>
-      <p:sp>
-        <p:nvSpPr>
-          <p:cNvPr id="8" name="Text 6"/>
-          <p:cNvSpPr/>
-          <p:nvPr/>
-        </p:nvSpPr>
-        <p:spPr>
-          <a:xfrm>
-            <a:off x="4572000" y="457200"/>
-            <a:ext cx="502920" cy="502920"/>
-          </a:xfrm>
-          <a:prstGeom prst="rect">
-            <a:avLst/>
-          </a:prstGeom>
-          <a:noFill/>
-          <a:ln/>
-        </p:spPr>
-        <p:txBody>
-          <a:bodyPr wrap="square" rtlCol="0" anchor="ctr"/>
-          <a:lstStyle/>
-          <a:p>
-            <a:pPr marL="0" indent="0" algn="ctr">
-              <a:buNone/>
-            </a:pPr>
-            <a:r>
-              <a:rPr lang="en-US" sz="1300" b="1" dirty="0">
-                <a:solidFill>
-                  <a:srgbClr val="FFFFFF"/>
-                </a:solidFill>
-                <a:latin typeface="Calibri" pitchFamily="34" charset="0"/>
-                <a:ea typeface="Calibri" pitchFamily="34" charset="-122"/>
-                <a:cs typeface="Calibri" pitchFamily="34" charset="-120"/>
-              </a:rPr>
-              <a:t>01</a:t>
-            </a:r>
-            <a:endParaRPr lang="en-US" sz="1300" dirty="0"/>
-          </a:p>
-        </p:txBody>
-      </p:sp>
-      <p:sp>
-        <p:nvSpPr>
-          <p:cNvPr id="9" name="Text 7"/>
-          <p:cNvSpPr/>
-          <p:nvPr/>
-        </p:nvSpPr>
-        <p:spPr>
-          <a:xfrm>
-            <a:off x="5212080" y="475488"/>
-            <a:ext cx="3657600" cy="256032"/>
-          </a:xfrm>
-          <a:prstGeom prst="rect">
-            <a:avLst/>
-          </a:prstGeom>
-          <a:noFill/>
-          <a:ln/>
-        </p:spPr>
-        <p:txBody>
-          <a:bodyPr wrap="square" lIns="0" tIns="0" rIns="0" bIns="0" rtlCol="0" anchor="ctr"/>
-          <a:lstStyle/>
-          <a:p>
-            <a:pPr marL="0" indent="0">
-              <a:buNone/>
-            </a:pPr>
-            <a:r>
-              <a:rPr lang="en-US" sz="1400" b="1" dirty="0">
-                <a:solidFill>
-                  <a:srgbClr val="DCE8F5"/>
-                </a:solidFill>
-                <a:latin typeface="Calibri" pitchFamily="34" charset="0"/>
-                <a:ea typeface="Calibri" pitchFamily="34" charset="-122"/>
-                <a:cs typeface="Calibri" pitchFamily="34" charset="-120"/>
-              </a:rPr>
-              <a:t>Upload CSV</a:t>
-            </a:r>
-            <a:endParaRPr lang="en-US" sz="1400" dirty="0"/>
-          </a:p>
-        </p:txBody>
-      </p:sp>
-      <p:sp>
-        <p:nvSpPr>
-          <p:cNvPr id="10" name="Text 8"/>
-          <p:cNvSpPr/>
-          <p:nvPr/>
-        </p:nvSpPr>
-        <p:spPr>
-          <a:xfrm>
-            <a:off x="5212080" y="713232"/>
-            <a:ext cx="3657600" cy="256032"/>
-          </a:xfrm>
-          <a:prstGeom prst="rect">
-            <a:avLst/>
-          </a:prstGeom>
-          <a:noFill/>
-          <a:ln/>
-        </p:spPr>
-        <p:txBody>
-          <a:bodyPr wrap="square" lIns="0" tIns="0" rIns="0" bIns="0" rtlCol="0" anchor="ctr"/>
-          <a:lstStyle/>
-          <a:p>
-            <a:pPr marL="0" indent="0">
-              <a:buNone/>
-            </a:pPr>
-            <a:r>
-              <a:rPr lang="en-US" sz="1100" dirty="0">
-                <a:solidFill>
-                  <a:srgbClr val="7A9ABB"/>
-                </a:solidFill>
-                <a:latin typeface="Calibri" pitchFamily="34" charset="0"/>
-                <a:ea typeface="Calibri" pitchFamily="34" charset="-122"/>
-                <a:cs typeface="Calibri" pitchFamily="34" charset="-120"/>
-              </a:rPr>
-              <a:t>User uploads a fitness tracking CSV file</a:t>
-            </a:r>
-            <a:endParaRPr lang="en-US" sz="1100" dirty="0"/>
-          </a:p>
-        </p:txBody>
-      </p:sp>
-      <p:sp>
-        <p:nvSpPr>
-          <p:cNvPr id="11" name="Shape 9"/>
-          <p:cNvSpPr/>
-          <p:nvPr/>
-        </p:nvSpPr>
-        <p:spPr>
-          <a:xfrm>
-            <a:off x="4572000" y="1554480"/>
-            <a:ext cx="502920" cy="502920"/>
+            <a:endParaRPr lang="en-US"/>
+          </a:p>
+        </p:txBody>
+      </p:sp>
+      <p:sp>
+        <p:nvSpPr>
+          <p:cNvPr id="42" name="HdrBandM4"/>
+          <p:cNvSpPr/>
+          <p:nvPr/>
+        </p:nvSpPr>
+        <p:spPr>
+          <a:xfrm>
+            <a:off x="6971550" y="838000"/>
+            <a:ext cx="1944450" cy="420000"/>
+          </a:xfrm>
+          <a:prstGeom prst="rect">
+            <a:avLst/>
+          </a:prstGeom>
+          <a:solidFill>
+            <a:srgbClr val="A78BFA">
+              <a:alpha val="25000"/>
+            </a:srgbClr>
+          </a:solidFill>
+          <a:ln>
+            <a:noFill/>
+          </a:ln>
+        </p:spPr>
+        <p:txBody>
+          <a:bodyPr/>
+          <a:lstStyle/>
+          <a:p>
+            <a:endParaRPr lang="en-US"/>
+          </a:p>
+        </p:txBody>
+      </p:sp>
+      <p:sp>
+        <p:nvSpPr>
+          <p:cNvPr id="43" name="PillM4"/>
+          <p:cNvSpPr/>
+          <p:nvPr/>
+        </p:nvSpPr>
+        <p:spPr>
+          <a:xfrm>
+            <a:off x="7004400" y="900000"/>
+            <a:ext cx="340000" cy="290000"/>
           </a:xfrm>
           <a:prstGeom prst="rect">
             <a:avLst/>
@@ -15361,76 +16460,47 @@
           <a:solidFill>
             <a:srgbClr val="A78BFA"/>
           </a:solidFill>
-          <a:ln w="12700">
-            <a:solidFill>
-              <a:srgbClr val="A78BFA"/>
-            </a:solidFill>
-            <a:prstDash val="solid"/>
+          <a:ln>
+            <a:noFill/>
           </a:ln>
         </p:spPr>
         <p:txBody>
-          <a:bodyPr/>
-          <a:lstStyle/>
-          <a:p>
-            <a:endParaRPr lang="en-IN"/>
-          </a:p>
-        </p:txBody>
-      </p:sp>
-      <p:sp>
-        <p:nvSpPr>
-          <p:cNvPr id="12" name="Text 10"/>
-          <p:cNvSpPr/>
-          <p:nvPr/>
-        </p:nvSpPr>
-        <p:spPr>
-          <a:xfrm>
-            <a:off x="4572000" y="1554480"/>
-            <a:ext cx="502920" cy="502920"/>
-          </a:xfrm>
-          <a:prstGeom prst="rect">
-            <a:avLst/>
-          </a:prstGeom>
-          <a:noFill/>
-          <a:ln/>
-        </p:spPr>
-        <p:txBody>
-          <a:bodyPr wrap="square" rtlCol="0" anchor="ctr"/>
-          <a:lstStyle/>
-          <a:p>
-            <a:pPr marL="0" indent="0" algn="ctr">
-              <a:buNone/>
-            </a:pPr>
-            <a:r>
-              <a:rPr lang="en-US" sz="1300" b="1" dirty="0">
-                <a:solidFill>
-                  <a:srgbClr val="FFFFFF"/>
-                </a:solidFill>
-                <a:latin typeface="Calibri" pitchFamily="34" charset="0"/>
-                <a:ea typeface="Calibri" pitchFamily="34" charset="-122"/>
-                <a:cs typeface="Calibri" pitchFamily="34" charset="-120"/>
-              </a:rPr>
-              <a:t>02</a:t>
-            </a:r>
-            <a:endParaRPr lang="en-US" sz="1300" dirty="0"/>
-          </a:p>
-        </p:txBody>
-      </p:sp>
-      <p:sp>
-        <p:nvSpPr>
-          <p:cNvPr id="13" name="Text 11"/>
-          <p:cNvSpPr/>
-          <p:nvPr/>
-        </p:nvSpPr>
-        <p:spPr>
-          <a:xfrm>
-            <a:off x="5212080" y="1572768"/>
-            <a:ext cx="3657600" cy="256032"/>
-          </a:xfrm>
-          <a:prstGeom prst="rect">
-            <a:avLst/>
-          </a:prstGeom>
-          <a:noFill/>
-          <a:ln/>
+          <a:bodyPr wrap="square" lIns="45720" tIns="0" rIns="45720" bIns="0" rtlCol="0" anchor="ctr"/>
+          <a:lstStyle/>
+          <a:p>
+            <a:pPr algn="ctr">
+              <a:buNone/>
+            </a:pPr>
+            <a:r>
+              <a:rPr lang="en-US" sz="1100" b="1" dirty="0">
+                <a:solidFill>
+                  <a:srgbClr val="0D1B2A"/>
+                </a:solidFill>
+                <a:latin typeface="Calibri" pitchFamily="34" charset="0"/>
+              </a:rPr>
+              <a:t>M4</a:t>
+            </a:r>
+          </a:p>
+        </p:txBody>
+      </p:sp>
+      <p:sp>
+        <p:nvSpPr>
+          <p:cNvPr id="44" name="TitleM4"/>
+          <p:cNvSpPr/>
+          <p:nvPr/>
+        </p:nvSpPr>
+        <p:spPr>
+          <a:xfrm>
+            <a:off x="7374400" y="900000"/>
+            <a:ext cx="1534450" cy="290000"/>
+          </a:xfrm>
+          <a:prstGeom prst="rect">
+            <a:avLst/>
+          </a:prstGeom>
+          <a:noFill/>
+          <a:ln>
+            <a:noFill/>
+          </a:ln>
         </p:spPr>
         <p:txBody>
           <a:bodyPr wrap="square" lIns="0" tIns="0" rIns="0" bIns="0" rtlCol="0" anchor="ctr"/>
@@ -15440,354 +16510,189 @@
               <a:buNone/>
             </a:pPr>
             <a:r>
-              <a:rPr lang="en-US" sz="1400" b="1" dirty="0">
+              <a:rPr lang="en-US" sz="1200" b="1" dirty="0">
+                <a:solidFill>
+                  <a:srgbClr val="A78BFA"/>
+                </a:solidFill>
+                <a:latin typeface="Calibri" pitchFamily="34" charset="0"/>
+              </a:rPr>
+              <a:t>Insights Dashboard</a:t>
+            </a:r>
+          </a:p>
+        </p:txBody>
+      </p:sp>
+      <p:sp>
+        <p:nvSpPr>
+          <p:cNvPr id="45" name="BodyM4"/>
+          <p:cNvSpPr/>
+          <p:nvPr/>
+        </p:nvSpPr>
+        <p:spPr>
+          <a:xfrm>
+            <a:off x="7004400" y="1300000"/>
+            <a:ext cx="1871600" cy="3190000"/>
+          </a:xfrm>
+          <a:prstGeom prst="rect">
+            <a:avLst/>
+          </a:prstGeom>
+          <a:noFill/>
+          <a:ln>
+            <a:noFill/>
+          </a:ln>
+        </p:spPr>
+        <p:txBody>
+          <a:bodyPr wrap="square" lIns="45720" tIns="45720" rIns="45720" bIns="45720" rtlCol="0" anchor="t"/>
+          <a:lstStyle/>
+          <a:p>
+            <a:pPr marL="0" indent="0">
+              <a:lnSpc>
+                <a:spcPts val="1250"/>
+              </a:lnSpc>
+              <a:buNone/>
+            </a:pPr>
+            <a:r>
+              <a:rPr lang="en-US" sz="1000" b="1" dirty="0">
                 <a:solidFill>
                   <a:srgbClr val="DCE8F5"/>
                 </a:solidFill>
                 <a:latin typeface="Calibri" pitchFamily="34" charset="0"/>
-                <a:ea typeface="Calibri" pitchFamily="34" charset="-122"/>
-                <a:cs typeface="Calibri" pitchFamily="34" charset="-120"/>
-              </a:rPr>
-              <a:t>Inspect</a:t>
-            </a:r>
-            <a:endParaRPr lang="en-US" sz="1400" dirty="0"/>
-          </a:p>
-        </p:txBody>
-      </p:sp>
-      <p:sp>
-        <p:nvSpPr>
-          <p:cNvPr id="14" name="Text 12"/>
-          <p:cNvSpPr/>
-          <p:nvPr/>
-        </p:nvSpPr>
-        <p:spPr>
-          <a:xfrm>
-            <a:off x="5212080" y="1810512"/>
-            <a:ext cx="3657600" cy="256032"/>
-          </a:xfrm>
-          <a:prstGeom prst="rect">
-            <a:avLst/>
-          </a:prstGeom>
-          <a:noFill/>
-          <a:ln/>
-        </p:spPr>
-        <p:txBody>
-          <a:bodyPr wrap="square" lIns="0" tIns="0" rIns="0" bIns="0" rtlCol="0" anchor="ctr"/>
-          <a:lstStyle/>
-          <a:p>
-            <a:pPr marL="0" indent="0">
-              <a:buNone/>
-            </a:pPr>
-            <a:r>
-              <a:rPr lang="en-US" sz="1100" dirty="0">
-                <a:solidFill>
-                  <a:srgbClr val="7A9ABB"/>
-                </a:solidFill>
-                <a:latin typeface="Calibri" pitchFamily="34" charset="0"/>
-                <a:ea typeface="Calibri" pitchFamily="34" charset="-122"/>
-                <a:cs typeface="Calibri" pitchFamily="34" charset="-120"/>
-              </a:rPr>
-              <a:t>Preview raw data, check missing values &amp; types</a:t>
-            </a:r>
-            <a:endParaRPr lang="en-US" sz="1100" dirty="0"/>
-          </a:p>
-        </p:txBody>
-      </p:sp>
-      <p:sp>
-        <p:nvSpPr>
-          <p:cNvPr id="15" name="Shape 13"/>
-          <p:cNvSpPr/>
-          <p:nvPr/>
-        </p:nvSpPr>
-        <p:spPr>
-          <a:xfrm>
-            <a:off x="4572000" y="2651760"/>
-            <a:ext cx="502920" cy="502920"/>
-          </a:xfrm>
-          <a:prstGeom prst="rect">
-            <a:avLst/>
-          </a:prstGeom>
-          <a:solidFill>
-            <a:srgbClr val="A78BFA"/>
-          </a:solidFill>
-          <a:ln w="12700">
-            <a:solidFill>
-              <a:srgbClr val="A78BFA"/>
-            </a:solidFill>
-            <a:prstDash val="solid"/>
-          </a:ln>
-        </p:spPr>
-        <p:txBody>
-          <a:bodyPr/>
-          <a:lstStyle/>
-          <a:p>
-            <a:endParaRPr lang="en-IN"/>
-          </a:p>
-        </p:txBody>
-      </p:sp>
-      <p:sp>
-        <p:nvSpPr>
-          <p:cNvPr id="16" name="Text 14"/>
-          <p:cNvSpPr/>
-          <p:nvPr/>
-        </p:nvSpPr>
-        <p:spPr>
-          <a:xfrm>
-            <a:off x="4572000" y="2651760"/>
-            <a:ext cx="502920" cy="502920"/>
-          </a:xfrm>
-          <a:prstGeom prst="rect">
-            <a:avLst/>
-          </a:prstGeom>
-          <a:noFill/>
-          <a:ln/>
-        </p:spPr>
-        <p:txBody>
-          <a:bodyPr wrap="square" rtlCol="0" anchor="ctr"/>
-          <a:lstStyle/>
-          <a:p>
-            <a:pPr marL="0" indent="0" algn="ctr">
-              <a:buNone/>
-            </a:pPr>
-            <a:r>
-              <a:rPr lang="en-US" sz="1300" b="1" dirty="0">
-                <a:solidFill>
-                  <a:srgbClr val="FFFFFF"/>
-                </a:solidFill>
-                <a:latin typeface="Calibri" pitchFamily="34" charset="0"/>
-                <a:ea typeface="Calibri" pitchFamily="34" charset="-122"/>
-                <a:cs typeface="Calibri" pitchFamily="34" charset="-120"/>
-              </a:rPr>
-              <a:t>03</a:t>
-            </a:r>
-            <a:endParaRPr lang="en-US" sz="1300" dirty="0"/>
-          </a:p>
-        </p:txBody>
-      </p:sp>
-      <p:sp>
-        <p:nvSpPr>
-          <p:cNvPr id="17" name="Text 15"/>
-          <p:cNvSpPr/>
-          <p:nvPr/>
-        </p:nvSpPr>
-        <p:spPr>
-          <a:xfrm>
-            <a:off x="5212080" y="2670048"/>
-            <a:ext cx="3657600" cy="256032"/>
-          </a:xfrm>
-          <a:prstGeom prst="rect">
-            <a:avLst/>
-          </a:prstGeom>
-          <a:noFill/>
-          <a:ln/>
-        </p:spPr>
-        <p:txBody>
-          <a:bodyPr wrap="square" lIns="0" tIns="0" rIns="0" bIns="0" rtlCol="0" anchor="ctr"/>
-          <a:lstStyle/>
-          <a:p>
-            <a:pPr marL="0" indent="0">
-              <a:buNone/>
-            </a:pPr>
-            <a:r>
-              <a:rPr lang="en-US" sz="1400" b="1" dirty="0">
+              </a:rPr>
+              <a:t>Objective</a:t>
+            </a:r>
+          </a:p>
+          <a:p>
+            <a:pPr marL="0" indent="0">
+              <a:lnSpc>
+                <a:spcPts val="1250"/>
+              </a:lnSpc>
+              <a:spcAft>
+                <a:spcPts val="300"/>
+              </a:spcAft>
+              <a:buNone/>
+            </a:pPr>
+            <a:r>
+              <a:rPr lang="en-US" sz="850" i="1" dirty="0">
+                <a:solidFill>
+                  <a:srgbClr val="94A3B8"/>
+                </a:solidFill>
+                <a:latin typeface="Calibri Light" pitchFamily="34" charset="0"/>
+              </a:rPr>
+              <a:t>Deliver a live, filterable dashboard with one-click reports.</a:t>
+            </a:r>
+          </a:p>
+          <a:p>
+            <a:pPr marL="0" indent="0">
+              <a:lnSpc>
+                <a:spcPts val="1250"/>
+              </a:lnSpc>
+              <a:buNone/>
+            </a:pPr>
+            <a:r>
+              <a:rPr lang="en-US" sz="950" b="1" dirty="0">
                 <a:solidFill>
                   <a:srgbClr val="DCE8F5"/>
                 </a:solidFill>
                 <a:latin typeface="Calibri" pitchFamily="34" charset="0"/>
-                <a:ea typeface="Calibri" pitchFamily="34" charset="-122"/>
-                <a:cs typeface="Calibri" pitchFamily="34" charset="-120"/>
-              </a:rPr>
-              <a:t>Clean</a:t>
-            </a:r>
-            <a:endParaRPr lang="en-US" sz="1400" dirty="0"/>
-          </a:p>
-        </p:txBody>
-      </p:sp>
-      <p:sp>
-        <p:nvSpPr>
-          <p:cNvPr id="18" name="Text 16"/>
-          <p:cNvSpPr/>
-          <p:nvPr/>
-        </p:nvSpPr>
-        <p:spPr>
-          <a:xfrm>
-            <a:off x="5212080" y="2907792"/>
-            <a:ext cx="3657600" cy="256032"/>
-          </a:xfrm>
-          <a:prstGeom prst="rect">
-            <a:avLst/>
-          </a:prstGeom>
-          <a:noFill/>
-          <a:ln/>
-        </p:spPr>
-        <p:txBody>
-          <a:bodyPr wrap="square" lIns="0" tIns="0" rIns="0" bIns="0" rtlCol="0" anchor="ctr"/>
-          <a:lstStyle/>
-          <a:p>
-            <a:pPr marL="0" indent="0">
-              <a:buNone/>
-            </a:pPr>
-            <a:r>
-              <a:rPr lang="en-US" sz="1100" dirty="0">
-                <a:solidFill>
-                  <a:srgbClr val="7A9ABB"/>
-                </a:solidFill>
-                <a:latin typeface="Calibri" pitchFamily="34" charset="0"/>
-                <a:ea typeface="Calibri" pitchFamily="34" charset="-122"/>
-                <a:cs typeface="Calibri" pitchFamily="34" charset="-120"/>
-              </a:rPr>
-              <a:t>Fix dates, interpolate numbers, fill categories</a:t>
-            </a:r>
-            <a:endParaRPr lang="en-US" sz="1100" dirty="0"/>
-          </a:p>
-        </p:txBody>
-      </p:sp>
-      <p:sp>
-        <p:nvSpPr>
-          <p:cNvPr id="19" name="Shape 17"/>
-          <p:cNvSpPr/>
-          <p:nvPr/>
-        </p:nvSpPr>
-        <p:spPr>
-          <a:xfrm>
-            <a:off x="4572000" y="3749040"/>
-            <a:ext cx="502920" cy="502920"/>
-          </a:xfrm>
-          <a:prstGeom prst="rect">
-            <a:avLst/>
-          </a:prstGeom>
-          <a:solidFill>
-            <a:srgbClr val="A78BFA"/>
-          </a:solidFill>
-          <a:ln w="12700">
-            <a:solidFill>
-              <a:srgbClr val="A78BFA"/>
-            </a:solidFill>
-            <a:prstDash val="solid"/>
-          </a:ln>
-        </p:spPr>
-        <p:txBody>
-          <a:bodyPr/>
-          <a:lstStyle/>
-          <a:p>
-            <a:endParaRPr lang="en-IN"/>
-          </a:p>
-        </p:txBody>
-      </p:sp>
-      <p:sp>
-        <p:nvSpPr>
-          <p:cNvPr id="20" name="Text 18"/>
-          <p:cNvSpPr/>
-          <p:nvPr/>
-        </p:nvSpPr>
-        <p:spPr>
-          <a:xfrm>
-            <a:off x="4572000" y="3749040"/>
-            <a:ext cx="502920" cy="502920"/>
-          </a:xfrm>
-          <a:prstGeom prst="rect">
-            <a:avLst/>
-          </a:prstGeom>
-          <a:noFill/>
-          <a:ln/>
-        </p:spPr>
-        <p:txBody>
-          <a:bodyPr wrap="square" rtlCol="0" anchor="ctr"/>
-          <a:lstStyle/>
-          <a:p>
-            <a:pPr marL="0" indent="0" algn="ctr">
-              <a:buNone/>
-            </a:pPr>
-            <a:r>
-              <a:rPr lang="en-US" sz="1300" b="1" dirty="0">
-                <a:solidFill>
-                  <a:srgbClr val="FFFFFF"/>
-                </a:solidFill>
-                <a:latin typeface="Calibri" pitchFamily="34" charset="0"/>
-                <a:ea typeface="Calibri" pitchFamily="34" charset="-122"/>
-                <a:cs typeface="Calibri" pitchFamily="34" charset="-120"/>
-              </a:rPr>
-              <a:t>04</a:t>
-            </a:r>
-            <a:endParaRPr lang="en-US" sz="1300" dirty="0"/>
-          </a:p>
-        </p:txBody>
-      </p:sp>
-      <p:sp>
-        <p:nvSpPr>
-          <p:cNvPr id="21" name="Text 19"/>
-          <p:cNvSpPr/>
-          <p:nvPr/>
-        </p:nvSpPr>
-        <p:spPr>
-          <a:xfrm>
-            <a:off x="5212080" y="3767328"/>
-            <a:ext cx="3657600" cy="256032"/>
-          </a:xfrm>
-          <a:prstGeom prst="rect">
-            <a:avLst/>
-          </a:prstGeom>
-          <a:noFill/>
-          <a:ln/>
-        </p:spPr>
-        <p:txBody>
-          <a:bodyPr wrap="square" lIns="0" tIns="0" rIns="0" bIns="0" rtlCol="0" anchor="ctr"/>
-          <a:lstStyle/>
-          <a:p>
-            <a:pPr marL="0" indent="0">
-              <a:buNone/>
-            </a:pPr>
-            <a:r>
-              <a:rPr lang="en-US" sz="1400" b="1" dirty="0">
-                <a:solidFill>
-                  <a:srgbClr val="DCE8F5"/>
-                </a:solidFill>
-                <a:latin typeface="Calibri" pitchFamily="34" charset="0"/>
-                <a:ea typeface="Calibri" pitchFamily="34" charset="-122"/>
-                <a:cs typeface="Calibri" pitchFamily="34" charset="-120"/>
-              </a:rPr>
-              <a:t>Visualise</a:t>
-            </a:r>
-            <a:endParaRPr lang="en-US" sz="1400" dirty="0"/>
-          </a:p>
-        </p:txBody>
-      </p:sp>
-      <p:sp>
-        <p:nvSpPr>
-          <p:cNvPr id="22" name="Text 20"/>
-          <p:cNvSpPr/>
-          <p:nvPr/>
-        </p:nvSpPr>
-        <p:spPr>
-          <a:xfrm>
-            <a:off x="5212080" y="4005072"/>
-            <a:ext cx="3657600" cy="256032"/>
-          </a:xfrm>
-          <a:prstGeom prst="rect">
-            <a:avLst/>
-          </a:prstGeom>
-          <a:noFill/>
-          <a:ln/>
-        </p:spPr>
-        <p:txBody>
-          <a:bodyPr wrap="square" lIns="0" tIns="0" rIns="0" bIns="0" rtlCol="0" anchor="ctr"/>
-          <a:lstStyle/>
-          <a:p>
-            <a:pPr marL="0" indent="0">
-              <a:buNone/>
-            </a:pPr>
-            <a:r>
-              <a:rPr lang="en-US" sz="1100" dirty="0">
-                <a:solidFill>
-                  <a:srgbClr val="7A9ABB"/>
-                </a:solidFill>
-                <a:latin typeface="Calibri" pitchFamily="34" charset="0"/>
-                <a:ea typeface="Calibri" pitchFamily="34" charset="-122"/>
-                <a:cs typeface="Calibri" pitchFamily="34" charset="-120"/>
-              </a:rPr>
-              <a:t>Detect outliers with Box Plot &amp; Histogram</a:t>
-            </a:r>
-            <a:endParaRPr lang="en-US" sz="1100" dirty="0"/>
+              </a:rPr>
+              <a:t>What We Do</a:t>
+            </a:r>
+          </a:p>
+          <a:p>
+            <a:pPr marL="114300" indent="-114300">
+              <a:lnSpc>
+                <a:spcPts val="1250"/>
+              </a:lnSpc>
+              <a:buChar char="▸"/>
+            </a:pPr>
+            <a:r>
+              <a:rPr lang="en-US" sz="900" dirty="0">
+                <a:solidFill>
+                  <a:srgbClr val="94A3B8"/>
+                </a:solidFill>
+                <a:latin typeface="Calibri Light" pitchFamily="34" charset="0"/>
+              </a:rPr>
+              <a:t>6 live KPI cards: flags, HR, Steps, Sleep, users, peak day</a:t>
+            </a:r>
+          </a:p>
+          <a:p>
+            <a:pPr marL="114300" indent="-114300">
+              <a:lnSpc>
+                <a:spcPts val="1250"/>
+              </a:lnSpc>
+              <a:buChar char="▸"/>
+            </a:pPr>
+            <a:r>
+              <a:rPr lang="en-US" sz="900" dirty="0">
+                <a:solidFill>
+                  <a:srgbClr val="94A3B8"/>
+                </a:solidFill>
+                <a:latin typeface="Calibri Light" pitchFamily="34" charset="0"/>
+              </a:rPr>
+              <a:t>Date range and per-user filters in the sidebar</a:t>
+            </a:r>
+          </a:p>
+          <a:p>
+            <a:pPr marL="114300" indent="-114300">
+              <a:lnSpc>
+                <a:spcPts val="1250"/>
+              </a:lnSpc>
+              <a:buChar char="▸"/>
+            </a:pPr>
+            <a:r>
+              <a:rPr lang="en-US" sz="900" dirty="0">
+                <a:solidFill>
+                  <a:srgbClr val="94A3B8"/>
+                </a:solidFill>
+                <a:latin typeface="Calibri Light" pitchFamily="34" charset="0"/>
+              </a:rPr>
+              <a:t>Combined anomaly timeline and per-metric deep-dive tabs</a:t>
+            </a:r>
+          </a:p>
+          <a:p>
+            <a:pPr marL="114300" indent="-114300">
+              <a:lnSpc>
+                <a:spcPts val="1250"/>
+              </a:lnSpc>
+              <a:buChar char="▸"/>
+            </a:pPr>
+            <a:r>
+              <a:rPr lang="en-US" sz="900" dirty="0">
+                <a:solidFill>
+                  <a:srgbClr val="94A3B8"/>
+                </a:solidFill>
+                <a:latin typeface="Calibri Light" pitchFamily="34" charset="0"/>
+              </a:rPr>
+              <a:t>Export: PDF report (9 sections) + full CSV anomaly log</a:t>
+            </a:r>
+          </a:p>
+          <a:p>
+            <a:pPr marL="0" indent="0">
+              <a:lnSpc>
+                <a:spcPts val="1250"/>
+              </a:lnSpc>
+              <a:spcBef>
+                <a:spcPts val="300"/>
+              </a:spcBef>
+              <a:buNone/>
+            </a:pPr>
+            <a:r>
+              <a:rPr lang="en-US" sz="900" b="1" dirty="0">
+                <a:solidFill>
+                  <a:srgbClr val="A78BFA"/>
+                </a:solidFill>
+                <a:latin typeface="Calibri" pitchFamily="34" charset="0"/>
+              </a:rPr>
+              <a:t>Output: </a:t>
+            </a:r>
+            <a:r>
+              <a:rPr lang="en-US" sz="900" dirty="0">
+                <a:solidFill>
+                  <a:srgbClr val="94A3B8"/>
+                </a:solidFill>
+                <a:latin typeface="Calibri Light" pitchFamily="34" charset="0"/>
+              </a:rPr>
+              <a:t>PDF and CSV reports for doctors and coaches</a:t>
+            </a:r>
           </a:p>
         </p:txBody>
       </p:sp>
@@ -17669,7 +18574,7 @@
 
 <file path=ppt/slides/slide4.xml><?xml version="1.0" encoding="utf-8"?>
 <p:sld xmlns:a="http://schemas.openxmlformats.org/drawingml/2006/main" xmlns:r="http://schemas.openxmlformats.org/officeDocument/2006/relationships" xmlns:p="http://schemas.openxmlformats.org/presentationml/2006/main">
-  <p:cSld name="Slide 4">
+  <p:cSld name="Slide 3">
     <p:bg>
       <p:bgPr>
         <a:solidFill>
@@ -17701,7 +18606,39 @@
         <p:spPr>
           <a:xfrm>
             <a:off x="0" y="0"/>
-            <a:ext cx="9144000" cy="73152"/>
+            <a:ext cx="4114800" cy="5143500"/>
+          </a:xfrm>
+          <a:prstGeom prst="rect">
+            <a:avLst/>
+          </a:prstGeom>
+          <a:solidFill>
+            <a:srgbClr val="162A41"/>
+          </a:solidFill>
+          <a:ln w="12700">
+            <a:solidFill>
+              <a:srgbClr val="162A41"/>
+            </a:solidFill>
+            <a:prstDash val="solid"/>
+          </a:ln>
+        </p:spPr>
+        <p:txBody>
+          <a:bodyPr/>
+          <a:lstStyle/>
+          <a:p>
+            <a:endParaRPr lang="en-IN"/>
+          </a:p>
+        </p:txBody>
+      </p:sp>
+      <p:sp>
+        <p:nvSpPr>
+          <p:cNvPr id="3" name="Shape 1"/>
+          <p:cNvSpPr/>
+          <p:nvPr/>
+        </p:nvSpPr>
+        <p:spPr>
+          <a:xfrm>
+            <a:off x="4114800" y="0"/>
+            <a:ext cx="54864" cy="5143500"/>
           </a:xfrm>
           <a:prstGeom prst="rect">
             <a:avLst/>
@@ -17726,14 +18663,14 @@
       </p:sp>
       <p:sp>
         <p:nvSpPr>
-          <p:cNvPr id="3" name="Text 1"/>
-          <p:cNvSpPr/>
-          <p:nvPr/>
-        </p:nvSpPr>
-        <p:spPr>
-          <a:xfrm>
-            <a:off x="365760" y="182880"/>
-            <a:ext cx="8412480" cy="548640"/>
+          <p:cNvPr id="4" name="Text 2"/>
+          <p:cNvSpPr/>
+          <p:nvPr/>
+        </p:nvSpPr>
+        <p:spPr>
+          <a:xfrm>
+            <a:off x="274320" y="1097280"/>
+            <a:ext cx="3566160" cy="1371600"/>
           </a:xfrm>
           <a:prstGeom prst="rect">
             <a:avLst/>
@@ -17742,76 +18679,134 @@
           <a:ln/>
         </p:spPr>
         <p:txBody>
-          <a:bodyPr wrap="square" lIns="0" tIns="0" rIns="0" bIns="0" rtlCol="0" anchor="ctr"/>
-          <a:lstStyle/>
-          <a:p>
-            <a:pPr marL="0" indent="0">
-              <a:buNone/>
-            </a:pPr>
-            <a:r>
-              <a:rPr lang="en-US" sz="2800" b="1" dirty="0">
-                <a:solidFill>
-                  <a:srgbClr val="A78BFA"/>
+          <a:bodyPr wrap="square" rtlCol="0" anchor="ctr"/>
+          <a:lstStyle/>
+          <a:p>
+            <a:pPr marL="0" indent="0" algn="ctr">
+              <a:buNone/>
+            </a:pPr>
+            <a:r>
+              <a:rPr lang="en-US" sz="9600" b="1" dirty="0">
+                <a:solidFill>
+                  <a:srgbClr val="A78BFA">
+                    <a:alpha val="70000"/>
+                  </a:srgbClr>
                 </a:solidFill>
                 <a:latin typeface="Calibri" pitchFamily="34" charset="0"/>
                 <a:ea typeface="Calibri" pitchFamily="34" charset="-122"/>
                 <a:cs typeface="Calibri" pitchFamily="34" charset="-120"/>
               </a:rPr>
-              <a:t>Milestone 1 — Key Features</a:t>
-            </a:r>
-            <a:endParaRPr lang="en-US" sz="2800" dirty="0"/>
-          </a:p>
-        </p:txBody>
-      </p:sp>
-      <p:sp>
-        <p:nvSpPr>
-          <p:cNvPr id="4" name="Shape 2"/>
-          <p:cNvSpPr/>
-          <p:nvPr/>
-        </p:nvSpPr>
-        <p:spPr>
-          <a:xfrm>
-            <a:off x="228600" y="914400"/>
-            <a:ext cx="2834640" cy="3840480"/>
-          </a:xfrm>
-          <a:prstGeom prst="rect">
-            <a:avLst/>
-          </a:prstGeom>
-          <a:solidFill>
-            <a:srgbClr val="162A41"/>
-          </a:solidFill>
-          <a:ln w="12700">
-            <a:solidFill>
-              <a:srgbClr val="A78BFA"/>
-            </a:solidFill>
-            <a:prstDash val="solid"/>
-          </a:ln>
-          <a:effectLst>
-            <a:outerShdw blurRad="101600" dist="38100" dir="8100000" algn="bl" rotWithShape="0">
-              <a:srgbClr val="000000">
-                <a:alpha val="25000"/>
-              </a:srgbClr>
-            </a:outerShdw>
-          </a:effectLst>
-        </p:spPr>
-        <p:txBody>
-          <a:bodyPr/>
-          <a:lstStyle/>
-          <a:p>
-            <a:endParaRPr lang="en-IN"/>
-          </a:p>
-        </p:txBody>
-      </p:sp>
-      <p:sp>
-        <p:nvSpPr>
-          <p:cNvPr id="5" name="Shape 3"/>
-          <p:cNvSpPr/>
-          <p:nvPr/>
-        </p:nvSpPr>
-        <p:spPr>
-          <a:xfrm>
-            <a:off x="228600" y="914400"/>
-            <a:ext cx="2834640" cy="411480"/>
+              <a:t>01</a:t>
+            </a:r>
+            <a:endParaRPr lang="en-US" sz="9600" dirty="0"/>
+          </a:p>
+        </p:txBody>
+      </p:sp>
+      <p:sp>
+        <p:nvSpPr>
+          <p:cNvPr id="5" name="Text 3"/>
+          <p:cNvSpPr/>
+          <p:nvPr/>
+        </p:nvSpPr>
+        <p:spPr>
+          <a:xfrm>
+            <a:off x="274320" y="2560320"/>
+            <a:ext cx="3566160" cy="502920"/>
+          </a:xfrm>
+          <a:prstGeom prst="rect">
+            <a:avLst/>
+          </a:prstGeom>
+          <a:noFill/>
+          <a:ln/>
+        </p:spPr>
+        <p:txBody>
+          <a:bodyPr wrap="square" rtlCol="0" anchor="ctr"/>
+          <a:lstStyle/>
+          <a:p>
+            <a:pPr marL="0" indent="0" algn="ctr">
+              <a:buNone/>
+            </a:pPr>
+            <a:r>
+              <a:rPr lang="en-US" sz="2200" b="1" dirty="0">
+                <a:solidFill>
+                  <a:srgbClr val="FFFFFF"/>
+                </a:solidFill>
+                <a:latin typeface="Calibri" pitchFamily="34" charset="0"/>
+                <a:ea typeface="Calibri" pitchFamily="34" charset="-122"/>
+                <a:cs typeface="Calibri" pitchFamily="34" charset="-120"/>
+              </a:rPr>
+              <a:t>Milestone 1</a:t>
+            </a:r>
+            <a:endParaRPr lang="en-US" sz="2200" dirty="0"/>
+          </a:p>
+        </p:txBody>
+      </p:sp>
+      <p:sp>
+        <p:nvSpPr>
+          <p:cNvPr id="6" name="Text 4"/>
+          <p:cNvSpPr/>
+          <p:nvPr/>
+        </p:nvSpPr>
+        <p:spPr>
+          <a:xfrm>
+            <a:off x="274320" y="3063240"/>
+            <a:ext cx="3566160" cy="731520"/>
+          </a:xfrm>
+          <a:prstGeom prst="rect">
+            <a:avLst/>
+          </a:prstGeom>
+          <a:noFill/>
+          <a:ln/>
+        </p:spPr>
+        <p:txBody>
+          <a:bodyPr wrap="square" rtlCol="0" anchor="ctr"/>
+          <a:lstStyle/>
+          <a:p>
+            <a:pPr marL="0" indent="0" algn="ctr">
+              <a:buNone/>
+            </a:pPr>
+            <a:r>
+              <a:rPr lang="en-US" sz="1400" dirty="0">
+                <a:solidFill>
+                  <a:srgbClr val="7A9ABB"/>
+                </a:solidFill>
+                <a:latin typeface="Calibri" pitchFamily="34" charset="0"/>
+                <a:ea typeface="Calibri" pitchFamily="34" charset="-122"/>
+                <a:cs typeface="Calibri" pitchFamily="34" charset="-120"/>
+              </a:rPr>
+              <a:t>Data Collection &amp;</a:t>
+            </a:r>
+            <a:endParaRPr lang="en-US" sz="1400" dirty="0"/>
+          </a:p>
+          <a:p>
+            <a:pPr marL="0" indent="0" algn="ctr">
+              <a:buNone/>
+            </a:pPr>
+            <a:r>
+              <a:rPr lang="en-US" sz="1400" dirty="0">
+                <a:solidFill>
+                  <a:srgbClr val="7A9ABB"/>
+                </a:solidFill>
+                <a:latin typeface="Calibri" pitchFamily="34" charset="0"/>
+                <a:ea typeface="Calibri" pitchFamily="34" charset="-122"/>
+                <a:cs typeface="Calibri" pitchFamily="34" charset="-120"/>
+              </a:rPr>
+              <a:t>Preprocessing</a:t>
+            </a:r>
+            <a:endParaRPr lang="en-US" sz="1400" dirty="0"/>
+          </a:p>
+        </p:txBody>
+      </p:sp>
+      <p:sp>
+        <p:nvSpPr>
+          <p:cNvPr id="7" name="Shape 5"/>
+          <p:cNvSpPr/>
+          <p:nvPr/>
+        </p:nvSpPr>
+        <p:spPr>
+          <a:xfrm>
+            <a:off x="4572000" y="457200"/>
+            <a:ext cx="502920" cy="502920"/>
           </a:xfrm>
           <a:prstGeom prst="rect">
             <a:avLst/>
@@ -17830,20 +18825,20 @@
           <a:bodyPr/>
           <a:lstStyle/>
           <a:p>
-            <a:endParaRPr lang="en-IN" dirty="0"/>
-          </a:p>
-        </p:txBody>
-      </p:sp>
-      <p:sp>
-        <p:nvSpPr>
-          <p:cNvPr id="6" name="Text 4"/>
-          <p:cNvSpPr/>
-          <p:nvPr/>
-        </p:nvSpPr>
-        <p:spPr>
-          <a:xfrm>
-            <a:off x="320040" y="914400"/>
-            <a:ext cx="2651760" cy="411480"/>
+            <a:endParaRPr lang="en-IN"/>
+          </a:p>
+        </p:txBody>
+      </p:sp>
+      <p:sp>
+        <p:nvSpPr>
+          <p:cNvPr id="8" name="Text 6"/>
+          <p:cNvSpPr/>
+          <p:nvPr/>
+        </p:nvSpPr>
+        <p:spPr>
+          <a:xfrm>
+            <a:off x="4572000" y="457200"/>
+            <a:ext cx="502920" cy="502920"/>
           </a:xfrm>
           <a:prstGeom prst="rect">
             <a:avLst/>
@@ -17855,11 +18850,11 @@
           <a:bodyPr wrap="square" rtlCol="0" anchor="ctr"/>
           <a:lstStyle/>
           <a:p>
-            <a:pPr marL="0" indent="0">
-              <a:buNone/>
-            </a:pPr>
-            <a:r>
-              <a:rPr lang="en-US" sz="1200" b="1" dirty="0">
+            <a:pPr marL="0" indent="0" algn="ctr">
+              <a:buNone/>
+            </a:pPr>
+            <a:r>
+              <a:rPr lang="en-US" sz="1300" b="1" dirty="0">
                 <a:solidFill>
                   <a:srgbClr val="FFFFFF"/>
                 </a:solidFill>
@@ -17867,22 +18862,22 @@
                 <a:ea typeface="Calibri" pitchFamily="34" charset="-122"/>
                 <a:cs typeface="Calibri" pitchFamily="34" charset="-120"/>
               </a:rPr>
-              <a:t>🧹  Data Cleaning Engine</a:t>
-            </a:r>
-            <a:endParaRPr lang="en-US" sz="1200" dirty="0"/>
-          </a:p>
-        </p:txBody>
-      </p:sp>
-      <p:sp>
-        <p:nvSpPr>
-          <p:cNvPr id="7" name="Text 5"/>
-          <p:cNvSpPr/>
-          <p:nvPr/>
-        </p:nvSpPr>
-        <p:spPr>
-          <a:xfrm>
-            <a:off x="338328" y="1417320"/>
-            <a:ext cx="2606040" cy="594360"/>
+              <a:t>01</a:t>
+            </a:r>
+            <a:endParaRPr lang="en-US" sz="1300" dirty="0"/>
+          </a:p>
+        </p:txBody>
+      </p:sp>
+      <p:sp>
+        <p:nvSpPr>
+          <p:cNvPr id="9" name="Text 7"/>
+          <p:cNvSpPr/>
+          <p:nvPr/>
+        </p:nvSpPr>
+        <p:spPr>
+          <a:xfrm>
+            <a:off x="5212080" y="475488"/>
+            <a:ext cx="3657600" cy="256032"/>
           </a:xfrm>
           <a:prstGeom prst="rect">
             <a:avLst/>
@@ -17891,15 +18886,14 @@
           <a:ln/>
         </p:spPr>
         <p:txBody>
-          <a:bodyPr wrap="square" rtlCol="0" anchor="ctr"/>
-          <a:lstStyle/>
-          <a:p>
-            <a:pPr marL="342900" indent="-342900">
-              <a:buSzPct val="100000"/>
-              <a:buChar char="•"/>
-            </a:pPr>
-            <a:r>
-              <a:rPr lang="en-US" sz="1100" dirty="0">
+          <a:bodyPr wrap="square" lIns="0" tIns="0" rIns="0" bIns="0" rtlCol="0" anchor="ctr"/>
+          <a:lstStyle/>
+          <a:p>
+            <a:pPr marL="0" indent="0">
+              <a:buNone/>
+            </a:pPr>
+            <a:r>
+              <a:rPr lang="en-US" sz="1400" b="1" dirty="0">
                 <a:solidFill>
                   <a:srgbClr val="DCE8F5"/>
                 </a:solidFill>
@@ -17907,22 +18901,22 @@
                 <a:ea typeface="Calibri" pitchFamily="34" charset="-122"/>
                 <a:cs typeface="Calibri" pitchFamily="34" charset="-120"/>
               </a:rPr>
-              <a:t>Normalise date columns to proper format</a:t>
-            </a:r>
-            <a:endParaRPr lang="en-US" sz="1100" dirty="0"/>
-          </a:p>
-        </p:txBody>
-      </p:sp>
-      <p:sp>
-        <p:nvSpPr>
-          <p:cNvPr id="8" name="Text 6"/>
-          <p:cNvSpPr/>
-          <p:nvPr/>
-        </p:nvSpPr>
-        <p:spPr>
-          <a:xfrm>
-            <a:off x="338328" y="2075688"/>
-            <a:ext cx="2606040" cy="594360"/>
+              <a:t>Upload CSV</a:t>
+            </a:r>
+            <a:endParaRPr lang="en-US" sz="1400" dirty="0"/>
+          </a:p>
+        </p:txBody>
+      </p:sp>
+      <p:sp>
+        <p:nvSpPr>
+          <p:cNvPr id="10" name="Text 8"/>
+          <p:cNvSpPr/>
+          <p:nvPr/>
+        </p:nvSpPr>
+        <p:spPr>
+          <a:xfrm>
+            <a:off x="5212080" y="713232"/>
+            <a:ext cx="3657600" cy="256032"/>
           </a:xfrm>
           <a:prstGeom prst="rect">
             <a:avLst/>
@@ -17931,23 +18925,22 @@
           <a:ln/>
         </p:spPr>
         <p:txBody>
-          <a:bodyPr wrap="square" rtlCol="0" anchor="ctr"/>
-          <a:lstStyle/>
-          <a:p>
-            <a:pPr marL="342900" indent="-342900">
-              <a:buSzPct val="100000"/>
-              <a:buChar char="•"/>
+          <a:bodyPr wrap="square" lIns="0" tIns="0" rIns="0" bIns="0" rtlCol="0" anchor="ctr"/>
+          <a:lstStyle/>
+          <a:p>
+            <a:pPr marL="0" indent="0">
+              <a:buNone/>
             </a:pPr>
             <a:r>
               <a:rPr lang="en-US" sz="1100" dirty="0">
                 <a:solidFill>
-                  <a:srgbClr val="DCE8F5"/>
+                  <a:srgbClr val="7A9ABB"/>
                 </a:solidFill>
                 <a:latin typeface="Calibri" pitchFamily="34" charset="0"/>
                 <a:ea typeface="Calibri" pitchFamily="34" charset="-122"/>
                 <a:cs typeface="Calibri" pitchFamily="34" charset="-120"/>
               </a:rPr>
-              <a:t>Interpolate missing numeric values (linear method)</a:t>
+              <a:t>User uploads a fitness tracking CSV file</a:t>
             </a:r>
             <a:endParaRPr lang="en-US" sz="1100" dirty="0"/>
           </a:p>
@@ -17955,114 +18948,27 @@
       </p:sp>
       <p:sp>
         <p:nvSpPr>
-          <p:cNvPr id="9" name="Text 7"/>
-          <p:cNvSpPr/>
-          <p:nvPr/>
-        </p:nvSpPr>
-        <p:spPr>
-          <a:xfrm>
-            <a:off x="338328" y="2734056"/>
-            <a:ext cx="2606040" cy="594360"/>
-          </a:xfrm>
-          <a:prstGeom prst="rect">
-            <a:avLst/>
-          </a:prstGeom>
-          <a:noFill/>
-          <a:ln/>
-        </p:spPr>
-        <p:txBody>
-          <a:bodyPr wrap="square" rtlCol="0" anchor="ctr"/>
-          <a:lstStyle/>
-          <a:p>
-            <a:pPr marL="342900" indent="-342900">
-              <a:buSzPct val="100000"/>
-              <a:buChar char="•"/>
-            </a:pPr>
-            <a:r>
-              <a:rPr lang="en-US" sz="1100" dirty="0">
-                <a:solidFill>
-                  <a:srgbClr val="DCE8F5"/>
-                </a:solidFill>
-                <a:latin typeface="Calibri" pitchFamily="34" charset="0"/>
-                <a:ea typeface="Calibri" pitchFamily="34" charset="-122"/>
-                <a:cs typeface="Calibri" pitchFamily="34" charset="-120"/>
-              </a:rPr>
-              <a:t>Fill empty text columns with 'Unknown'</a:t>
-            </a:r>
-            <a:endParaRPr lang="en-US" sz="1100" dirty="0"/>
-          </a:p>
-        </p:txBody>
-      </p:sp>
-      <p:sp>
-        <p:nvSpPr>
-          <p:cNvPr id="10" name="Text 8"/>
-          <p:cNvSpPr/>
-          <p:nvPr/>
-        </p:nvSpPr>
-        <p:spPr>
-          <a:xfrm>
-            <a:off x="338328" y="3392424"/>
-            <a:ext cx="2606040" cy="594360"/>
-          </a:xfrm>
-          <a:prstGeom prst="rect">
-            <a:avLst/>
-          </a:prstGeom>
-          <a:noFill/>
-          <a:ln/>
-        </p:spPr>
-        <p:txBody>
-          <a:bodyPr wrap="square" rtlCol="0" anchor="ctr"/>
-          <a:lstStyle/>
-          <a:p>
-            <a:pPr marL="342900" indent="-342900">
-              <a:buSzPct val="100000"/>
-              <a:buChar char="•"/>
-            </a:pPr>
-            <a:r>
-              <a:rPr lang="en-US" sz="1100" dirty="0">
-                <a:solidFill>
-                  <a:srgbClr val="DCE8F5"/>
-                </a:solidFill>
-                <a:latin typeface="Calibri" pitchFamily="34" charset="0"/>
-                <a:ea typeface="Calibri" pitchFamily="34" charset="-122"/>
-                <a:cs typeface="Calibri" pitchFamily="34" charset="-120"/>
-              </a:rPr>
-              <a:t>Download cleaned CSV after processing</a:t>
-            </a:r>
-            <a:endParaRPr lang="en-US" sz="1100" dirty="0"/>
-          </a:p>
-        </p:txBody>
-      </p:sp>
-      <p:sp>
-        <p:nvSpPr>
           <p:cNvPr id="11" name="Shape 9"/>
           <p:cNvSpPr/>
           <p:nvPr/>
         </p:nvSpPr>
         <p:spPr>
           <a:xfrm>
-            <a:off x="3200400" y="914400"/>
-            <a:ext cx="2834640" cy="3840480"/>
+            <a:off x="4572000" y="1554480"/>
+            <a:ext cx="502920" cy="502920"/>
           </a:xfrm>
           <a:prstGeom prst="rect">
             <a:avLst/>
           </a:prstGeom>
           <a:solidFill>
-            <a:srgbClr val="162A41"/>
+            <a:srgbClr val="A78BFA"/>
           </a:solidFill>
           <a:ln w="12700">
             <a:solidFill>
-              <a:srgbClr val="38BDF8"/>
+              <a:srgbClr val="A78BFA"/>
             </a:solidFill>
             <a:prstDash val="solid"/>
           </a:ln>
-          <a:effectLst>
-            <a:outerShdw blurRad="101600" dist="38100" dir="8100000" algn="bl" rotWithShape="0">
-              <a:srgbClr val="000000">
-                <a:alpha val="25000"/>
-              </a:srgbClr>
-            </a:outerShdw>
-          </a:effectLst>
         </p:spPr>
         <p:txBody>
           <a:bodyPr/>
@@ -18074,24 +18980,141 @@
       </p:sp>
       <p:sp>
         <p:nvSpPr>
-          <p:cNvPr id="12" name="Shape 10"/>
-          <p:cNvSpPr/>
-          <p:nvPr/>
-        </p:nvSpPr>
-        <p:spPr>
-          <a:xfrm>
-            <a:off x="3200400" y="914400"/>
-            <a:ext cx="2834640" cy="411480"/>
+          <p:cNvPr id="12" name="Text 10"/>
+          <p:cNvSpPr/>
+          <p:nvPr/>
+        </p:nvSpPr>
+        <p:spPr>
+          <a:xfrm>
+            <a:off x="4572000" y="1554480"/>
+            <a:ext cx="502920" cy="502920"/>
+          </a:xfrm>
+          <a:prstGeom prst="rect">
+            <a:avLst/>
+          </a:prstGeom>
+          <a:noFill/>
+          <a:ln/>
+        </p:spPr>
+        <p:txBody>
+          <a:bodyPr wrap="square" rtlCol="0" anchor="ctr"/>
+          <a:lstStyle/>
+          <a:p>
+            <a:pPr marL="0" indent="0" algn="ctr">
+              <a:buNone/>
+            </a:pPr>
+            <a:r>
+              <a:rPr lang="en-US" sz="1300" b="1" dirty="0">
+                <a:solidFill>
+                  <a:srgbClr val="FFFFFF"/>
+                </a:solidFill>
+                <a:latin typeface="Calibri" pitchFamily="34" charset="0"/>
+                <a:ea typeface="Calibri" pitchFamily="34" charset="-122"/>
+                <a:cs typeface="Calibri" pitchFamily="34" charset="-120"/>
+              </a:rPr>
+              <a:t>02</a:t>
+            </a:r>
+            <a:endParaRPr lang="en-US" sz="1300" dirty="0"/>
+          </a:p>
+        </p:txBody>
+      </p:sp>
+      <p:sp>
+        <p:nvSpPr>
+          <p:cNvPr id="13" name="Text 11"/>
+          <p:cNvSpPr/>
+          <p:nvPr/>
+        </p:nvSpPr>
+        <p:spPr>
+          <a:xfrm>
+            <a:off x="5212080" y="1572768"/>
+            <a:ext cx="3657600" cy="256032"/>
+          </a:xfrm>
+          <a:prstGeom prst="rect">
+            <a:avLst/>
+          </a:prstGeom>
+          <a:noFill/>
+          <a:ln/>
+        </p:spPr>
+        <p:txBody>
+          <a:bodyPr wrap="square" lIns="0" tIns="0" rIns="0" bIns="0" rtlCol="0" anchor="ctr"/>
+          <a:lstStyle/>
+          <a:p>
+            <a:pPr marL="0" indent="0">
+              <a:buNone/>
+            </a:pPr>
+            <a:r>
+              <a:rPr lang="en-US" sz="1400" b="1" dirty="0">
+                <a:solidFill>
+                  <a:srgbClr val="DCE8F5"/>
+                </a:solidFill>
+                <a:latin typeface="Calibri" pitchFamily="34" charset="0"/>
+                <a:ea typeface="Calibri" pitchFamily="34" charset="-122"/>
+                <a:cs typeface="Calibri" pitchFamily="34" charset="-120"/>
+              </a:rPr>
+              <a:t>Inspect</a:t>
+            </a:r>
+            <a:endParaRPr lang="en-US" sz="1400" dirty="0"/>
+          </a:p>
+        </p:txBody>
+      </p:sp>
+      <p:sp>
+        <p:nvSpPr>
+          <p:cNvPr id="14" name="Text 12"/>
+          <p:cNvSpPr/>
+          <p:nvPr/>
+        </p:nvSpPr>
+        <p:spPr>
+          <a:xfrm>
+            <a:off x="5212080" y="1810512"/>
+            <a:ext cx="3657600" cy="256032"/>
+          </a:xfrm>
+          <a:prstGeom prst="rect">
+            <a:avLst/>
+          </a:prstGeom>
+          <a:noFill/>
+          <a:ln/>
+        </p:spPr>
+        <p:txBody>
+          <a:bodyPr wrap="square" lIns="0" tIns="0" rIns="0" bIns="0" rtlCol="0" anchor="ctr"/>
+          <a:lstStyle/>
+          <a:p>
+            <a:pPr marL="0" indent="0">
+              <a:buNone/>
+            </a:pPr>
+            <a:r>
+              <a:rPr lang="en-US" sz="1100" dirty="0">
+                <a:solidFill>
+                  <a:srgbClr val="7A9ABB"/>
+                </a:solidFill>
+                <a:latin typeface="Calibri" pitchFamily="34" charset="0"/>
+                <a:ea typeface="Calibri" pitchFamily="34" charset="-122"/>
+                <a:cs typeface="Calibri" pitchFamily="34" charset="-120"/>
+              </a:rPr>
+              <a:t>Preview raw data, check missing values &amp; types</a:t>
+            </a:r>
+            <a:endParaRPr lang="en-US" sz="1100" dirty="0"/>
+          </a:p>
+        </p:txBody>
+      </p:sp>
+      <p:sp>
+        <p:nvSpPr>
+          <p:cNvPr id="15" name="Shape 13"/>
+          <p:cNvSpPr/>
+          <p:nvPr/>
+        </p:nvSpPr>
+        <p:spPr>
+          <a:xfrm>
+            <a:off x="4572000" y="2651760"/>
+            <a:ext cx="502920" cy="502920"/>
           </a:xfrm>
           <a:prstGeom prst="rect">
             <a:avLst/>
           </a:prstGeom>
           <a:solidFill>
-            <a:srgbClr val="38BDF8"/>
+            <a:srgbClr val="A78BFA"/>
           </a:solidFill>
           <a:ln w="12700">
             <a:solidFill>
-              <a:srgbClr val="38BDF8"/>
+              <a:srgbClr val="A78BFA"/>
             </a:solidFill>
             <a:prstDash val="solid"/>
           </a:ln>
@@ -18106,14 +19129,14 @@
       </p:sp>
       <p:sp>
         <p:nvSpPr>
-          <p:cNvPr id="13" name="Text 11"/>
-          <p:cNvSpPr/>
-          <p:nvPr/>
-        </p:nvSpPr>
-        <p:spPr>
-          <a:xfrm>
-            <a:off x="3291840" y="914400"/>
-            <a:ext cx="2651760" cy="411480"/>
+          <p:cNvPr id="16" name="Text 14"/>
+          <p:cNvSpPr/>
+          <p:nvPr/>
+        </p:nvSpPr>
+        <p:spPr>
+          <a:xfrm>
+            <a:off x="4572000" y="2651760"/>
+            <a:ext cx="502920" cy="502920"/>
           </a:xfrm>
           <a:prstGeom prst="rect">
             <a:avLst/>
@@ -18125,11 +19148,11 @@
           <a:bodyPr wrap="square" rtlCol="0" anchor="ctr"/>
           <a:lstStyle/>
           <a:p>
-            <a:pPr marL="0" indent="0">
-              <a:buNone/>
-            </a:pPr>
-            <a:r>
-              <a:rPr lang="en-US" sz="1200" b="1" dirty="0">
+            <a:pPr marL="0" indent="0" algn="ctr">
+              <a:buNone/>
+            </a:pPr>
+            <a:r>
+              <a:rPr lang="en-US" sz="1300" b="1" dirty="0">
                 <a:solidFill>
                   <a:srgbClr val="FFFFFF"/>
                 </a:solidFill>
@@ -18137,22 +19160,22 @@
                 <a:ea typeface="Calibri" pitchFamily="34" charset="-122"/>
                 <a:cs typeface="Calibri" pitchFamily="34" charset="-120"/>
               </a:rPr>
-              <a:t>🔍  Data Inspection</a:t>
-            </a:r>
-            <a:endParaRPr lang="en-US" sz="1200" dirty="0"/>
-          </a:p>
-        </p:txBody>
-      </p:sp>
-      <p:sp>
-        <p:nvSpPr>
-          <p:cNvPr id="14" name="Text 12"/>
-          <p:cNvSpPr/>
-          <p:nvPr/>
-        </p:nvSpPr>
-        <p:spPr>
-          <a:xfrm>
-            <a:off x="3310128" y="1417320"/>
-            <a:ext cx="2606040" cy="594360"/>
+              <a:t>03</a:t>
+            </a:r>
+            <a:endParaRPr lang="en-US" sz="1300" dirty="0"/>
+          </a:p>
+        </p:txBody>
+      </p:sp>
+      <p:sp>
+        <p:nvSpPr>
+          <p:cNvPr id="17" name="Text 15"/>
+          <p:cNvSpPr/>
+          <p:nvPr/>
+        </p:nvSpPr>
+        <p:spPr>
+          <a:xfrm>
+            <a:off x="5212080" y="2670048"/>
+            <a:ext cx="3657600" cy="256032"/>
           </a:xfrm>
           <a:prstGeom prst="rect">
             <a:avLst/>
@@ -18161,15 +19184,14 @@
           <a:ln/>
         </p:spPr>
         <p:txBody>
-          <a:bodyPr wrap="square" rtlCol="0" anchor="ctr"/>
-          <a:lstStyle/>
-          <a:p>
-            <a:pPr marL="342900" indent="-342900">
-              <a:buSzPct val="100000"/>
-              <a:buChar char="•"/>
-            </a:pPr>
-            <a:r>
-              <a:rPr lang="en-US" sz="1100" dirty="0">
+          <a:bodyPr wrap="square" lIns="0" tIns="0" rIns="0" bIns="0" rtlCol="0" anchor="ctr"/>
+          <a:lstStyle/>
+          <a:p>
+            <a:pPr marL="0" indent="0">
+              <a:buNone/>
+            </a:pPr>
+            <a:r>
+              <a:rPr lang="en-US" sz="1400" b="1" dirty="0">
                 <a:solidFill>
                   <a:srgbClr val="DCE8F5"/>
                 </a:solidFill>
@@ -18177,22 +19199,22 @@
                 <a:ea typeface="Calibri" pitchFamily="34" charset="-122"/>
                 <a:cs typeface="Calibri" pitchFamily="34" charset="-120"/>
               </a:rPr>
-              <a:t>Raw dataset preview — first 10 rows</a:t>
-            </a:r>
-            <a:endParaRPr lang="en-US" sz="1100" dirty="0"/>
-          </a:p>
-        </p:txBody>
-      </p:sp>
-      <p:sp>
-        <p:nvSpPr>
-          <p:cNvPr id="15" name="Text 13"/>
-          <p:cNvSpPr/>
-          <p:nvPr/>
-        </p:nvSpPr>
-        <p:spPr>
-          <a:xfrm>
-            <a:off x="3310128" y="2075688"/>
-            <a:ext cx="2606040" cy="594360"/>
+              <a:t>Clean</a:t>
+            </a:r>
+            <a:endParaRPr lang="en-US" sz="1400" dirty="0"/>
+          </a:p>
+        </p:txBody>
+      </p:sp>
+      <p:sp>
+        <p:nvSpPr>
+          <p:cNvPr id="18" name="Text 16"/>
+          <p:cNvSpPr/>
+          <p:nvPr/>
+        </p:nvSpPr>
+        <p:spPr>
+          <a:xfrm>
+            <a:off x="5212080" y="2907792"/>
+            <a:ext cx="3657600" cy="256032"/>
           </a:xfrm>
           <a:prstGeom prst="rect">
             <a:avLst/>
@@ -18201,23 +19223,22 @@
           <a:ln/>
         </p:spPr>
         <p:txBody>
-          <a:bodyPr wrap="square" rtlCol="0" anchor="ctr"/>
-          <a:lstStyle/>
-          <a:p>
-            <a:pPr marL="342900" indent="-342900">
-              <a:buSzPct val="100000"/>
-              <a:buChar char="•"/>
+          <a:bodyPr wrap="square" lIns="0" tIns="0" rIns="0" bIns="0" rtlCol="0" anchor="ctr"/>
+          <a:lstStyle/>
+          <a:p>
+            <a:pPr marL="0" indent="0">
+              <a:buNone/>
             </a:pPr>
             <a:r>
               <a:rPr lang="en-US" sz="1100" dirty="0">
                 <a:solidFill>
-                  <a:srgbClr val="DCE8F5"/>
+                  <a:srgbClr val="7A9ABB"/>
                 </a:solidFill>
                 <a:latin typeface="Calibri" pitchFamily="34" charset="0"/>
                 <a:ea typeface="Calibri" pitchFamily="34" charset="-122"/>
                 <a:cs typeface="Calibri" pitchFamily="34" charset="-120"/>
               </a:rPr>
-              <a:t>Missing values bar chart per column</a:t>
+              <a:t>Fix dates, interpolate numbers, fill categories</a:t>
             </a:r>
             <a:endParaRPr lang="en-US" sz="1100" dirty="0"/>
           </a:p>
@@ -18225,114 +19246,27 @@
       </p:sp>
       <p:sp>
         <p:nvSpPr>
-          <p:cNvPr id="16" name="Text 14"/>
-          <p:cNvSpPr/>
-          <p:nvPr/>
-        </p:nvSpPr>
-        <p:spPr>
-          <a:xfrm>
-            <a:off x="3310128" y="2734056"/>
-            <a:ext cx="2606040" cy="594360"/>
-          </a:xfrm>
-          <a:prstGeom prst="rect">
-            <a:avLst/>
-          </a:prstGeom>
-          <a:noFill/>
-          <a:ln/>
-        </p:spPr>
-        <p:txBody>
-          <a:bodyPr wrap="square" rtlCol="0" anchor="ctr"/>
-          <a:lstStyle/>
-          <a:p>
-            <a:pPr marL="342900" indent="-342900">
-              <a:buSzPct val="100000"/>
-              <a:buChar char="•"/>
-            </a:pPr>
-            <a:r>
-              <a:rPr lang="en-US" sz="1100" dirty="0">
-                <a:solidFill>
-                  <a:srgbClr val="DCE8F5"/>
-                </a:solidFill>
-                <a:latin typeface="Calibri" pitchFamily="34" charset="0"/>
-                <a:ea typeface="Calibri" pitchFamily="34" charset="-122"/>
-                <a:cs typeface="Calibri" pitchFamily="34" charset="-120"/>
-              </a:rPr>
-              <a:t>Data types table for all columns</a:t>
-            </a:r>
-            <a:endParaRPr lang="en-US" sz="1100" dirty="0"/>
-          </a:p>
-        </p:txBody>
-      </p:sp>
-      <p:sp>
-        <p:nvSpPr>
-          <p:cNvPr id="17" name="Text 15"/>
-          <p:cNvSpPr/>
-          <p:nvPr/>
-        </p:nvSpPr>
-        <p:spPr>
-          <a:xfrm>
-            <a:off x="3310128" y="3392424"/>
-            <a:ext cx="2606040" cy="594360"/>
-          </a:xfrm>
-          <a:prstGeom prst="rect">
-            <a:avLst/>
-          </a:prstGeom>
-          <a:noFill/>
-          <a:ln/>
-        </p:spPr>
-        <p:txBody>
-          <a:bodyPr wrap="square" rtlCol="0" anchor="ctr"/>
-          <a:lstStyle/>
-          <a:p>
-            <a:pPr marL="342900" indent="-342900">
-              <a:buSzPct val="100000"/>
-              <a:buChar char="•"/>
-            </a:pPr>
-            <a:r>
-              <a:rPr lang="en-US" sz="1100" dirty="0">
-                <a:solidFill>
-                  <a:srgbClr val="DCE8F5"/>
-                </a:solidFill>
-                <a:latin typeface="Calibri" pitchFamily="34" charset="0"/>
-                <a:ea typeface="Calibri" pitchFamily="34" charset="-122"/>
-                <a:cs typeface="Calibri" pitchFamily="34" charset="-120"/>
-              </a:rPr>
-              <a:t>4 summary metrics — rows, columns, missing, completeness</a:t>
-            </a:r>
-            <a:endParaRPr lang="en-US" sz="1100" dirty="0"/>
-          </a:p>
-        </p:txBody>
-      </p:sp>
-      <p:sp>
-        <p:nvSpPr>
-          <p:cNvPr id="18" name="Shape 16"/>
-          <p:cNvSpPr/>
-          <p:nvPr/>
-        </p:nvSpPr>
-        <p:spPr>
-          <a:xfrm>
-            <a:off x="6172200" y="914400"/>
-            <a:ext cx="2834640" cy="3840480"/>
+          <p:cNvPr id="19" name="Shape 17"/>
+          <p:cNvSpPr/>
+          <p:nvPr/>
+        </p:nvSpPr>
+        <p:spPr>
+          <a:xfrm>
+            <a:off x="4572000" y="3749040"/>
+            <a:ext cx="502920" cy="502920"/>
           </a:xfrm>
           <a:prstGeom prst="rect">
             <a:avLst/>
           </a:prstGeom>
           <a:solidFill>
-            <a:srgbClr val="162A41"/>
+            <a:srgbClr val="A78BFA"/>
           </a:solidFill>
           <a:ln w="12700">
             <a:solidFill>
-              <a:srgbClr val="10B981"/>
+              <a:srgbClr val="A78BFA"/>
             </a:solidFill>
             <a:prstDash val="solid"/>
           </a:ln>
-          <a:effectLst>
-            <a:outerShdw blurRad="101600" dist="38100" dir="8100000" algn="bl" rotWithShape="0">
-              <a:srgbClr val="000000">
-                <a:alpha val="25000"/>
-              </a:srgbClr>
-            </a:outerShdw>
-          </a:effectLst>
         </p:spPr>
         <p:txBody>
           <a:bodyPr/>
@@ -18344,46 +19278,14 @@
       </p:sp>
       <p:sp>
         <p:nvSpPr>
-          <p:cNvPr id="19" name="Shape 17"/>
-          <p:cNvSpPr/>
-          <p:nvPr/>
-        </p:nvSpPr>
-        <p:spPr>
-          <a:xfrm>
-            <a:off x="6172200" y="914400"/>
-            <a:ext cx="2834640" cy="411480"/>
-          </a:xfrm>
-          <a:prstGeom prst="rect">
-            <a:avLst/>
-          </a:prstGeom>
-          <a:solidFill>
-            <a:srgbClr val="10B981"/>
-          </a:solidFill>
-          <a:ln w="12700">
-            <a:solidFill>
-              <a:srgbClr val="10B981"/>
-            </a:solidFill>
-            <a:prstDash val="solid"/>
-          </a:ln>
-        </p:spPr>
-        <p:txBody>
-          <a:bodyPr/>
-          <a:lstStyle/>
-          <a:p>
-            <a:endParaRPr lang="en-IN"/>
-          </a:p>
-        </p:txBody>
-      </p:sp>
-      <p:sp>
-        <p:nvSpPr>
           <p:cNvPr id="20" name="Text 18"/>
           <p:cNvSpPr/>
           <p:nvPr/>
         </p:nvSpPr>
         <p:spPr>
           <a:xfrm>
-            <a:off x="6263640" y="914400"/>
-            <a:ext cx="2651760" cy="411480"/>
+            <a:off x="4572000" y="3749040"/>
+            <a:ext cx="502920" cy="502920"/>
           </a:xfrm>
           <a:prstGeom prst="rect">
             <a:avLst/>
@@ -18395,11 +19297,11 @@
           <a:bodyPr wrap="square" rtlCol="0" anchor="ctr"/>
           <a:lstStyle/>
           <a:p>
-            <a:pPr marL="0" indent="0">
-              <a:buNone/>
-            </a:pPr>
-            <a:r>
-              <a:rPr lang="en-US" sz="1200" b="1" dirty="0">
+            <a:pPr marL="0" indent="0" algn="ctr">
+              <a:buNone/>
+            </a:pPr>
+            <a:r>
+              <a:rPr lang="en-US" sz="1300" b="1" dirty="0">
                 <a:solidFill>
                   <a:srgbClr val="FFFFFF"/>
                 </a:solidFill>
@@ -18407,9 +19309,9 @@
                 <a:ea typeface="Calibri" pitchFamily="34" charset="-122"/>
                 <a:cs typeface="Calibri" pitchFamily="34" charset="-120"/>
               </a:rPr>
-              <a:t>📈  Outlier Detection</a:t>
-            </a:r>
-            <a:endParaRPr lang="en-US" sz="1200" dirty="0"/>
+              <a:t>04</a:t>
+            </a:r>
+            <a:endParaRPr lang="en-US" sz="1300" dirty="0"/>
           </a:p>
         </p:txBody>
       </p:sp>
@@ -18421,8 +19323,8 @@
         </p:nvSpPr>
         <p:spPr>
           <a:xfrm>
-            <a:off x="6281928" y="1417320"/>
-            <a:ext cx="2606040" cy="594360"/>
+            <a:off x="5212080" y="3767328"/>
+            <a:ext cx="3657600" cy="256032"/>
           </a:xfrm>
           <a:prstGeom prst="rect">
             <a:avLst/>
@@ -18431,15 +19333,14 @@
           <a:ln/>
         </p:spPr>
         <p:txBody>
-          <a:bodyPr wrap="square" rtlCol="0" anchor="ctr"/>
-          <a:lstStyle/>
-          <a:p>
-            <a:pPr marL="342900" indent="-342900">
-              <a:buSzPct val="100000"/>
-              <a:buChar char="•"/>
-            </a:pPr>
-            <a:r>
-              <a:rPr lang="en-US" sz="1100" dirty="0">
+          <a:bodyPr wrap="square" lIns="0" tIns="0" rIns="0" bIns="0" rtlCol="0" anchor="ctr"/>
+          <a:lstStyle/>
+          <a:p>
+            <a:pPr marL="0" indent="0">
+              <a:buNone/>
+            </a:pPr>
+            <a:r>
+              <a:rPr lang="en-US" sz="1400" b="1" dirty="0">
                 <a:solidFill>
                   <a:srgbClr val="DCE8F5"/>
                 </a:solidFill>
@@ -18447,9 +19348,9 @@
                 <a:ea typeface="Calibri" pitchFamily="34" charset="-122"/>
                 <a:cs typeface="Calibri" pitchFamily="34" charset="-120"/>
               </a:rPr>
-              <a:t>IQR method — Q1, Q3, and 1.5×IQR rule</a:t>
-            </a:r>
-            <a:endParaRPr lang="en-US" sz="1100" dirty="0"/>
+              <a:t>Visualise</a:t>
+            </a:r>
+            <a:endParaRPr lang="en-US" sz="1400" dirty="0"/>
           </a:p>
         </p:txBody>
       </p:sp>
@@ -18461,8 +19362,8 @@
         </p:nvSpPr>
         <p:spPr>
           <a:xfrm>
-            <a:off x="6281928" y="2075688"/>
-            <a:ext cx="2606040" cy="594360"/>
+            <a:off x="5212080" y="4005072"/>
+            <a:ext cx="3657600" cy="256032"/>
           </a:xfrm>
           <a:prstGeom prst="rect">
             <a:avLst/>
@@ -18471,137 +19372,24 @@
           <a:ln/>
         </p:spPr>
         <p:txBody>
-          <a:bodyPr wrap="square" rtlCol="0" anchor="ctr"/>
-          <a:lstStyle/>
-          <a:p>
-            <a:pPr marL="342900" indent="-342900">
-              <a:buSzPct val="100000"/>
-              <a:buChar char="•"/>
+          <a:bodyPr wrap="square" lIns="0" tIns="0" rIns="0" bIns="0" rtlCol="0" anchor="ctr"/>
+          <a:lstStyle/>
+          <a:p>
+            <a:pPr marL="0" indent="0">
+              <a:buNone/>
             </a:pPr>
             <a:r>
               <a:rPr lang="en-US" sz="1100" dirty="0">
                 <a:solidFill>
-                  <a:srgbClr val="DCE8F5"/>
+                  <a:srgbClr val="7A9ABB"/>
                 </a:solidFill>
                 <a:latin typeface="Calibri" pitchFamily="34" charset="0"/>
                 <a:ea typeface="Calibri" pitchFamily="34" charset="-122"/>
                 <a:cs typeface="Calibri" pitchFamily="34" charset="-120"/>
               </a:rPr>
-              <a:t>Box plot — shows normal range and outlier dots</a:t>
+              <a:t>Detect outliers with Box Plot &amp; Histogram</a:t>
             </a:r>
             <a:endParaRPr lang="en-US" sz="1100" dirty="0"/>
-          </a:p>
-        </p:txBody>
-      </p:sp>
-      <p:sp>
-        <p:nvSpPr>
-          <p:cNvPr id="23" name="Text 21"/>
-          <p:cNvSpPr/>
-          <p:nvPr/>
-        </p:nvSpPr>
-        <p:spPr>
-          <a:xfrm>
-            <a:off x="6281928" y="2734056"/>
-            <a:ext cx="2606040" cy="594360"/>
-          </a:xfrm>
-          <a:prstGeom prst="rect">
-            <a:avLst/>
-          </a:prstGeom>
-          <a:noFill/>
-          <a:ln/>
-        </p:spPr>
-        <p:txBody>
-          <a:bodyPr wrap="square" rtlCol="0" anchor="ctr"/>
-          <a:lstStyle/>
-          <a:p>
-            <a:pPr marL="342900" indent="-342900">
-              <a:buSzPct val="100000"/>
-              <a:buChar char="•"/>
-            </a:pPr>
-            <a:r>
-              <a:rPr lang="en-US" sz="1100" dirty="0">
-                <a:solidFill>
-                  <a:srgbClr val="DCE8F5"/>
-                </a:solidFill>
-                <a:latin typeface="Calibri" pitchFamily="34" charset="0"/>
-                <a:ea typeface="Calibri" pitchFamily="34" charset="-122"/>
-                <a:cs typeface="Calibri" pitchFamily="34" charset="-120"/>
-              </a:rPr>
-              <a:t>Histogram — frequency distribution with outlier zones</a:t>
-            </a:r>
-            <a:endParaRPr lang="en-US" sz="1100" dirty="0"/>
-          </a:p>
-        </p:txBody>
-      </p:sp>
-      <p:sp>
-        <p:nvSpPr>
-          <p:cNvPr id="24" name="Text 22"/>
-          <p:cNvSpPr/>
-          <p:nvPr/>
-        </p:nvSpPr>
-        <p:spPr>
-          <a:xfrm>
-            <a:off x="6281928" y="3392424"/>
-            <a:ext cx="2606040" cy="594360"/>
-          </a:xfrm>
-          <a:prstGeom prst="rect">
-            <a:avLst/>
-          </a:prstGeom>
-          <a:noFill/>
-          <a:ln/>
-        </p:spPr>
-        <p:txBody>
-          <a:bodyPr wrap="square" rtlCol="0" anchor="ctr"/>
-          <a:lstStyle/>
-          <a:p>
-            <a:pPr marL="342900" indent="-342900">
-              <a:buSzPct val="100000"/>
-              <a:buChar char="•"/>
-            </a:pPr>
-            <a:r>
-              <a:rPr lang="en-US" sz="1100" dirty="0">
-                <a:solidFill>
-                  <a:srgbClr val="DCE8F5"/>
-                </a:solidFill>
-                <a:latin typeface="Calibri" pitchFamily="34" charset="0"/>
-                <a:ea typeface="Calibri" pitchFamily="34" charset="-122"/>
-                <a:cs typeface="Calibri" pitchFamily="34" charset="-120"/>
-              </a:rPr>
-              <a:t>Mean and Median reference lines on histogram</a:t>
-            </a:r>
-            <a:endParaRPr lang="en-US" sz="1100" dirty="0"/>
-          </a:p>
-        </p:txBody>
-      </p:sp>
-      <p:sp>
-        <p:nvSpPr>
-          <p:cNvPr id="25" name="Shape 23"/>
-          <p:cNvSpPr/>
-          <p:nvPr/>
-        </p:nvSpPr>
-        <p:spPr>
-          <a:xfrm>
-            <a:off x="0" y="5070348"/>
-            <a:ext cx="9144000" cy="73152"/>
-          </a:xfrm>
-          <a:prstGeom prst="rect">
-            <a:avLst/>
-          </a:prstGeom>
-          <a:solidFill>
-            <a:srgbClr val="6366F1"/>
-          </a:solidFill>
-          <a:ln w="12700">
-            <a:solidFill>
-              <a:srgbClr val="6366F1"/>
-            </a:solidFill>
-            <a:prstDash val="solid"/>
-          </a:ln>
-        </p:spPr>
-        <p:txBody>
-          <a:bodyPr/>
-          <a:lstStyle/>
-          <a:p>
-            <a:endParaRPr lang="en-IN"/>
           </a:p>
         </p:txBody>
       </p:sp>
@@ -18629,7 +19417,7 @@
         <p:cNvPr id="1" name="">
           <a:extLst>
             <a:ext uri="{FF2B5EF4-FFF2-40B4-BE49-F238E27FC236}">
-              <a16:creationId xmlns:a16="http://schemas.microsoft.com/office/drawing/2014/main" id="{4DF6C618-3A7C-A3EC-7D50-B7264155C082}"/>
+              <a16:creationId xmlns:a16="http://schemas.microsoft.com/office/drawing/2014/main" id="{C41E58C6-7B4F-C333-2B1E-BD128263F5F3}"/>
             </a:ext>
           </a:extLst>
         </p:cNvPr>
@@ -18649,7 +19437,7 @@
           <p:cNvPr id="2" name="Shape 0">
             <a:extLst>
               <a:ext uri="{FF2B5EF4-FFF2-40B4-BE49-F238E27FC236}">
-                <a16:creationId xmlns:a16="http://schemas.microsoft.com/office/drawing/2014/main" id="{86E785BE-203D-6220-879F-C3C9D9044EC3}"/>
+                <a16:creationId xmlns:a16="http://schemas.microsoft.com/office/drawing/2014/main" id="{22CF5222-6800-E898-9558-38B023143111}"/>
               </a:ext>
             </a:extLst>
           </p:cNvPr>
@@ -18687,7 +19475,7 @@
           <p:cNvPr id="3" name="Text 1">
             <a:extLst>
               <a:ext uri="{FF2B5EF4-FFF2-40B4-BE49-F238E27FC236}">
-                <a16:creationId xmlns:a16="http://schemas.microsoft.com/office/drawing/2014/main" id="{40487EF7-E813-5FA0-EC59-DCDEF0576945}"/>
+                <a16:creationId xmlns:a16="http://schemas.microsoft.com/office/drawing/2014/main" id="{919BFBCC-B99F-91C1-9B7B-C3A15F7DD764}"/>
               </a:ext>
             </a:extLst>
           </p:cNvPr>
@@ -18696,7 +19484,7 @@
         </p:nvSpPr>
         <p:spPr>
           <a:xfrm>
-            <a:off x="351510" y="731520"/>
+            <a:off x="365760" y="182880"/>
             <a:ext cx="8412480" cy="548640"/>
           </a:xfrm>
           <a:prstGeom prst="rect">
@@ -18721,22 +19509,121 @@
                 <a:ea typeface="Calibri" pitchFamily="34" charset="-122"/>
                 <a:cs typeface="Calibri" pitchFamily="34" charset="-120"/>
               </a:rPr>
-              <a:t>Output Screenshots: </a:t>
-            </a:r>
-          </a:p>
-          <a:p>
-            <a:pPr marL="0" indent="0">
-              <a:buNone/>
-            </a:pPr>
-            <a:endParaRPr lang="en-US" sz="1200" b="1" dirty="0">
-              <a:solidFill>
-                <a:srgbClr val="A78BFA"/>
-              </a:solidFill>
-              <a:latin typeface="Calibri" pitchFamily="34" charset="0"/>
-              <a:ea typeface="Calibri" pitchFamily="34" charset="-122"/>
-              <a:cs typeface="Calibri" pitchFamily="34" charset="-120"/>
-            </a:endParaRPr>
-          </a:p>
+              <a:t>Milestone 1 — Key Features</a:t>
+            </a:r>
+            <a:endParaRPr lang="en-US" sz="2800" dirty="0"/>
+          </a:p>
+        </p:txBody>
+      </p:sp>
+      <p:sp>
+        <p:nvSpPr>
+          <p:cNvPr id="11" name="Shape 9">
+            <a:extLst>
+              <a:ext uri="{FF2B5EF4-FFF2-40B4-BE49-F238E27FC236}">
+                <a16:creationId xmlns:a16="http://schemas.microsoft.com/office/drawing/2014/main" id="{E2E0334B-D1F8-5362-5E17-3E7FBFA5B1B8}"/>
+              </a:ext>
+            </a:extLst>
+          </p:cNvPr>
+          <p:cNvSpPr/>
+          <p:nvPr/>
+        </p:nvSpPr>
+        <p:spPr>
+          <a:xfrm>
+            <a:off x="365760" y="914400"/>
+            <a:ext cx="2834640" cy="3840480"/>
+          </a:xfrm>
+          <a:prstGeom prst="rect">
+            <a:avLst/>
+          </a:prstGeom>
+          <a:solidFill>
+            <a:srgbClr val="162A41"/>
+          </a:solidFill>
+          <a:ln w="12700">
+            <a:solidFill>
+              <a:srgbClr val="38BDF8"/>
+            </a:solidFill>
+            <a:prstDash val="solid"/>
+          </a:ln>
+          <a:effectLst>
+            <a:outerShdw blurRad="101600" dist="38100" dir="8100000" algn="bl" rotWithShape="0">
+              <a:srgbClr val="000000">
+                <a:alpha val="25000"/>
+              </a:srgbClr>
+            </a:outerShdw>
+          </a:effectLst>
+        </p:spPr>
+        <p:txBody>
+          <a:bodyPr/>
+          <a:lstStyle/>
+          <a:p>
+            <a:endParaRPr lang="en-IN"/>
+          </a:p>
+        </p:txBody>
+      </p:sp>
+      <p:sp>
+        <p:nvSpPr>
+          <p:cNvPr id="12" name="Shape 10">
+            <a:extLst>
+              <a:ext uri="{FF2B5EF4-FFF2-40B4-BE49-F238E27FC236}">
+                <a16:creationId xmlns:a16="http://schemas.microsoft.com/office/drawing/2014/main" id="{A26789EB-93D9-61A5-AE13-48AA2436B6DD}"/>
+              </a:ext>
+            </a:extLst>
+          </p:cNvPr>
+          <p:cNvSpPr/>
+          <p:nvPr/>
+        </p:nvSpPr>
+        <p:spPr>
+          <a:xfrm>
+            <a:off x="365760" y="914400"/>
+            <a:ext cx="2834640" cy="411480"/>
+          </a:xfrm>
+          <a:prstGeom prst="rect">
+            <a:avLst/>
+          </a:prstGeom>
+          <a:solidFill>
+            <a:srgbClr val="38BDF8"/>
+          </a:solidFill>
+          <a:ln w="12700">
+            <a:solidFill>
+              <a:srgbClr val="38BDF8"/>
+            </a:solidFill>
+            <a:prstDash val="solid"/>
+          </a:ln>
+        </p:spPr>
+        <p:txBody>
+          <a:bodyPr/>
+          <a:lstStyle/>
+          <a:p>
+            <a:endParaRPr lang="en-IN"/>
+          </a:p>
+        </p:txBody>
+      </p:sp>
+      <p:sp>
+        <p:nvSpPr>
+          <p:cNvPr id="13" name="Text 11">
+            <a:extLst>
+              <a:ext uri="{FF2B5EF4-FFF2-40B4-BE49-F238E27FC236}">
+                <a16:creationId xmlns:a16="http://schemas.microsoft.com/office/drawing/2014/main" id="{E8328066-D57B-67AC-7E92-17E3137AF827}"/>
+              </a:ext>
+            </a:extLst>
+          </p:cNvPr>
+          <p:cNvSpPr/>
+          <p:nvPr/>
+        </p:nvSpPr>
+        <p:spPr>
+          <a:xfrm>
+            <a:off x="457200" y="914400"/>
+            <a:ext cx="2651760" cy="411480"/>
+          </a:xfrm>
+          <a:prstGeom prst="rect">
+            <a:avLst/>
+          </a:prstGeom>
+          <a:noFill/>
+          <a:ln/>
+        </p:spPr>
+        <p:txBody>
+          <a:bodyPr wrap="square" rtlCol="0" anchor="ctr"/>
+          <a:lstStyle/>
           <a:p>
             <a:pPr marL="0" indent="0">
               <a:buNone/>
@@ -18744,22 +19631,199 @@
             <a:r>
               <a:rPr lang="en-US" sz="1200" b="1" dirty="0">
                 <a:solidFill>
-                  <a:schemeClr val="accent5">
-                    <a:lumMod val="75000"/>
-                  </a:schemeClr>
+                  <a:srgbClr val="FFFFFF"/>
                 </a:solidFill>
                 <a:latin typeface="Calibri" pitchFamily="34" charset="0"/>
                 <a:ea typeface="Calibri" pitchFamily="34" charset="-122"/>
                 <a:cs typeface="Calibri" pitchFamily="34" charset="-120"/>
               </a:rPr>
-              <a:t>File Upload:</a:t>
-            </a:r>
-          </a:p>
-          <a:p>
-            <a:pPr marL="0" indent="0">
-              <a:buNone/>
-            </a:pPr>
-            <a:endParaRPr lang="en-US" sz="2800" dirty="0"/>
+              <a:t>🔍  Data Inspection</a:t>
+            </a:r>
+            <a:endParaRPr lang="en-US" sz="1200" dirty="0"/>
+          </a:p>
+        </p:txBody>
+      </p:sp>
+      <p:sp>
+        <p:nvSpPr>
+          <p:cNvPr id="14" name="Text 12">
+            <a:extLst>
+              <a:ext uri="{FF2B5EF4-FFF2-40B4-BE49-F238E27FC236}">
+                <a16:creationId xmlns:a16="http://schemas.microsoft.com/office/drawing/2014/main" id="{5F9159F2-6609-286B-CF21-F498EF791B54}"/>
+              </a:ext>
+            </a:extLst>
+          </p:cNvPr>
+          <p:cNvSpPr/>
+          <p:nvPr/>
+        </p:nvSpPr>
+        <p:spPr>
+          <a:xfrm>
+            <a:off x="475488" y="1417320"/>
+            <a:ext cx="2606040" cy="594360"/>
+          </a:xfrm>
+          <a:prstGeom prst="rect">
+            <a:avLst/>
+          </a:prstGeom>
+          <a:noFill/>
+          <a:ln/>
+        </p:spPr>
+        <p:txBody>
+          <a:bodyPr wrap="square" rtlCol="0" anchor="ctr"/>
+          <a:lstStyle/>
+          <a:p>
+            <a:pPr marL="342900" indent="-342900">
+              <a:buSzPct val="100000"/>
+              <a:buChar char="•"/>
+            </a:pPr>
+            <a:r>
+              <a:rPr lang="en-US" sz="1100" dirty="0">
+                <a:solidFill>
+                  <a:srgbClr val="DCE8F5"/>
+                </a:solidFill>
+                <a:latin typeface="Calibri" pitchFamily="34" charset="0"/>
+                <a:ea typeface="Calibri" pitchFamily="34" charset="-122"/>
+                <a:cs typeface="Calibri" pitchFamily="34" charset="-120"/>
+              </a:rPr>
+              <a:t>Raw dataset preview — first 10 rows</a:t>
+            </a:r>
+            <a:endParaRPr lang="en-US" sz="1100" dirty="0"/>
+          </a:p>
+        </p:txBody>
+      </p:sp>
+      <p:sp>
+        <p:nvSpPr>
+          <p:cNvPr id="15" name="Text 13">
+            <a:extLst>
+              <a:ext uri="{FF2B5EF4-FFF2-40B4-BE49-F238E27FC236}">
+                <a16:creationId xmlns:a16="http://schemas.microsoft.com/office/drawing/2014/main" id="{68170753-E4AA-18BA-7F53-A4D6B387FA3E}"/>
+              </a:ext>
+            </a:extLst>
+          </p:cNvPr>
+          <p:cNvSpPr/>
+          <p:nvPr/>
+        </p:nvSpPr>
+        <p:spPr>
+          <a:xfrm>
+            <a:off x="475488" y="2075688"/>
+            <a:ext cx="2606040" cy="594360"/>
+          </a:xfrm>
+          <a:prstGeom prst="rect">
+            <a:avLst/>
+          </a:prstGeom>
+          <a:noFill/>
+          <a:ln/>
+        </p:spPr>
+        <p:txBody>
+          <a:bodyPr wrap="square" rtlCol="0" anchor="ctr"/>
+          <a:lstStyle/>
+          <a:p>
+            <a:pPr marL="342900" indent="-342900">
+              <a:buSzPct val="100000"/>
+              <a:buChar char="•"/>
+            </a:pPr>
+            <a:r>
+              <a:rPr lang="en-US" sz="1100" dirty="0">
+                <a:solidFill>
+                  <a:srgbClr val="DCE8F5"/>
+                </a:solidFill>
+                <a:latin typeface="Calibri" pitchFamily="34" charset="0"/>
+                <a:ea typeface="Calibri" pitchFamily="34" charset="-122"/>
+                <a:cs typeface="Calibri" pitchFamily="34" charset="-120"/>
+              </a:rPr>
+              <a:t>Missing values bar chart per column</a:t>
+            </a:r>
+            <a:endParaRPr lang="en-US" sz="1100" dirty="0"/>
+          </a:p>
+        </p:txBody>
+      </p:sp>
+      <p:sp>
+        <p:nvSpPr>
+          <p:cNvPr id="16" name="Text 14">
+            <a:extLst>
+              <a:ext uri="{FF2B5EF4-FFF2-40B4-BE49-F238E27FC236}">
+                <a16:creationId xmlns:a16="http://schemas.microsoft.com/office/drawing/2014/main" id="{337B1CCD-6483-32E7-4F98-D5FB5D32CF76}"/>
+              </a:ext>
+            </a:extLst>
+          </p:cNvPr>
+          <p:cNvSpPr/>
+          <p:nvPr/>
+        </p:nvSpPr>
+        <p:spPr>
+          <a:xfrm>
+            <a:off x="475488" y="2734056"/>
+            <a:ext cx="2606040" cy="594360"/>
+          </a:xfrm>
+          <a:prstGeom prst="rect">
+            <a:avLst/>
+          </a:prstGeom>
+          <a:noFill/>
+          <a:ln/>
+        </p:spPr>
+        <p:txBody>
+          <a:bodyPr wrap="square" rtlCol="0" anchor="ctr"/>
+          <a:lstStyle/>
+          <a:p>
+            <a:pPr marL="342900" indent="-342900">
+              <a:buSzPct val="100000"/>
+              <a:buChar char="•"/>
+            </a:pPr>
+            <a:r>
+              <a:rPr lang="en-US" sz="1100" dirty="0">
+                <a:solidFill>
+                  <a:srgbClr val="DCE8F5"/>
+                </a:solidFill>
+                <a:latin typeface="Calibri" pitchFamily="34" charset="0"/>
+                <a:ea typeface="Calibri" pitchFamily="34" charset="-122"/>
+                <a:cs typeface="Calibri" pitchFamily="34" charset="-120"/>
+              </a:rPr>
+              <a:t>Data types table for all columns</a:t>
+            </a:r>
+            <a:endParaRPr lang="en-US" sz="1100" dirty="0"/>
+          </a:p>
+        </p:txBody>
+      </p:sp>
+      <p:sp>
+        <p:nvSpPr>
+          <p:cNvPr id="17" name="Text 15">
+            <a:extLst>
+              <a:ext uri="{FF2B5EF4-FFF2-40B4-BE49-F238E27FC236}">
+                <a16:creationId xmlns:a16="http://schemas.microsoft.com/office/drawing/2014/main" id="{CA6245CE-DAB0-5EC9-0A1E-5428F6C68651}"/>
+              </a:ext>
+            </a:extLst>
+          </p:cNvPr>
+          <p:cNvSpPr/>
+          <p:nvPr/>
+        </p:nvSpPr>
+        <p:spPr>
+          <a:xfrm>
+            <a:off x="475488" y="3392424"/>
+            <a:ext cx="2606040" cy="594360"/>
+          </a:xfrm>
+          <a:prstGeom prst="rect">
+            <a:avLst/>
+          </a:prstGeom>
+          <a:noFill/>
+          <a:ln/>
+        </p:spPr>
+        <p:txBody>
+          <a:bodyPr wrap="square" rtlCol="0" anchor="ctr"/>
+          <a:lstStyle/>
+          <a:p>
+            <a:pPr marL="342900" indent="-342900">
+              <a:buSzPct val="100000"/>
+              <a:buChar char="•"/>
+            </a:pPr>
+            <a:r>
+              <a:rPr lang="en-US" sz="1100" dirty="0">
+                <a:solidFill>
+                  <a:srgbClr val="DCE8F5"/>
+                </a:solidFill>
+                <a:latin typeface="Calibri" pitchFamily="34" charset="0"/>
+                <a:ea typeface="Calibri" pitchFamily="34" charset="-122"/>
+                <a:cs typeface="Calibri" pitchFamily="34" charset="-120"/>
+              </a:rPr>
+              <a:t>4 summary metrics — rows, columns, missing, completeness</a:t>
+            </a:r>
+            <a:endParaRPr lang="en-US" sz="1100" dirty="0"/>
           </a:p>
         </p:txBody>
       </p:sp>
@@ -18768,7 +19832,7 @@
           <p:cNvPr id="25" name="Shape 23">
             <a:extLst>
               <a:ext uri="{FF2B5EF4-FFF2-40B4-BE49-F238E27FC236}">
-                <a16:creationId xmlns:a16="http://schemas.microsoft.com/office/drawing/2014/main" id="{F7A8E021-6AAF-F62A-2317-993376FCBC3C}"/>
+                <a16:creationId xmlns:a16="http://schemas.microsoft.com/office/drawing/2014/main" id="{0C908843-E3D7-6BF6-5E40-F75EBDC62B0D}"/>
               </a:ext>
             </a:extLst>
           </p:cNvPr>
@@ -18803,10 +19867,10 @@
       </p:sp>
       <p:pic>
         <p:nvPicPr>
-          <p:cNvPr id="27" name="Picture 26">
+          <p:cNvPr id="26" name="Picture 25">
             <a:extLst>
               <a:ext uri="{FF2B5EF4-FFF2-40B4-BE49-F238E27FC236}">
-                <a16:creationId xmlns:a16="http://schemas.microsoft.com/office/drawing/2014/main" id="{7C4E322A-13D5-7943-2F68-7E5EFC774E72}"/>
+                <a16:creationId xmlns:a16="http://schemas.microsoft.com/office/drawing/2014/main" id="{2AC68CFC-A017-90B7-55D4-AD4251324D9C}"/>
               </a:ext>
             </a:extLst>
           </p:cNvPr>
@@ -18823,8 +19887,8 @@
         </p:blipFill>
         <p:spPr>
           <a:xfrm>
-            <a:off x="1460664" y="1365422"/>
-            <a:ext cx="6412675" cy="3437303"/>
+            <a:off x="3291840" y="1208231"/>
+            <a:ext cx="5693194" cy="3051649"/>
           </a:xfrm>
           <a:prstGeom prst="rect">
             <a:avLst/>
@@ -18834,7 +19898,7 @@
     </p:spTree>
     <p:extLst>
       <p:ext uri="{BB962C8B-B14F-4D97-AF65-F5344CB8AC3E}">
-        <p14:creationId xmlns:p14="http://schemas.microsoft.com/office/powerpoint/2010/main" val="2890411296"/>
+        <p14:creationId xmlns:p14="http://schemas.microsoft.com/office/powerpoint/2010/main" val="2697774212"/>
       </p:ext>
     </p:extLst>
   </p:cSld>
@@ -18846,7 +19910,7 @@
 
 <file path=ppt/slides/slide6.xml><?xml version="1.0" encoding="utf-8"?>
 <p:sld xmlns:a="http://schemas.openxmlformats.org/drawingml/2006/main" xmlns:r="http://schemas.openxmlformats.org/officeDocument/2006/relationships" xmlns:p="http://schemas.openxmlformats.org/presentationml/2006/main">
-  <p:cSld>
+  <p:cSld name="Slide 4">
     <p:bg>
       <p:bgPr>
         <a:solidFill>
@@ -18857,13 +19921,7 @@
     </p:bg>
     <p:spTree>
       <p:nvGrpSpPr>
-        <p:cNvPr id="1" name="">
-          <a:extLst>
-            <a:ext uri="{FF2B5EF4-FFF2-40B4-BE49-F238E27FC236}">
-              <a16:creationId xmlns:a16="http://schemas.microsoft.com/office/drawing/2014/main" id="{73A11501-2EEA-E2A5-34E5-1B7A942039F7}"/>
-            </a:ext>
-          </a:extLst>
-        </p:cNvPr>
+        <p:cNvPr id="1" name=""/>
         <p:cNvGrpSpPr/>
         <p:nvPr/>
       </p:nvGrpSpPr>
@@ -18877,13 +19935,7 @@
       </p:grpSpPr>
       <p:sp>
         <p:nvSpPr>
-          <p:cNvPr id="2" name="Shape 0">
-            <a:extLst>
-              <a:ext uri="{FF2B5EF4-FFF2-40B4-BE49-F238E27FC236}">
-                <a16:creationId xmlns:a16="http://schemas.microsoft.com/office/drawing/2014/main" id="{4C56DC6B-1A0A-8E02-37D9-7E35876AA635}"/>
-              </a:ext>
-            </a:extLst>
-          </p:cNvPr>
+          <p:cNvPr id="2" name="Shape 0"/>
           <p:cNvSpPr/>
           <p:nvPr/>
         </p:nvSpPr>
@@ -18915,19 +19967,13 @@
       </p:sp>
       <p:sp>
         <p:nvSpPr>
-          <p:cNvPr id="3" name="Text 1">
-            <a:extLst>
-              <a:ext uri="{FF2B5EF4-FFF2-40B4-BE49-F238E27FC236}">
-                <a16:creationId xmlns:a16="http://schemas.microsoft.com/office/drawing/2014/main" id="{9D36F246-C1BD-F009-F698-18C1B241A07C}"/>
-              </a:ext>
-            </a:extLst>
-          </p:cNvPr>
-          <p:cNvSpPr/>
-          <p:nvPr/>
-        </p:nvSpPr>
-        <p:spPr>
-          <a:xfrm>
-            <a:off x="351510" y="731520"/>
+          <p:cNvPr id="3" name="Text 1"/>
+          <p:cNvSpPr/>
+          <p:nvPr/>
+        </p:nvSpPr>
+        <p:spPr>
+          <a:xfrm>
+            <a:off x="365760" y="182880"/>
             <a:ext cx="8412480" cy="548640"/>
           </a:xfrm>
           <a:prstGeom prst="rect">
@@ -18952,22 +19998,103 @@
                 <a:ea typeface="Calibri" pitchFamily="34" charset="-122"/>
                 <a:cs typeface="Calibri" pitchFamily="34" charset="-120"/>
               </a:rPr>
-              <a:t>Output Screenshots: </a:t>
-            </a:r>
-          </a:p>
-          <a:p>
-            <a:pPr marL="0" indent="0">
-              <a:buNone/>
-            </a:pPr>
-            <a:endParaRPr lang="en-US" sz="1200" b="1" dirty="0">
-              <a:solidFill>
-                <a:srgbClr val="A78BFA"/>
-              </a:solidFill>
-              <a:latin typeface="Calibri" pitchFamily="34" charset="0"/>
-              <a:ea typeface="Calibri" pitchFamily="34" charset="-122"/>
-              <a:cs typeface="Calibri" pitchFamily="34" charset="-120"/>
-            </a:endParaRPr>
-          </a:p>
+              <a:t>Milestone 1 — Key Features</a:t>
+            </a:r>
+            <a:endParaRPr lang="en-US" sz="2800" dirty="0"/>
+          </a:p>
+        </p:txBody>
+      </p:sp>
+      <p:sp>
+        <p:nvSpPr>
+          <p:cNvPr id="4" name="Shape 2"/>
+          <p:cNvSpPr/>
+          <p:nvPr/>
+        </p:nvSpPr>
+        <p:spPr>
+          <a:xfrm>
+            <a:off x="365760" y="914400"/>
+            <a:ext cx="2834640" cy="3840480"/>
+          </a:xfrm>
+          <a:prstGeom prst="rect">
+            <a:avLst/>
+          </a:prstGeom>
+          <a:solidFill>
+            <a:srgbClr val="162A41"/>
+          </a:solidFill>
+          <a:ln w="12700">
+            <a:solidFill>
+              <a:srgbClr val="A78BFA"/>
+            </a:solidFill>
+            <a:prstDash val="solid"/>
+          </a:ln>
+          <a:effectLst>
+            <a:outerShdw blurRad="101600" dist="38100" dir="8100000" algn="bl" rotWithShape="0">
+              <a:srgbClr val="000000">
+                <a:alpha val="25000"/>
+              </a:srgbClr>
+            </a:outerShdw>
+          </a:effectLst>
+        </p:spPr>
+        <p:txBody>
+          <a:bodyPr/>
+          <a:lstStyle/>
+          <a:p>
+            <a:endParaRPr lang="en-IN"/>
+          </a:p>
+        </p:txBody>
+      </p:sp>
+      <p:sp>
+        <p:nvSpPr>
+          <p:cNvPr id="5" name="Shape 3"/>
+          <p:cNvSpPr/>
+          <p:nvPr/>
+        </p:nvSpPr>
+        <p:spPr>
+          <a:xfrm>
+            <a:off x="365760" y="914400"/>
+            <a:ext cx="2834640" cy="411480"/>
+          </a:xfrm>
+          <a:prstGeom prst="rect">
+            <a:avLst/>
+          </a:prstGeom>
+          <a:solidFill>
+            <a:srgbClr val="A78BFA"/>
+          </a:solidFill>
+          <a:ln w="12700">
+            <a:solidFill>
+              <a:srgbClr val="A78BFA"/>
+            </a:solidFill>
+            <a:prstDash val="solid"/>
+          </a:ln>
+        </p:spPr>
+        <p:txBody>
+          <a:bodyPr/>
+          <a:lstStyle/>
+          <a:p>
+            <a:endParaRPr lang="en-IN" dirty="0"/>
+          </a:p>
+        </p:txBody>
+      </p:sp>
+      <p:sp>
+        <p:nvSpPr>
+          <p:cNvPr id="6" name="Text 4"/>
+          <p:cNvSpPr/>
+          <p:nvPr/>
+        </p:nvSpPr>
+        <p:spPr>
+          <a:xfrm>
+            <a:off x="457200" y="914400"/>
+            <a:ext cx="2651760" cy="411480"/>
+          </a:xfrm>
+          <a:prstGeom prst="rect">
+            <a:avLst/>
+          </a:prstGeom>
+          <a:noFill/>
+          <a:ln/>
+        </p:spPr>
+        <p:txBody>
+          <a:bodyPr wrap="square" rtlCol="0" anchor="ctr"/>
+          <a:lstStyle/>
           <a:p>
             <a:pPr marL="0" indent="0">
               <a:buNone/>
@@ -18975,34 +20102,181 @@
             <a:r>
               <a:rPr lang="en-US" sz="1200" b="1" dirty="0">
                 <a:solidFill>
-                  <a:schemeClr val="accent5">
-                    <a:lumMod val="75000"/>
-                  </a:schemeClr>
+                  <a:srgbClr val="FFFFFF"/>
                 </a:solidFill>
                 <a:latin typeface="Calibri" pitchFamily="34" charset="0"/>
                 <a:ea typeface="Calibri" pitchFamily="34" charset="-122"/>
                 <a:cs typeface="Calibri" pitchFamily="34" charset="-120"/>
               </a:rPr>
-              <a:t>Cleaned Dataset Preview: </a:t>
-            </a:r>
-          </a:p>
-          <a:p>
-            <a:pPr marL="0" indent="0">
-              <a:buNone/>
-            </a:pPr>
-            <a:endParaRPr lang="en-US" sz="2800" dirty="0"/>
-          </a:p>
-        </p:txBody>
-      </p:sp>
-      <p:sp>
-        <p:nvSpPr>
-          <p:cNvPr id="25" name="Shape 23">
-            <a:extLst>
-              <a:ext uri="{FF2B5EF4-FFF2-40B4-BE49-F238E27FC236}">
-                <a16:creationId xmlns:a16="http://schemas.microsoft.com/office/drawing/2014/main" id="{C706BE60-32BB-258A-B977-5F22374A3A52}"/>
-              </a:ext>
-            </a:extLst>
-          </p:cNvPr>
+              <a:t>🧹  Data Cleaning Engine</a:t>
+            </a:r>
+            <a:endParaRPr lang="en-US" sz="1200" dirty="0"/>
+          </a:p>
+        </p:txBody>
+      </p:sp>
+      <p:sp>
+        <p:nvSpPr>
+          <p:cNvPr id="7" name="Text 5"/>
+          <p:cNvSpPr/>
+          <p:nvPr/>
+        </p:nvSpPr>
+        <p:spPr>
+          <a:xfrm>
+            <a:off x="475488" y="1417320"/>
+            <a:ext cx="2606040" cy="594360"/>
+          </a:xfrm>
+          <a:prstGeom prst="rect">
+            <a:avLst/>
+          </a:prstGeom>
+          <a:noFill/>
+          <a:ln/>
+        </p:spPr>
+        <p:txBody>
+          <a:bodyPr wrap="square" rtlCol="0" anchor="ctr"/>
+          <a:lstStyle/>
+          <a:p>
+            <a:pPr marL="342900" indent="-342900">
+              <a:buSzPct val="100000"/>
+              <a:buChar char="•"/>
+            </a:pPr>
+            <a:r>
+              <a:rPr lang="en-US" sz="1100" dirty="0">
+                <a:solidFill>
+                  <a:srgbClr val="DCE8F5"/>
+                </a:solidFill>
+                <a:latin typeface="Calibri" pitchFamily="34" charset="0"/>
+                <a:ea typeface="Calibri" pitchFamily="34" charset="-122"/>
+                <a:cs typeface="Calibri" pitchFamily="34" charset="-120"/>
+              </a:rPr>
+              <a:t>Normalise date columns to proper format</a:t>
+            </a:r>
+            <a:endParaRPr lang="en-US" sz="1100" dirty="0"/>
+          </a:p>
+        </p:txBody>
+      </p:sp>
+      <p:sp>
+        <p:nvSpPr>
+          <p:cNvPr id="8" name="Text 6"/>
+          <p:cNvSpPr/>
+          <p:nvPr/>
+        </p:nvSpPr>
+        <p:spPr>
+          <a:xfrm>
+            <a:off x="475488" y="2075688"/>
+            <a:ext cx="2606040" cy="594360"/>
+          </a:xfrm>
+          <a:prstGeom prst="rect">
+            <a:avLst/>
+          </a:prstGeom>
+          <a:noFill/>
+          <a:ln/>
+        </p:spPr>
+        <p:txBody>
+          <a:bodyPr wrap="square" rtlCol="0" anchor="ctr"/>
+          <a:lstStyle/>
+          <a:p>
+            <a:pPr marL="342900" indent="-342900">
+              <a:buSzPct val="100000"/>
+              <a:buChar char="•"/>
+            </a:pPr>
+            <a:r>
+              <a:rPr lang="en-US" sz="1100" dirty="0">
+                <a:solidFill>
+                  <a:srgbClr val="DCE8F5"/>
+                </a:solidFill>
+                <a:latin typeface="Calibri" pitchFamily="34" charset="0"/>
+                <a:ea typeface="Calibri" pitchFamily="34" charset="-122"/>
+                <a:cs typeface="Calibri" pitchFamily="34" charset="-120"/>
+              </a:rPr>
+              <a:t>Interpolate missing numeric values (linear method)</a:t>
+            </a:r>
+            <a:endParaRPr lang="en-US" sz="1100" dirty="0"/>
+          </a:p>
+        </p:txBody>
+      </p:sp>
+      <p:sp>
+        <p:nvSpPr>
+          <p:cNvPr id="9" name="Text 7"/>
+          <p:cNvSpPr/>
+          <p:nvPr/>
+        </p:nvSpPr>
+        <p:spPr>
+          <a:xfrm>
+            <a:off x="475488" y="2734056"/>
+            <a:ext cx="2606040" cy="594360"/>
+          </a:xfrm>
+          <a:prstGeom prst="rect">
+            <a:avLst/>
+          </a:prstGeom>
+          <a:noFill/>
+          <a:ln/>
+        </p:spPr>
+        <p:txBody>
+          <a:bodyPr wrap="square" rtlCol="0" anchor="ctr"/>
+          <a:lstStyle/>
+          <a:p>
+            <a:pPr marL="342900" indent="-342900">
+              <a:buSzPct val="100000"/>
+              <a:buChar char="•"/>
+            </a:pPr>
+            <a:r>
+              <a:rPr lang="en-US" sz="1100" dirty="0">
+                <a:solidFill>
+                  <a:srgbClr val="DCE8F5"/>
+                </a:solidFill>
+                <a:latin typeface="Calibri" pitchFamily="34" charset="0"/>
+                <a:ea typeface="Calibri" pitchFamily="34" charset="-122"/>
+                <a:cs typeface="Calibri" pitchFamily="34" charset="-120"/>
+              </a:rPr>
+              <a:t>Fill empty text columns with 'Unknown'</a:t>
+            </a:r>
+            <a:endParaRPr lang="en-US" sz="1100" dirty="0"/>
+          </a:p>
+        </p:txBody>
+      </p:sp>
+      <p:sp>
+        <p:nvSpPr>
+          <p:cNvPr id="10" name="Text 8"/>
+          <p:cNvSpPr/>
+          <p:nvPr/>
+        </p:nvSpPr>
+        <p:spPr>
+          <a:xfrm>
+            <a:off x="475488" y="3392424"/>
+            <a:ext cx="2606040" cy="594360"/>
+          </a:xfrm>
+          <a:prstGeom prst="rect">
+            <a:avLst/>
+          </a:prstGeom>
+          <a:noFill/>
+          <a:ln/>
+        </p:spPr>
+        <p:txBody>
+          <a:bodyPr wrap="square" rtlCol="0" anchor="ctr"/>
+          <a:lstStyle/>
+          <a:p>
+            <a:pPr marL="342900" indent="-342900">
+              <a:buSzPct val="100000"/>
+              <a:buChar char="•"/>
+            </a:pPr>
+            <a:r>
+              <a:rPr lang="en-US" sz="1100" dirty="0">
+                <a:solidFill>
+                  <a:srgbClr val="DCE8F5"/>
+                </a:solidFill>
+                <a:latin typeface="Calibri" pitchFamily="34" charset="0"/>
+                <a:ea typeface="Calibri" pitchFamily="34" charset="-122"/>
+                <a:cs typeface="Calibri" pitchFamily="34" charset="-120"/>
+              </a:rPr>
+              <a:t>Download cleaned CSV after processing</a:t>
+            </a:r>
+            <a:endParaRPr lang="en-US" sz="1100" dirty="0"/>
+          </a:p>
+        </p:txBody>
+      </p:sp>
+      <p:sp>
+        <p:nvSpPr>
+          <p:cNvPr id="25" name="Shape 23"/>
           <p:cNvSpPr/>
           <p:nvPr/>
         </p:nvSpPr>
@@ -19034,10 +20308,10 @@
       </p:sp>
       <p:pic>
         <p:nvPicPr>
-          <p:cNvPr id="5" name="Picture 4">
+          <p:cNvPr id="26" name="Picture 25">
             <a:extLst>
               <a:ext uri="{FF2B5EF4-FFF2-40B4-BE49-F238E27FC236}">
-                <a16:creationId xmlns:a16="http://schemas.microsoft.com/office/drawing/2014/main" id="{8C5020FA-404D-A749-3E9B-23815BF51928}"/>
+                <a16:creationId xmlns:a16="http://schemas.microsoft.com/office/drawing/2014/main" id="{66EFFBF5-BD0A-9834-86ED-E0EA0038E035}"/>
               </a:ext>
             </a:extLst>
           </p:cNvPr>
@@ -19054,8 +20328,8 @@
         </p:blipFill>
         <p:spPr>
           <a:xfrm>
-            <a:off x="1384069" y="1361328"/>
-            <a:ext cx="6347361" cy="3393502"/>
+            <a:off x="3310128" y="1371650"/>
+            <a:ext cx="5686772" cy="3040330"/>
           </a:xfrm>
           <a:prstGeom prst="rect">
             <a:avLst/>
@@ -19063,11 +20337,6 @@
         </p:spPr>
       </p:pic>
     </p:spTree>
-    <p:extLst>
-      <p:ext uri="{BB962C8B-B14F-4D97-AF65-F5344CB8AC3E}">
-        <p14:creationId xmlns:p14="http://schemas.microsoft.com/office/powerpoint/2010/main" val="3701883429"/>
-      </p:ext>
-    </p:extLst>
   </p:cSld>
   <p:clrMapOvr>
     <a:masterClrMapping/>
@@ -19091,7 +20360,7 @@
         <p:cNvPr id="1" name="">
           <a:extLst>
             <a:ext uri="{FF2B5EF4-FFF2-40B4-BE49-F238E27FC236}">
-              <a16:creationId xmlns:a16="http://schemas.microsoft.com/office/drawing/2014/main" id="{BD23E50E-7F44-3148-82DA-A6101B4CBA0F}"/>
+              <a16:creationId xmlns:a16="http://schemas.microsoft.com/office/drawing/2014/main" id="{56B7160E-63E9-8EF4-3064-DCBB0018DB80}"/>
             </a:ext>
           </a:extLst>
         </p:cNvPr>
@@ -19111,7 +20380,7 @@
           <p:cNvPr id="2" name="Shape 0">
             <a:extLst>
               <a:ext uri="{FF2B5EF4-FFF2-40B4-BE49-F238E27FC236}">
-                <a16:creationId xmlns:a16="http://schemas.microsoft.com/office/drawing/2014/main" id="{6F974067-E1E9-A34D-C5BA-B06E323327E0}"/>
+                <a16:creationId xmlns:a16="http://schemas.microsoft.com/office/drawing/2014/main" id="{89CD397C-A389-20F7-946B-9CA98C158A84}"/>
               </a:ext>
             </a:extLst>
           </p:cNvPr>
@@ -19149,7 +20418,7 @@
           <p:cNvPr id="3" name="Text 1">
             <a:extLst>
               <a:ext uri="{FF2B5EF4-FFF2-40B4-BE49-F238E27FC236}">
-                <a16:creationId xmlns:a16="http://schemas.microsoft.com/office/drawing/2014/main" id="{21DEF981-95D6-5136-624A-F3BC1C22613F}"/>
+                <a16:creationId xmlns:a16="http://schemas.microsoft.com/office/drawing/2014/main" id="{F3D743A2-2D66-4C09-6877-709B65FC0FA6}"/>
               </a:ext>
             </a:extLst>
           </p:cNvPr>
@@ -19158,7 +20427,7 @@
         </p:nvSpPr>
         <p:spPr>
           <a:xfrm>
-            <a:off x="351510" y="731520"/>
+            <a:off x="365760" y="182880"/>
             <a:ext cx="8412480" cy="548640"/>
           </a:xfrm>
           <a:prstGeom prst="rect">
@@ -19183,22 +20452,121 @@
                 <a:ea typeface="Calibri" pitchFamily="34" charset="-122"/>
                 <a:cs typeface="Calibri" pitchFamily="34" charset="-120"/>
               </a:rPr>
-              <a:t>Output Screenshots: </a:t>
-            </a:r>
-          </a:p>
-          <a:p>
-            <a:pPr marL="0" indent="0">
-              <a:buNone/>
-            </a:pPr>
-            <a:endParaRPr lang="en-US" sz="1200" b="1" dirty="0">
-              <a:solidFill>
-                <a:srgbClr val="A78BFA"/>
-              </a:solidFill>
-              <a:latin typeface="Calibri" pitchFamily="34" charset="0"/>
-              <a:ea typeface="Calibri" pitchFamily="34" charset="-122"/>
-              <a:cs typeface="Calibri" pitchFamily="34" charset="-120"/>
-            </a:endParaRPr>
-          </a:p>
+              <a:t>Milestone 1 — Key Features</a:t>
+            </a:r>
+            <a:endParaRPr lang="en-US" sz="2800" dirty="0"/>
+          </a:p>
+        </p:txBody>
+      </p:sp>
+      <p:sp>
+        <p:nvSpPr>
+          <p:cNvPr id="18" name="Shape 16">
+            <a:extLst>
+              <a:ext uri="{FF2B5EF4-FFF2-40B4-BE49-F238E27FC236}">
+                <a16:creationId xmlns:a16="http://schemas.microsoft.com/office/drawing/2014/main" id="{1C4F59AF-FB5A-18DD-16C1-08FEE7EE87F6}"/>
+              </a:ext>
+            </a:extLst>
+          </p:cNvPr>
+          <p:cNvSpPr/>
+          <p:nvPr/>
+        </p:nvSpPr>
+        <p:spPr>
+          <a:xfrm>
+            <a:off x="365760" y="912736"/>
+            <a:ext cx="2834640" cy="3840480"/>
+          </a:xfrm>
+          <a:prstGeom prst="rect">
+            <a:avLst/>
+          </a:prstGeom>
+          <a:solidFill>
+            <a:srgbClr val="162A41"/>
+          </a:solidFill>
+          <a:ln w="12700">
+            <a:solidFill>
+              <a:srgbClr val="10B981"/>
+            </a:solidFill>
+            <a:prstDash val="solid"/>
+          </a:ln>
+          <a:effectLst>
+            <a:outerShdw blurRad="101600" dist="38100" dir="8100000" algn="bl" rotWithShape="0">
+              <a:srgbClr val="000000">
+                <a:alpha val="25000"/>
+              </a:srgbClr>
+            </a:outerShdw>
+          </a:effectLst>
+        </p:spPr>
+        <p:txBody>
+          <a:bodyPr/>
+          <a:lstStyle/>
+          <a:p>
+            <a:endParaRPr lang="en-IN"/>
+          </a:p>
+        </p:txBody>
+      </p:sp>
+      <p:sp>
+        <p:nvSpPr>
+          <p:cNvPr id="19" name="Shape 17">
+            <a:extLst>
+              <a:ext uri="{FF2B5EF4-FFF2-40B4-BE49-F238E27FC236}">
+                <a16:creationId xmlns:a16="http://schemas.microsoft.com/office/drawing/2014/main" id="{C8C1FAAD-5DD6-7A14-F1A7-4B0ABFDE4999}"/>
+              </a:ext>
+            </a:extLst>
+          </p:cNvPr>
+          <p:cNvSpPr/>
+          <p:nvPr/>
+        </p:nvSpPr>
+        <p:spPr>
+          <a:xfrm>
+            <a:off x="365760" y="912736"/>
+            <a:ext cx="2834640" cy="411480"/>
+          </a:xfrm>
+          <a:prstGeom prst="rect">
+            <a:avLst/>
+          </a:prstGeom>
+          <a:solidFill>
+            <a:srgbClr val="10B981"/>
+          </a:solidFill>
+          <a:ln w="12700">
+            <a:solidFill>
+              <a:srgbClr val="10B981"/>
+            </a:solidFill>
+            <a:prstDash val="solid"/>
+          </a:ln>
+        </p:spPr>
+        <p:txBody>
+          <a:bodyPr/>
+          <a:lstStyle/>
+          <a:p>
+            <a:endParaRPr lang="en-IN"/>
+          </a:p>
+        </p:txBody>
+      </p:sp>
+      <p:sp>
+        <p:nvSpPr>
+          <p:cNvPr id="20" name="Text 18">
+            <a:extLst>
+              <a:ext uri="{FF2B5EF4-FFF2-40B4-BE49-F238E27FC236}">
+                <a16:creationId xmlns:a16="http://schemas.microsoft.com/office/drawing/2014/main" id="{6A1A31CC-8EDE-C66D-7643-3917BA4BE88D}"/>
+              </a:ext>
+            </a:extLst>
+          </p:cNvPr>
+          <p:cNvSpPr/>
+          <p:nvPr/>
+        </p:nvSpPr>
+        <p:spPr>
+          <a:xfrm>
+            <a:off x="457200" y="912736"/>
+            <a:ext cx="2651760" cy="411480"/>
+          </a:xfrm>
+          <a:prstGeom prst="rect">
+            <a:avLst/>
+          </a:prstGeom>
+          <a:noFill/>
+          <a:ln/>
+        </p:spPr>
+        <p:txBody>
+          <a:bodyPr wrap="square" rtlCol="0" anchor="ctr"/>
+          <a:lstStyle/>
           <a:p>
             <a:pPr marL="0" indent="0">
               <a:buNone/>
@@ -19206,22 +20574,199 @@
             <a:r>
               <a:rPr lang="en-US" sz="1200" b="1" dirty="0">
                 <a:solidFill>
-                  <a:schemeClr val="accent5">
-                    <a:lumMod val="75000"/>
-                  </a:schemeClr>
+                  <a:srgbClr val="FFFFFF"/>
                 </a:solidFill>
                 <a:latin typeface="Calibri" pitchFamily="34" charset="0"/>
                 <a:ea typeface="Calibri" pitchFamily="34" charset="-122"/>
                 <a:cs typeface="Calibri" pitchFamily="34" charset="-120"/>
               </a:rPr>
-              <a:t>Box Plot and Histogram </a:t>
-            </a:r>
-          </a:p>
-          <a:p>
-            <a:pPr marL="0" indent="0">
-              <a:buNone/>
-            </a:pPr>
-            <a:endParaRPr lang="en-US" sz="2800" dirty="0"/>
+              <a:t>📈  Outlier Detection</a:t>
+            </a:r>
+            <a:endParaRPr lang="en-US" sz="1200" dirty="0"/>
+          </a:p>
+        </p:txBody>
+      </p:sp>
+      <p:sp>
+        <p:nvSpPr>
+          <p:cNvPr id="21" name="Text 19">
+            <a:extLst>
+              <a:ext uri="{FF2B5EF4-FFF2-40B4-BE49-F238E27FC236}">
+                <a16:creationId xmlns:a16="http://schemas.microsoft.com/office/drawing/2014/main" id="{391EBC83-28F1-D90F-A1DF-731655878A35}"/>
+              </a:ext>
+            </a:extLst>
+          </p:cNvPr>
+          <p:cNvSpPr/>
+          <p:nvPr/>
+        </p:nvSpPr>
+        <p:spPr>
+          <a:xfrm>
+            <a:off x="475488" y="1415656"/>
+            <a:ext cx="2606040" cy="594360"/>
+          </a:xfrm>
+          <a:prstGeom prst="rect">
+            <a:avLst/>
+          </a:prstGeom>
+          <a:noFill/>
+          <a:ln/>
+        </p:spPr>
+        <p:txBody>
+          <a:bodyPr wrap="square" rtlCol="0" anchor="ctr"/>
+          <a:lstStyle/>
+          <a:p>
+            <a:pPr marL="342900" indent="-342900">
+              <a:buSzPct val="100000"/>
+              <a:buChar char="•"/>
+            </a:pPr>
+            <a:r>
+              <a:rPr lang="en-US" sz="1100" dirty="0">
+                <a:solidFill>
+                  <a:srgbClr val="DCE8F5"/>
+                </a:solidFill>
+                <a:latin typeface="Calibri" pitchFamily="34" charset="0"/>
+                <a:ea typeface="Calibri" pitchFamily="34" charset="-122"/>
+                <a:cs typeface="Calibri" pitchFamily="34" charset="-120"/>
+              </a:rPr>
+              <a:t>IQR method — Q1, Q3, and 1.5×IQR rule</a:t>
+            </a:r>
+            <a:endParaRPr lang="en-US" sz="1100" dirty="0"/>
+          </a:p>
+        </p:txBody>
+      </p:sp>
+      <p:sp>
+        <p:nvSpPr>
+          <p:cNvPr id="22" name="Text 20">
+            <a:extLst>
+              <a:ext uri="{FF2B5EF4-FFF2-40B4-BE49-F238E27FC236}">
+                <a16:creationId xmlns:a16="http://schemas.microsoft.com/office/drawing/2014/main" id="{164BDA08-FCC1-1370-4937-A4ADE685CD86}"/>
+              </a:ext>
+            </a:extLst>
+          </p:cNvPr>
+          <p:cNvSpPr/>
+          <p:nvPr/>
+        </p:nvSpPr>
+        <p:spPr>
+          <a:xfrm>
+            <a:off x="475488" y="2074024"/>
+            <a:ext cx="2606040" cy="594360"/>
+          </a:xfrm>
+          <a:prstGeom prst="rect">
+            <a:avLst/>
+          </a:prstGeom>
+          <a:noFill/>
+          <a:ln/>
+        </p:spPr>
+        <p:txBody>
+          <a:bodyPr wrap="square" rtlCol="0" anchor="ctr"/>
+          <a:lstStyle/>
+          <a:p>
+            <a:pPr marL="342900" indent="-342900">
+              <a:buSzPct val="100000"/>
+              <a:buChar char="•"/>
+            </a:pPr>
+            <a:r>
+              <a:rPr lang="en-US" sz="1100" dirty="0">
+                <a:solidFill>
+                  <a:srgbClr val="DCE8F5"/>
+                </a:solidFill>
+                <a:latin typeface="Calibri" pitchFamily="34" charset="0"/>
+                <a:ea typeface="Calibri" pitchFamily="34" charset="-122"/>
+                <a:cs typeface="Calibri" pitchFamily="34" charset="-120"/>
+              </a:rPr>
+              <a:t>Box plot — shows normal range and outlier dots</a:t>
+            </a:r>
+            <a:endParaRPr lang="en-US" sz="1100" dirty="0"/>
+          </a:p>
+        </p:txBody>
+      </p:sp>
+      <p:sp>
+        <p:nvSpPr>
+          <p:cNvPr id="23" name="Text 21">
+            <a:extLst>
+              <a:ext uri="{FF2B5EF4-FFF2-40B4-BE49-F238E27FC236}">
+                <a16:creationId xmlns:a16="http://schemas.microsoft.com/office/drawing/2014/main" id="{6C258D01-279C-371A-DA86-B8C3829927D2}"/>
+              </a:ext>
+            </a:extLst>
+          </p:cNvPr>
+          <p:cNvSpPr/>
+          <p:nvPr/>
+        </p:nvSpPr>
+        <p:spPr>
+          <a:xfrm>
+            <a:off x="475488" y="2732392"/>
+            <a:ext cx="2606040" cy="594360"/>
+          </a:xfrm>
+          <a:prstGeom prst="rect">
+            <a:avLst/>
+          </a:prstGeom>
+          <a:noFill/>
+          <a:ln/>
+        </p:spPr>
+        <p:txBody>
+          <a:bodyPr wrap="square" rtlCol="0" anchor="ctr"/>
+          <a:lstStyle/>
+          <a:p>
+            <a:pPr marL="342900" indent="-342900">
+              <a:buSzPct val="100000"/>
+              <a:buChar char="•"/>
+            </a:pPr>
+            <a:r>
+              <a:rPr lang="en-US" sz="1100" dirty="0">
+                <a:solidFill>
+                  <a:srgbClr val="DCE8F5"/>
+                </a:solidFill>
+                <a:latin typeface="Calibri" pitchFamily="34" charset="0"/>
+                <a:ea typeface="Calibri" pitchFamily="34" charset="-122"/>
+                <a:cs typeface="Calibri" pitchFamily="34" charset="-120"/>
+              </a:rPr>
+              <a:t>Histogram — frequency distribution with outlier zones</a:t>
+            </a:r>
+            <a:endParaRPr lang="en-US" sz="1100" dirty="0"/>
+          </a:p>
+        </p:txBody>
+      </p:sp>
+      <p:sp>
+        <p:nvSpPr>
+          <p:cNvPr id="24" name="Text 22">
+            <a:extLst>
+              <a:ext uri="{FF2B5EF4-FFF2-40B4-BE49-F238E27FC236}">
+                <a16:creationId xmlns:a16="http://schemas.microsoft.com/office/drawing/2014/main" id="{4442202A-302D-D56F-D003-791AC979E1F5}"/>
+              </a:ext>
+            </a:extLst>
+          </p:cNvPr>
+          <p:cNvSpPr/>
+          <p:nvPr/>
+        </p:nvSpPr>
+        <p:spPr>
+          <a:xfrm>
+            <a:off x="475488" y="3390760"/>
+            <a:ext cx="2606040" cy="594360"/>
+          </a:xfrm>
+          <a:prstGeom prst="rect">
+            <a:avLst/>
+          </a:prstGeom>
+          <a:noFill/>
+          <a:ln/>
+        </p:spPr>
+        <p:txBody>
+          <a:bodyPr wrap="square" rtlCol="0" anchor="ctr"/>
+          <a:lstStyle/>
+          <a:p>
+            <a:pPr marL="342900" indent="-342900">
+              <a:buSzPct val="100000"/>
+              <a:buChar char="•"/>
+            </a:pPr>
+            <a:r>
+              <a:rPr lang="en-US" sz="1100" dirty="0">
+                <a:solidFill>
+                  <a:srgbClr val="DCE8F5"/>
+                </a:solidFill>
+                <a:latin typeface="Calibri" pitchFamily="34" charset="0"/>
+                <a:ea typeface="Calibri" pitchFamily="34" charset="-122"/>
+                <a:cs typeface="Calibri" pitchFamily="34" charset="-120"/>
+              </a:rPr>
+              <a:t>Mean and Median reference lines on histogram</a:t>
+            </a:r>
+            <a:endParaRPr lang="en-US" sz="1100" dirty="0"/>
           </a:p>
         </p:txBody>
       </p:sp>
@@ -19230,7 +20775,7 @@
           <p:cNvPr id="25" name="Shape 23">
             <a:extLst>
               <a:ext uri="{FF2B5EF4-FFF2-40B4-BE49-F238E27FC236}">
-                <a16:creationId xmlns:a16="http://schemas.microsoft.com/office/drawing/2014/main" id="{42333C5A-BC82-5B58-9404-0C6644F6A3D6}"/>
+                <a16:creationId xmlns:a16="http://schemas.microsoft.com/office/drawing/2014/main" id="{9BA846EB-E8DD-B3F2-A788-82642F3032F5}"/>
               </a:ext>
             </a:extLst>
           </p:cNvPr>
@@ -19265,10 +20810,10 @@
       </p:sp>
       <p:pic>
         <p:nvPicPr>
-          <p:cNvPr id="6" name="Picture 5">
+          <p:cNvPr id="26" name="Picture 25">
             <a:extLst>
               <a:ext uri="{FF2B5EF4-FFF2-40B4-BE49-F238E27FC236}">
-                <a16:creationId xmlns:a16="http://schemas.microsoft.com/office/drawing/2014/main" id="{060D6ABA-FA9E-3B1B-DC5E-119143742906}"/>
+                <a16:creationId xmlns:a16="http://schemas.microsoft.com/office/drawing/2014/main" id="{1F4B0EB1-3B1F-0D42-0625-C417558EF6BA}"/>
               </a:ext>
             </a:extLst>
           </p:cNvPr>
@@ -19285,8 +20830,8 @@
         </p:blipFill>
         <p:spPr>
           <a:xfrm>
-            <a:off x="1374569" y="1280160"/>
-            <a:ext cx="6394862" cy="3556326"/>
+            <a:off x="3415678" y="1415656"/>
+            <a:ext cx="5433069" cy="3021452"/>
           </a:xfrm>
           <a:prstGeom prst="rect">
             <a:avLst/>
@@ -19296,7 +20841,7 @@
     </p:spTree>
     <p:extLst>
       <p:ext uri="{BB962C8B-B14F-4D97-AF65-F5344CB8AC3E}">
-        <p14:creationId xmlns:p14="http://schemas.microsoft.com/office/powerpoint/2010/main" val="1445459803"/>
+        <p14:creationId xmlns:p14="http://schemas.microsoft.com/office/powerpoint/2010/main" val="3515958422"/>
       </p:ext>
     </p:extLst>
   </p:cSld>
